--- a/ClassMaterials/MapsAndObjectIntro/Slides/Part5-UsingDebugger.pptx
+++ b/ClassMaterials/MapsAndObjectIntro/Slides/Part5-UsingDebugger.pptx
@@ -5,7 +5,7 @@
     <p:sldMasterId id="2147483648" r:id="rId4"/>
   </p:sldMasterIdLst>
   <p:notesMasterIdLst>
-    <p:notesMasterId r:id="rId24"/>
+    <p:notesMasterId r:id="rId20"/>
   </p:notesMasterIdLst>
   <p:sldIdLst>
     <p:sldId id="256" r:id="rId5"/>
@@ -14,19 +14,15 @@
     <p:sldId id="341" r:id="rId8"/>
     <p:sldId id="309" r:id="rId9"/>
     <p:sldId id="308" r:id="rId10"/>
-    <p:sldId id="337" r:id="rId11"/>
-    <p:sldId id="338" r:id="rId12"/>
-    <p:sldId id="261" r:id="rId13"/>
-    <p:sldId id="339" r:id="rId14"/>
-    <p:sldId id="262" r:id="rId15"/>
-    <p:sldId id="306" r:id="rId16"/>
-    <p:sldId id="307" r:id="rId17"/>
-    <p:sldId id="305" r:id="rId18"/>
-    <p:sldId id="342" r:id="rId19"/>
-    <p:sldId id="344" r:id="rId20"/>
-    <p:sldId id="347" r:id="rId21"/>
-    <p:sldId id="345" r:id="rId22"/>
-    <p:sldId id="346" r:id="rId23"/>
+    <p:sldId id="261" r:id="rId11"/>
+    <p:sldId id="306" r:id="rId12"/>
+    <p:sldId id="307" r:id="rId13"/>
+    <p:sldId id="305" r:id="rId14"/>
+    <p:sldId id="342" r:id="rId15"/>
+    <p:sldId id="344" r:id="rId16"/>
+    <p:sldId id="347" r:id="rId17"/>
+    <p:sldId id="345" r:id="rId18"/>
+    <p:sldId id="346" r:id="rId19"/>
   </p:sldIdLst>
   <p:sldSz cx="9144000" cy="6858000" type="screen4x3"/>
   <p:notesSz cx="6858000" cy="9144000"/>
@@ -187,146 +183,6 @@
 </pc:chgInfo>
 </file>
 
-<file path=ppt/ink/ink1.xml><?xml version="1.0" encoding="utf-8"?>
-<inkml:ink xmlns:inkml="http://www.w3.org/2003/InkML">
-  <inkml:definitions>
-    <inkml:context xml:id="ctx0">
-      <inkml:inkSource xml:id="inkSrc0">
-        <inkml:traceFormat>
-          <inkml:channel name="X" type="integer" min="-2.14748E9" max="2.14748E9" units="cm"/>
-          <inkml:channel name="Y" type="integer" min="-2.14748E9" max="2.14748E9" units="cm"/>
-          <inkml:channel name="F" type="integer" max="32767" units="dev"/>
-        </inkml:traceFormat>
-        <inkml:channelProperties>
-          <inkml:channelProperty channel="X" name="resolution" value="1000" units="1/cm"/>
-          <inkml:channelProperty channel="Y" name="resolution" value="1000" units="1/cm"/>
-          <inkml:channelProperty channel="F" name="resolution" value="0" units="1/dev"/>
-        </inkml:channelProperties>
-      </inkml:inkSource>
-      <inkml:timestamp xml:id="ts0" timeString="2022-12-04T23:30:13.054"/>
-    </inkml:context>
-    <inkml:brush xml:id="br0">
-      <inkml:brushProperty name="width" value="0.05" units="cm"/>
-      <inkml:brushProperty name="height" value="0.05" units="cm"/>
-      <inkml:brushProperty name="color" value="#E71224"/>
-    </inkml:brush>
-  </inkml:definitions>
-  <inkml:trace contextRef="#ctx0" brushRef="#br0">0 1611 24575,'0'2'0,"1"0"0,-1-1 0,0 1 0,0-1 0,0 1 0,1-1 0,-1 1 0,1 0 0,-1-1 0,1 1 0,0-1 0,-1 0 0,1 1 0,0-1 0,0 0 0,0 1 0,0-1 0,0 0 0,1 0 0,-1 0 0,0 0 0,0 0 0,3 1 0,0 0 0,0 0 0,0-1 0,0 1 0,0-1 0,1 0 0,-1 0 0,0-1 0,8 1 0,4-1 0,0-1 0,0-1 0,30-6 0,46-14 0,163-18 0,-228 38 0,-1-2 0,0 0 0,0-2 0,0-1 0,30-12 0,-42 13 0,1-1 0,-2-1 0,1 0 0,-1 0 0,0-2 0,-1 1 0,0-2 0,-1 0 0,0 0 0,11-15 0,17-21 0,1 1 0,63-53 0,-81 81 0,1 1 0,37-20 0,-31 20 0,38-29 0,79-91 0,-106 96 0,2 2 0,1 1 0,50-32 0,-34 32 0,-11 4 0,3 4 0,0 1 0,61-24 0,-2 5 0,-83 34 0,1 1 0,0 1 0,1 2 0,0 1 0,1 1 0,31-4 0,47-2 0,200-55 0,-250 56 0,1 4 0,87-3 0,71-12 0,-144 13 0,1 3 0,129 4 0,-190 3 0,1 0 0,-1-1 0,0-1 0,0 0 0,0-1 0,18-8 0,-15 6 0,0 1 0,0 0 0,26-4 0,12 6 0,73 4 0,38-3 0,-162 2 0,-1 0 0,1 0 0,0 0 0,-1-1 0,1 1 0,0-1 0,-1 0 0,1 0 0,-1 0 0,0 0 0,1 0 0,-1-1 0,0 1 0,0-1 0,0 1 0,4-4 0,-5 4 0,0-1 0,-1 0 0,1 1 0,0-1 0,0 1 0,-1-1 0,1 0 0,-1 1 0,0-1 0,1 0 0,-1 0 0,0 1 0,0-1 0,0 0 0,0 0 0,0 0 0,0 1 0,-2-4 0,0-2 0,0 1 0,-1 0 0,0 0 0,0 0 0,0 0 0,-1 1 0,0-1 0,0 1 0,-1 0 0,1 0 0,-9-7 0,-29-18 0,-88-49 0,107 71 0,23 8 0,0 0 0,0 0 0,-1 0 0,1 0 0,0 1 0,0-1 0,0 0 0,-1 0 0,1 0 0,0 0 0,0 0 0,0 0 0,0 1 0,-1-1 0,1 0 0,0 0 0,0 0 0,0 1 0,0-1 0,0 0 0,-1 0 0,1 0 0,0 1 0,0-1 0,0 0 0,0 0 0,0 1 0,0-1 0,0 0 0,0 0 0,0 0 0,0 1 0,0-1 0,0 0 0,0 0 0,0 1 0,0-1 0,0 0 0,0 0 0,0 0 0,1 1 0,-1-1 0,0 0 0,0 1 0,2 2 0,0 1 0,0 0 0,0 0 0,1-1 0,-1 0 0,1 1 0,0-1 0,4 4 0,79 57 0,-65-50 0,0 1 0,-1 1 0,0 1 0,21 23 0,-38-35 0,1-1 0,-1 2 0,0-1 0,0 0 0,-1 0 0,1 1 0,-1 0 0,-1-1 0,1 1 0,-1 0 0,0 0 0,0 0 0,0 0 0,-1 0 0,0 0 0,0 0 0,-1 0 0,1 0 0,-4 9 0,2-5 0,-1-1 0,-1 0 0,1 0 0,-1-1 0,-1 1 0,0-1 0,0 0 0,-1 0 0,0 0 0,0-1 0,-10 10 0,-14 13-214,-32 41-1,47-53-721,-9 11-5890</inkml:trace>
-</inkml:ink>
-</file>
-
-<file path=ppt/ink/ink2.xml><?xml version="1.0" encoding="utf-8"?>
-<inkml:ink xmlns:inkml="http://www.w3.org/2003/InkML">
-  <inkml:definitions>
-    <inkml:context xml:id="ctx0">
-      <inkml:inkSource xml:id="inkSrc0">
-        <inkml:traceFormat>
-          <inkml:channel name="X" type="integer" min="-2.14748E9" max="2.14748E9" units="cm"/>
-          <inkml:channel name="Y" type="integer" min="-2.14748E9" max="2.14748E9" units="cm"/>
-          <inkml:channel name="F" type="integer" max="32767" units="dev"/>
-        </inkml:traceFormat>
-        <inkml:channelProperties>
-          <inkml:channelProperty channel="X" name="resolution" value="1000" units="1/cm"/>
-          <inkml:channelProperty channel="Y" name="resolution" value="1000" units="1/cm"/>
-          <inkml:channelProperty channel="F" name="resolution" value="0" units="1/dev"/>
-        </inkml:channelProperties>
-      </inkml:inkSource>
-      <inkml:timestamp xml:id="ts0" timeString="2022-12-04T23:30:17.344"/>
-    </inkml:context>
-    <inkml:brush xml:id="br0">
-      <inkml:brushProperty name="width" value="0.05" units="cm"/>
-      <inkml:brushProperty name="height" value="0.05" units="cm"/>
-      <inkml:brushProperty name="color" value="#E71224"/>
-    </inkml:brush>
-  </inkml:definitions>
-  <inkml:trace contextRef="#ctx0" brushRef="#br0">0 3320 24575,'1'2'0,"0"-1"0,0 0 0,0 0 0,1 0 0,-1 0 0,0 0 0,0 0 0,0 0 0,1 0 0,-1 0 0,1 0 0,-1-1 0,0 1 0,1-1 0,-1 1 0,1-1 0,0 1 0,-1-1 0,1 0 0,-1 0 0,1 0 0,-1 0 0,3 0 0,0 1 0,39 3 0,0-2 0,0-2 0,1-2 0,-1-1 0,80-18 0,-102 16 0,1-1 0,-2 0 0,1-2 0,-1 0 0,0-1 0,25-16 0,-36 18 0,0 1 0,0-1 0,-1-1 0,0 0 0,0 0 0,-1 0 0,0-1 0,0 0 0,-1 0 0,0-1 0,-1 0 0,0 0 0,-1 0 0,5-13 0,194-557 0,-151 453 0,21-46 0,15-33 0,-57 131 0,16-38 0,67-114 0,5 30 0,-99 160 0,19-35 0,4 2 0,66-84 0,-75 116 0,-20 24 0,-2 0 0,0-1 0,18-28 0,0-4 0,1 2 0,67-72 0,-13 16 0,-71 85 0,2 1 0,-1 0 0,2 1 0,28-19 0,-28 21 0,1 0 0,-2-2 0,0 0 0,25-29 0,-22 23 0,1 1 0,0 0 0,2 2 0,0 1 0,0 0 0,2 2 0,28-14 0,-3 0 0,-35 21 0,1 1 0,1 0 0,-1 0 0,1 2 0,0 0 0,0 1 0,17-2 0,35-7 0,-67 12 0,0 0 0,0-1 0,1 1 0,-1 0 0,0-1 0,0 1 0,0-1 0,0 1 0,0-1 0,0 0 0,0 0 0,0 1 0,0-1 0,0 0 0,0 0 0,0 0 0,-1 0 0,1 0 0,0 0 0,-1 0 0,1 0 0,-1 0 0,1 0 0,-1 0 0,1 0 0,-1 0 0,0-1 0,1 1 0,-1 0 0,0 0 0,0 0 0,0-1 0,0 1 0,0 0 0,0 0 0,0 0 0,-1-1 0,1 1 0,0 0 0,-1 0 0,1 0 0,-1 0 0,1-1 0,-1 1 0,1 0 0,-1 0 0,0 0 0,0-1 0,-6-9 0,0 1 0,-1-1 0,-13-14 0,15 18 0,-13-15 0,-35-40 0,51 59 0,0 0 0,0 1 0,0-1 0,0 1 0,-1 0 0,1-1 0,-1 2 0,1-1 0,-1 0 0,0 1 0,0 0 0,0-1 0,1 2 0,-1-1 0,0 0 0,-5 1 0,8 0 0,-1 0 0,1 1 0,0-1 0,0 1 0,0-1 0,0 1 0,0-1 0,0 1 0,0 0 0,0 0 0,0-1 0,0 1 0,0 0 0,0 0 0,1 0 0,-1 0 0,0 0 0,1 0 0,-1 0 0,1 0 0,-1 1 0,1-1 0,-1 0 0,1 0 0,0 0 0,-1 0 0,1 1 0,0-1 0,0 0 0,0 0 0,0 1 0,0-1 0,0 0 0,1 0 0,0 3 0,8 48 0,-8-48 0,3 9 0,21 71 0,-22-77 0,-1-1 0,1 1 0,1-1 0,-1 0 0,1 1 0,0-1 0,1-1 0,-1 1 0,9 7 0,-12-12 0,1 0 0,-1 0 0,1 0 0,-1 0 0,1 0 0,0 0 0,-1 0 0,1-1 0,0 1 0,0-1 0,0 1 0,0-1 0,-1 0 0,1 1 0,0-1 0,0 0 0,0 0 0,0 0 0,0-1 0,0 1 0,-1 0 0,1-1 0,0 1 0,2-2 0,2-1 0,0-1 0,0 1 0,0-1 0,-1-1 0,7-5 0,1-1 0,-13 10 0,1 1 0,-1 0 0,0-1 0,1 1 0,-1 0 0,0-1 0,1 1 0,-1 0 0,0 0 0,1-1 0,-1 1 0,1 0 0,-1 0 0,1 0 0,-1-1 0,0 1 0,1 0 0,-1 0 0,1 0 0,-1 0 0,1 0 0,-1 0 0,1 0 0,-1 0 0,1 0 0,-1 0 0,1 0 0,-1 0 0,0 1 0,1-1 0,-1 0 0,1 0 0,4 16 0,-9 22 0,4-38 0,-11 48-27,-3-1 0,-1-1-1,-38 78 1,17-43-1229,22-47-5570</inkml:trace>
-</inkml:ink>
-</file>
-
-<file path=ppt/ink/ink3.xml><?xml version="1.0" encoding="utf-8"?>
-<inkml:ink xmlns:inkml="http://www.w3.org/2003/InkML">
-  <inkml:definitions>
-    <inkml:context xml:id="ctx0">
-      <inkml:inkSource xml:id="inkSrc0">
-        <inkml:traceFormat>
-          <inkml:channel name="X" type="integer" min="-2.14748E9" max="2.14748E9" units="cm"/>
-          <inkml:channel name="Y" type="integer" min="-2.14748E9" max="2.14748E9" units="cm"/>
-          <inkml:channel name="F" type="integer" max="32767" units="dev"/>
-        </inkml:traceFormat>
-        <inkml:channelProperties>
-          <inkml:channelProperty channel="X" name="resolution" value="1000" units="1/cm"/>
-          <inkml:channelProperty channel="Y" name="resolution" value="1000" units="1/cm"/>
-          <inkml:channelProperty channel="F" name="resolution" value="0" units="1/dev"/>
-        </inkml:channelProperties>
-      </inkml:inkSource>
-      <inkml:timestamp xml:id="ts0" timeString="2022-12-04T23:30:22.260"/>
-    </inkml:context>
-    <inkml:brush xml:id="br0">
-      <inkml:brushProperty name="width" value="0.05" units="cm"/>
-      <inkml:brushProperty name="height" value="0.05" units="cm"/>
-      <inkml:brushProperty name="color" value="#E71224"/>
-    </inkml:brush>
-  </inkml:definitions>
-  <inkml:trace contextRef="#ctx0" brushRef="#br0">1 6309 24575,'413'-35'0,"-218"12"0,276-28 0,365-34 0,-805 82 0,1-2 0,-1-2 0,0 0 0,56-23 0,113-64 0,-72 31 0,148-54 0,154-75 0,-261 109 0,86-50 0,187-129 0,-372 214 0,105-94 0,-25 19 0,130-109 0,-236 190 0,-2-3 0,-1-1 0,64-98 0,-80 104 0,-2-2 0,-1 0 0,-2-1 0,-3-1 0,-1-1 0,-2-1 0,-2 0 0,-2 0 0,5-72 0,14-135 0,-2 45 0,0-145 0,-23 319 0,2 1 0,1 1 0,15-44 0,-10 40 0,-3 0 0,8-51 0,-11-2 0,-8-111 0,0-25 0,5 188 0,0 0 0,3 1 0,1 0 0,12-38 0,-6 31 0,-3 0 0,-1-1 0,-2 0 0,-2 0 0,-2-89 0,-5-411 0,4 515 0,1 0 0,6-30 0,4-40 0,-9 65 0,1 0 0,16-56 0,5-29 0,-22 96 0,1 0 0,1 0 0,1 0 0,1 1 0,1 0 0,1 1 0,1 0 0,0 0 0,2 1 0,27-32 0,-34 45 0,1 1 0,0 0 0,0 0 0,1 1 0,16-8 0,-19 10 0,1 1 0,-1-1 0,0 0 0,0 0 0,0-1 0,0 1 0,-1-1 0,1 0 0,-1-1 0,0 1 0,0-1 0,-1 1 0,1-1 0,3-7 0,-7 10 0,0 1 0,0 0 0,0-1 0,-1 1 0,1 0 0,0-1 0,-1 1 0,1 0 0,0-1 0,-1 1 0,0 0 0,1 0 0,-1 0 0,0-1 0,1 1 0,-1 0 0,0 0 0,0 0 0,0 0 0,0 0 0,0 1 0,0-1 0,0 0 0,0 0 0,-1 1 0,1-1 0,0 0 0,0 1 0,-1-1 0,-1 0 0,-47-16 0,43 15 0,-75-23 0,-142-35 0,264 84 0,45 2 0,-67-21 0,0 0 0,0 0 0,25 13 0,-37-15 0,0 1 0,-1-1 0,1 1 0,-1 0 0,0 1 0,0-1 0,-1 1 0,1 0 0,-1 0 0,0 1 0,0-1 0,-1 1 0,6 11 0,4 19 33,-1 0 0,-2 1 1,9 61-1,-10-47-782,16 52 0,-14-68-6077</inkml:trace>
-</inkml:ink>
-</file>
-
-<file path=ppt/ink/ink4.xml><?xml version="1.0" encoding="utf-8"?>
-<inkml:ink xmlns:inkml="http://www.w3.org/2003/InkML">
-  <inkml:definitions>
-    <inkml:context xml:id="ctx0">
-      <inkml:inkSource xml:id="inkSrc0">
-        <inkml:traceFormat>
-          <inkml:channel name="X" type="integer" min="-2.14748E9" max="2.14748E9" units="cm"/>
-          <inkml:channel name="Y" type="integer" min="-2.14748E9" max="2.14748E9" units="cm"/>
-          <inkml:channel name="F" type="integer" max="32767" units="dev"/>
-        </inkml:traceFormat>
-        <inkml:channelProperties>
-          <inkml:channelProperty channel="X" name="resolution" value="1000" units="1/cm"/>
-          <inkml:channelProperty channel="Y" name="resolution" value="1000" units="1/cm"/>
-          <inkml:channelProperty channel="F" name="resolution" value="0" units="1/dev"/>
-        </inkml:channelProperties>
-      </inkml:inkSource>
-      <inkml:timestamp xml:id="ts0" timeString="2022-12-04T23:30:56.511"/>
-    </inkml:context>
-    <inkml:brush xml:id="br0">
-      <inkml:brushProperty name="width" value="0.05" units="cm"/>
-      <inkml:brushProperty name="height" value="0.05" units="cm"/>
-      <inkml:brushProperty name="color" value="#E71224"/>
-    </inkml:brush>
-  </inkml:definitions>
-  <inkml:trace contextRef="#ctx0" brushRef="#br0">1233 1 24575,'679'0'0,"-672"-1"0,0 1 0,0 1 0,0-1 0,0 1 0,0 1 0,0-1 0,0 1 0,-1 0 0,1 1 0,-1-1 0,1 1 0,-1 1 0,0-1 0,0 1 0,6 5 0,-5-2 0,-1 0 0,1 1 0,-1 0 0,-1 0 0,1 1 0,-2 0 0,1 0 0,-1 0 0,0 0 0,3 12 0,6 20 0,-1 0 0,7 45 0,-17-72 0,-1 1 0,0 0 0,0 0 0,-2 0 0,0 0 0,0 0 0,-2 0 0,1-1 0,-10 26 0,-5 3 0,-1-2 0,-3 0 0,-1-1 0,-37 49 0,41-65 0,-1-1 0,-1-1 0,-1-1 0,-1-1 0,-1-1 0,-1 0 0,-44 25 0,-68 37 0,-65 34 0,167-98 0,-9 4 0,-65 21 0,71-28 0,1 3 0,0 0 0,-53 36 0,-25 14 0,-20-11 0,69-30 0,25-7 0,-59 39 0,3-3 0,-49 27 0,109-65 0,0 2 0,1 1 0,2 2 0,0 1 0,-37 34 0,69-55 0,0-1 0,0 1 0,0-1 0,-1 0 0,1 0 0,0 0 0,0 0 0,-1 0 0,1 0 0,-1 0 0,1 0 0,-1 0 0,1-1 0,-1 1 0,1 0 0,-1-1 0,1 0 0,-1 1 0,0-1 0,1 0 0,-1 0 0,0 0 0,1 0 0,-1 0 0,0 0 0,1 0 0,-1-1 0,0 1 0,1 0 0,-1-1 0,-1 0 0,-1-3 0,1 1 0,0-1 0,0 1 0,0-1 0,0 0 0,1 0 0,0 0 0,-1 0 0,1-1 0,-2-6 0,-2-10 0,1 0 0,0 0 0,1 0 0,2-1 0,0 1 0,1-1 0,3-25 0,1 107 0,3-1 0,15 64 0,-20-119 0,0 0 0,0 0 0,1 0 0,0 0 0,-1 0 0,1 0 0,1-1 0,-1 1 0,1-1 0,-1 1 0,1-1 0,0 0 0,0 0 0,0 0 0,1 0 0,-1-1 0,1 1 0,-1-1 0,1 0 0,0 0 0,0 0 0,0-1 0,0 1 0,0-1 0,0 0 0,5 1 0,13 1 0,-1 0 0,1-2 0,0 0 0,22-3 0,-10 1 0,209 12-1365,-203-7-5461</inkml:trace>
-</inkml:ink>
-</file>
-
-<file path=ppt/ink/ink5.xml><?xml version="1.0" encoding="utf-8"?>
-<inkml:ink xmlns:inkml="http://www.w3.org/2003/InkML">
-  <inkml:definitions>
-    <inkml:context xml:id="ctx0">
-      <inkml:inkSource xml:id="inkSrc0">
-        <inkml:traceFormat>
-          <inkml:channel name="X" type="integer" min="-2.14748E9" max="2.14748E9" units="cm"/>
-          <inkml:channel name="Y" type="integer" min="-2.14748E9" max="2.14748E9" units="cm"/>
-          <inkml:channel name="F" type="integer" max="32767" units="dev"/>
-        </inkml:traceFormat>
-        <inkml:channelProperties>
-          <inkml:channelProperty channel="X" name="resolution" value="1000" units="1/cm"/>
-          <inkml:channelProperty channel="Y" name="resolution" value="1000" units="1/cm"/>
-          <inkml:channelProperty channel="F" name="resolution" value="0" units="1/dev"/>
-        </inkml:channelProperties>
-      </inkml:inkSource>
-      <inkml:timestamp xml:id="ts0" timeString="2022-12-04T23:31:00.620"/>
-    </inkml:context>
-    <inkml:brush xml:id="br0">
-      <inkml:brushProperty name="width" value="0.05" units="cm"/>
-      <inkml:brushProperty name="height" value="0.05" units="cm"/>
-      <inkml:brushProperty name="color" value="#E71224"/>
-    </inkml:brush>
-  </inkml:definitions>
-  <inkml:trace contextRef="#ctx0" brushRef="#br0">1 0 24575,'488'29'0,"-5"36"0,-35-4 0,567 58 0,-657-68 0,71 8 0,-14-13 0,447 57 0,-728-83 0,188 2 0,19-24 0,592 19 0,-629 21 0,-78-8 0,640 83 0,-413-57 0,-139-19 0,180 23 0,-261-16 0,-36-4 0,-133-28 0,99 33 0,31 6 0,-89-27 0,-64-13 0,-1-2 0,83 6 0,12-4 0,252 55 0,-354-58 0,46 18 0,-47-14 0,43 10 0,28-5 0,162 5 0,-133-14 0,-119-6 0,0 1 0,-1 0 0,1 0 0,23 11 0,-22-8 0,0-1 0,1-1 0,22 5 0,9 0 0,0 1 0,50 19 0,-13-3 0,-41-12 0,0 2 0,-1 1 0,42 27 0,-81-43 0,25 11 0,1 0 0,41 11 0,-41-15 0,0 1 0,40 21 0,-31-13 0,49 17 0,-1 0 0,-83-33 0,0 0 0,0 0 0,0 0 0,0 0 0,-1 0 0,1 0 0,0-1 0,0 1 0,0-1 0,1 0 0,-1 1 0,0-1 0,0 0 0,0 0 0,0 0 0,0 0 0,0-1 0,0 1 0,0 0 0,0-1 0,0 0 0,0 1 0,0-1 0,0 0 0,0 0 0,0 0 0,2-2 0,-2 0 0,-1 1 0,0-1 0,1 0 0,-1 0 0,0 1 0,0-1 0,-1 0 0,1 0 0,0 0 0,-1 0 0,0 0 0,0 0 0,0 0 0,0 0 0,0 0 0,-1 0 0,1 0 0,-2-5 0,-10-63 0,2 0 0,4 0 0,4-90 0,1 195 0,1 1 0,2-1 0,1 0 0,2 0 0,1 0 0,12 38 0,-12-56 0,-3-9 0,0 1 0,-1 0 0,1 0 0,-2 0 0,1 0 0,0 13 0,-2-18 0,-1 1 0,1-1 0,-1 0 0,0 0 0,0 0 0,0 0 0,0 0 0,0 0 0,-1 0 0,0 0 0,1 0 0,-1 0 0,0-1 0,0 1 0,0-1 0,-1 0 0,1 1 0,-1-1 0,1 0 0,-1-1 0,-3 3 0,-43 24 0,0-2 0,-87 32 0,13-7 0,104-43-94,-209 90-1177,166-77-5555</inkml:trace>
-</inkml:ink>
-</file>
-
 <file path=ppt/notesMasters/notesMaster1.xml><?xml version="1.0" encoding="utf-8"?>
 <p:notesMaster xmlns:a="http://schemas.openxmlformats.org/drawingml/2006/main" xmlns:r="http://schemas.openxmlformats.org/officeDocument/2006/relationships" xmlns:p="http://schemas.openxmlformats.org/presentationml/2006/main">
   <p:cSld>
@@ -409,7 +265,7 @@
           <a:p>
             <a:fld id="{73386005-8F80-1A49-87D1-22EBFA47E352}" type="datetimeFigureOut">
               <a:rPr lang="en-US" smtClean="0"/>
-              <a:t>3/3/2025</a:t>
+              <a:t>9/11/2026</a:t>
             </a:fld>
             <a:endParaRPr lang="en-US"/>
           </a:p>
@@ -794,134 +650,6 @@
 </file>
 
 <file path=ppt/notesSlides/notesSlide10.xml><?xml version="1.0" encoding="utf-8"?>
-<p:notes xmlns:a="http://schemas.openxmlformats.org/drawingml/2006/main" xmlns:r="http://schemas.openxmlformats.org/officeDocument/2006/relationships" xmlns:p="http://schemas.openxmlformats.org/presentationml/2006/main" showMasterSp="0" showMasterPhAnim="0">
-  <p:cSld>
-    <p:spTree>
-      <p:nvGrpSpPr>
-        <p:cNvPr id="1" name="Shape 120"/>
-        <p:cNvGrpSpPr/>
-        <p:nvPr/>
-      </p:nvGrpSpPr>
-      <p:grpSpPr>
-        <a:xfrm>
-          <a:off x="0" y="0"/>
-          <a:ext cx="0" cy="0"/>
-          <a:chOff x="0" y="0"/>
-          <a:chExt cx="0" cy="0"/>
-        </a:xfrm>
-      </p:grpSpPr>
-      <p:sp>
-        <p:nvSpPr>
-          <p:cNvPr id="121" name="Google Shape;121;g787571e53b_0_191:notes"/>
-          <p:cNvSpPr>
-            <a:spLocks noGrp="1" noRot="1" noChangeAspect="1"/>
-          </p:cNvSpPr>
-          <p:nvPr>
-            <p:ph type="sldImg" idx="2"/>
-          </p:nvPr>
-        </p:nvSpPr>
-        <p:spPr>
-          <a:xfrm>
-            <a:off x="381175" y="685800"/>
-            <a:ext cx="6096300" cy="3429000"/>
-          </a:xfrm>
-          <a:custGeom>
-            <a:avLst/>
-            <a:gdLst/>
-            <a:ahLst/>
-            <a:cxnLst/>
-            <a:rect l="l" t="t" r="r" b="b"/>
-            <a:pathLst>
-              <a:path w="120000" h="120000" extrusionOk="0">
-                <a:moveTo>
-                  <a:pt x="0" y="0"/>
-                </a:moveTo>
-                <a:lnTo>
-                  <a:pt x="120000" y="0"/>
-                </a:lnTo>
-                <a:lnTo>
-                  <a:pt x="120000" y="120000"/>
-                </a:lnTo>
-                <a:lnTo>
-                  <a:pt x="0" y="120000"/>
-                </a:lnTo>
-                <a:close/>
-              </a:path>
-            </a:pathLst>
-          </a:custGeom>
-        </p:spPr>
-      </p:sp>
-      <p:sp>
-        <p:nvSpPr>
-          <p:cNvPr id="122" name="Google Shape;122;g787571e53b_0_191:notes"/>
-          <p:cNvSpPr txBox="1">
-            <a:spLocks noGrp="1"/>
-          </p:cNvSpPr>
-          <p:nvPr>
-            <p:ph type="body" idx="1"/>
-          </p:nvPr>
-        </p:nvSpPr>
-        <p:spPr>
-          <a:xfrm>
-            <a:off x="685800" y="4343400"/>
-            <a:ext cx="5486400" cy="4114800"/>
-          </a:xfrm>
-          <a:prstGeom prst="rect">
-            <a:avLst/>
-          </a:prstGeom>
-        </p:spPr>
-        <p:txBody>
-          <a:bodyPr spcFirstLastPara="1" wrap="square" lIns="91425" tIns="91425" rIns="91425" bIns="91425" anchor="t" anchorCtr="0">
-            <a:noAutofit/>
-          </a:bodyPr>
-          <a:lstStyle/>
-          <a:p>
-            <a:pPr marL="0" lvl="0" indent="0" algn="l" rtl="0">
-              <a:spcBef>
-                <a:spcPts val="0"/>
-              </a:spcBef>
-              <a:spcAft>
-                <a:spcPts val="0"/>
-              </a:spcAft>
-              <a:buNone/>
-            </a:pPr>
-            <a:r>
-              <a:rPr lang="en" sz="1800">
-                <a:solidFill>
-                  <a:srgbClr val="840629"/>
-                </a:solidFill>
-              </a:rPr>
-              <a:t>CAREFUL- if you do not stop the running debugger, you can have multiple instances running and the debugger variables you see might be from a different running </a:t>
-            </a:r>
-            <a:endParaRPr sz="1800">
-              <a:solidFill>
-                <a:srgbClr val="840629"/>
-              </a:solidFill>
-            </a:endParaRPr>
-          </a:p>
-          <a:p>
-            <a:pPr marL="0" lvl="0" indent="0" algn="l" rtl="0">
-              <a:spcBef>
-                <a:spcPts val="0"/>
-              </a:spcBef>
-              <a:spcAft>
-                <a:spcPts val="0"/>
-              </a:spcAft>
-              <a:buNone/>
-            </a:pPr>
-            <a:endParaRPr/>
-          </a:p>
-        </p:txBody>
-      </p:sp>
-    </p:spTree>
-  </p:cSld>
-  <p:clrMapOvr>
-    <a:masterClrMapping/>
-  </p:clrMapOvr>
-</p:notes>
-</file>
-
-<file path=ppt/notesSlides/notesSlide11.xml><?xml version="1.0" encoding="utf-8"?>
 <p:notes xmlns:a="http://schemas.openxmlformats.org/drawingml/2006/main" xmlns:r="http://schemas.openxmlformats.org/officeDocument/2006/relationships" xmlns:p="http://schemas.openxmlformats.org/presentationml/2006/main">
   <p:cSld>
     <p:spTree>
@@ -966,20 +694,34 @@
           <a:lstStyle/>
           <a:p>
             <a:r>
-              <a:rPr lang="en-US" dirty="0"/>
-              <a:t>Only spend time on this if you want to show the </a:t>
-            </a:r>
-            <a:r>
-              <a:rPr lang="en-US" dirty="0" err="1"/>
-              <a:t>DebugMeTest</a:t>
-            </a:r>
-            <a:r>
-              <a:rPr lang="en-US" dirty="0"/>
-              <a:t> examples,</a:t>
-            </a:r>
-            <a:r>
-              <a:rPr lang="en-US" baseline="0" dirty="0"/>
-              <a:t> in particular the final test which you can use to demonstrate this approach.</a:t>
+              <a:rPr lang="en-US" i="1" dirty="0" err="1"/>
+              <a:t>isArrayDoubled</a:t>
+            </a:r>
+            <a:r>
+              <a:rPr lang="en-US" i="1" dirty="0"/>
+              <a:t> </a:t>
+            </a:r>
+            <a:r>
+              <a:rPr lang="en-US" i="0" dirty="0"/>
+              <a:t> is a good example where the .equals comparison </a:t>
+            </a:r>
+          </a:p>
+          <a:p>
+            <a:r>
+              <a:rPr lang="en-US" i="0" dirty="0"/>
+              <a:t>fails because it is not implemented properly in the default .equals method.</a:t>
+            </a:r>
+          </a:p>
+          <a:p>
+            <a:r>
+              <a:rPr lang="en-US" i="0" dirty="0"/>
+              <a:t>Without using the debugger, it could be pretty hard to track down the</a:t>
+            </a:r>
+          </a:p>
+          <a:p>
+            <a:r>
+              <a:rPr lang="en-US" i="0" dirty="0"/>
+              <a:t>specific problem that is occurring.</a:t>
             </a:r>
             <a:endParaRPr lang="en-US" dirty="0"/>
           </a:p>
@@ -992,7 +734,7 @@
             <a:spLocks noGrp="1"/>
           </p:cNvSpPr>
           <p:nvPr>
-            <p:ph type="sldNum" sz="quarter" idx="10"/>
+            <p:ph type="sldNum" sz="quarter" idx="5"/>
           </p:nvPr>
         </p:nvSpPr>
         <p:spPr/>
@@ -1002,339 +744,7 @@
           <a:p>
             <a:fld id="{9B5CF600-4147-7540-9DE4-6C8272E0EDC3}" type="slidenum">
               <a:rPr lang="en-US" smtClean="0"/>
-              <a:t>12</a:t>
-            </a:fld>
-            <a:endParaRPr lang="en-US"/>
-          </a:p>
-        </p:txBody>
-      </p:sp>
-    </p:spTree>
-    <p:extLst>
-      <p:ext uri="{BB962C8B-B14F-4D97-AF65-F5344CB8AC3E}">
-        <p14:creationId xmlns:p14="http://schemas.microsoft.com/office/powerpoint/2010/main" val="3263308297"/>
-      </p:ext>
-    </p:extLst>
-  </p:cSld>
-  <p:clrMapOvr>
-    <a:masterClrMapping/>
-  </p:clrMapOvr>
-</p:notes>
-</file>
-
-<file path=ppt/notesSlides/notesSlide12.xml><?xml version="1.0" encoding="utf-8"?>
-<p:notes xmlns:a="http://schemas.openxmlformats.org/drawingml/2006/main" xmlns:r="http://schemas.openxmlformats.org/officeDocument/2006/relationships" xmlns:p="http://schemas.openxmlformats.org/presentationml/2006/main">
-  <p:cSld>
-    <p:spTree>
-      <p:nvGrpSpPr>
-        <p:cNvPr id="1" name=""/>
-        <p:cNvGrpSpPr/>
-        <p:nvPr/>
-      </p:nvGrpSpPr>
-      <p:grpSpPr>
-        <a:xfrm>
-          <a:off x="0" y="0"/>
-          <a:ext cx="0" cy="0"/>
-          <a:chOff x="0" y="0"/>
-          <a:chExt cx="0" cy="0"/>
-        </a:xfrm>
-      </p:grpSpPr>
-      <p:sp>
-        <p:nvSpPr>
-          <p:cNvPr id="2" name="Slide Image Placeholder 1"/>
-          <p:cNvSpPr>
-            <a:spLocks noGrp="1" noRot="1" noChangeAspect="1"/>
-          </p:cNvSpPr>
-          <p:nvPr>
-            <p:ph type="sldImg"/>
-          </p:nvPr>
-        </p:nvSpPr>
-        <p:spPr/>
-      </p:sp>
-      <p:sp>
-        <p:nvSpPr>
-          <p:cNvPr id="3" name="Notes Placeholder 2"/>
-          <p:cNvSpPr>
-            <a:spLocks noGrp="1"/>
-          </p:cNvSpPr>
-          <p:nvPr>
-            <p:ph type="body" idx="1"/>
-          </p:nvPr>
-        </p:nvSpPr>
-        <p:spPr/>
-        <p:txBody>
-          <a:bodyPr/>
-          <a:lstStyle/>
-          <a:p>
-            <a:endParaRPr lang="en-US" dirty="0"/>
-          </a:p>
-        </p:txBody>
-      </p:sp>
-      <p:sp>
-        <p:nvSpPr>
-          <p:cNvPr id="4" name="Slide Number Placeholder 3"/>
-          <p:cNvSpPr>
-            <a:spLocks noGrp="1"/>
-          </p:cNvSpPr>
-          <p:nvPr>
-            <p:ph type="sldNum" sz="quarter" idx="10"/>
-          </p:nvPr>
-        </p:nvSpPr>
-        <p:spPr/>
-        <p:txBody>
-          <a:bodyPr/>
-          <a:lstStyle/>
-          <a:p>
-            <a:fld id="{9B5CF600-4147-7540-9DE4-6C8272E0EDC3}" type="slidenum">
-              <a:rPr lang="en-US" smtClean="0"/>
-              <a:t>13</a:t>
-            </a:fld>
-            <a:endParaRPr lang="en-US"/>
-          </a:p>
-        </p:txBody>
-      </p:sp>
-    </p:spTree>
-    <p:extLst>
-      <p:ext uri="{BB962C8B-B14F-4D97-AF65-F5344CB8AC3E}">
-        <p14:creationId xmlns:p14="http://schemas.microsoft.com/office/powerpoint/2010/main" val="983935836"/>
-      </p:ext>
-    </p:extLst>
-  </p:cSld>
-  <p:clrMapOvr>
-    <a:masterClrMapping/>
-  </p:clrMapOvr>
-</p:notes>
-</file>
-
-<file path=ppt/notesSlides/notesSlide13.xml><?xml version="1.0" encoding="utf-8"?>
-<p:notes xmlns:a="http://schemas.openxmlformats.org/drawingml/2006/main" xmlns:r="http://schemas.openxmlformats.org/officeDocument/2006/relationships" xmlns:p="http://schemas.openxmlformats.org/presentationml/2006/main">
-  <p:cSld>
-    <p:spTree>
-      <p:nvGrpSpPr>
-        <p:cNvPr id="1" name=""/>
-        <p:cNvGrpSpPr/>
-        <p:nvPr/>
-      </p:nvGrpSpPr>
-      <p:grpSpPr>
-        <a:xfrm>
-          <a:off x="0" y="0"/>
-          <a:ext cx="0" cy="0"/>
-          <a:chOff x="0" y="0"/>
-          <a:chExt cx="0" cy="0"/>
-        </a:xfrm>
-      </p:grpSpPr>
-      <p:sp>
-        <p:nvSpPr>
-          <p:cNvPr id="2" name="Slide Image Placeholder 1"/>
-          <p:cNvSpPr>
-            <a:spLocks noGrp="1" noRot="1" noChangeAspect="1"/>
-          </p:cNvSpPr>
-          <p:nvPr>
-            <p:ph type="sldImg"/>
-          </p:nvPr>
-        </p:nvSpPr>
-        <p:spPr/>
-      </p:sp>
-      <p:sp>
-        <p:nvSpPr>
-          <p:cNvPr id="3" name="Notes Placeholder 2"/>
-          <p:cNvSpPr>
-            <a:spLocks noGrp="1"/>
-          </p:cNvSpPr>
-          <p:nvPr>
-            <p:ph type="body" idx="1"/>
-          </p:nvPr>
-        </p:nvSpPr>
-        <p:spPr/>
-        <p:txBody>
-          <a:bodyPr/>
-          <a:lstStyle/>
-          <a:p>
-            <a:pPr marL="0" marR="0" lvl="0" indent="0" algn="l" defTabSz="457200" rtl="0" eaLnBrk="1" fontAlgn="auto" latinLnBrk="0" hangingPunct="1">
-              <a:lnSpc>
-                <a:spcPct val="100000"/>
-              </a:lnSpc>
-              <a:spcBef>
-                <a:spcPts val="0"/>
-              </a:spcBef>
-              <a:spcAft>
-                <a:spcPts val="0"/>
-              </a:spcAft>
-              <a:buClrTx/>
-              <a:buSzTx/>
-              <a:buFontTx/>
-              <a:buNone/>
-              <a:tabLst/>
-              <a:defRPr/>
-            </a:pPr>
-            <a:r>
-              <a:rPr lang="en-US" sz="1200" kern="1200" dirty="0" err="1">
-                <a:solidFill>
-                  <a:schemeClr val="tx1"/>
-                </a:solidFill>
-                <a:latin typeface="+mn-lt"/>
-                <a:ea typeface="+mn-ea"/>
-                <a:cs typeface="+mn-cs"/>
-              </a:rPr>
-              <a:t>uppercaseIfExclaimation</a:t>
-            </a:r>
-            <a:r>
-              <a:rPr lang="en-US" sz="1200" kern="1200" dirty="0">
-                <a:solidFill>
-                  <a:schemeClr val="tx1"/>
-                </a:solidFill>
-                <a:latin typeface="+mn-lt"/>
-                <a:ea typeface="+mn-ea"/>
-                <a:cs typeface="+mn-cs"/>
-              </a:rPr>
-              <a:t> ends up showing</a:t>
-            </a:r>
-            <a:r>
-              <a:rPr lang="en-US" sz="1200" kern="1200" baseline="0" dirty="0">
-                <a:solidFill>
-                  <a:schemeClr val="tx1"/>
-                </a:solidFill>
-                <a:latin typeface="+mn-lt"/>
-                <a:ea typeface="+mn-ea"/>
-                <a:cs typeface="+mn-cs"/>
-              </a:rPr>
-              <a:t> this</a:t>
-            </a:r>
-            <a:endParaRPr lang="en-US" dirty="0"/>
-          </a:p>
-        </p:txBody>
-      </p:sp>
-      <p:sp>
-        <p:nvSpPr>
-          <p:cNvPr id="4" name="Slide Number Placeholder 3"/>
-          <p:cNvSpPr>
-            <a:spLocks noGrp="1"/>
-          </p:cNvSpPr>
-          <p:nvPr>
-            <p:ph type="sldNum" sz="quarter" idx="10"/>
-          </p:nvPr>
-        </p:nvSpPr>
-        <p:spPr/>
-        <p:txBody>
-          <a:bodyPr/>
-          <a:lstStyle/>
-          <a:p>
-            <a:fld id="{9B5CF600-4147-7540-9DE4-6C8272E0EDC3}" type="slidenum">
-              <a:rPr lang="en-US" smtClean="0"/>
-              <a:t>14</a:t>
-            </a:fld>
-            <a:endParaRPr lang="en-US"/>
-          </a:p>
-        </p:txBody>
-      </p:sp>
-    </p:spTree>
-    <p:extLst>
-      <p:ext uri="{BB962C8B-B14F-4D97-AF65-F5344CB8AC3E}">
-        <p14:creationId xmlns:p14="http://schemas.microsoft.com/office/powerpoint/2010/main" val="2214325646"/>
-      </p:ext>
-    </p:extLst>
-  </p:cSld>
-  <p:clrMapOvr>
-    <a:masterClrMapping/>
-  </p:clrMapOvr>
-</p:notes>
-</file>
-
-<file path=ppt/notesSlides/notesSlide14.xml><?xml version="1.0" encoding="utf-8"?>
-<p:notes xmlns:a="http://schemas.openxmlformats.org/drawingml/2006/main" xmlns:r="http://schemas.openxmlformats.org/officeDocument/2006/relationships" xmlns:p="http://schemas.openxmlformats.org/presentationml/2006/main">
-  <p:cSld>
-    <p:spTree>
-      <p:nvGrpSpPr>
-        <p:cNvPr id="1" name=""/>
-        <p:cNvGrpSpPr/>
-        <p:nvPr/>
-      </p:nvGrpSpPr>
-      <p:grpSpPr>
-        <a:xfrm>
-          <a:off x="0" y="0"/>
-          <a:ext cx="0" cy="0"/>
-          <a:chOff x="0" y="0"/>
-          <a:chExt cx="0" cy="0"/>
-        </a:xfrm>
-      </p:grpSpPr>
-      <p:sp>
-        <p:nvSpPr>
-          <p:cNvPr id="2" name="Slide Image Placeholder 1"/>
-          <p:cNvSpPr>
-            <a:spLocks noGrp="1" noRot="1" noChangeAspect="1"/>
-          </p:cNvSpPr>
-          <p:nvPr>
-            <p:ph type="sldImg"/>
-          </p:nvPr>
-        </p:nvSpPr>
-        <p:spPr/>
-      </p:sp>
-      <p:sp>
-        <p:nvSpPr>
-          <p:cNvPr id="3" name="Notes Placeholder 2"/>
-          <p:cNvSpPr>
-            <a:spLocks noGrp="1"/>
-          </p:cNvSpPr>
-          <p:nvPr>
-            <p:ph type="body" idx="1"/>
-          </p:nvPr>
-        </p:nvSpPr>
-        <p:spPr/>
-        <p:txBody>
-          <a:bodyPr/>
-          <a:lstStyle/>
-          <a:p>
-            <a:r>
-              <a:rPr lang="en-US" i="1" dirty="0" err="1"/>
-              <a:t>isArrayDoubled</a:t>
-            </a:r>
-            <a:r>
-              <a:rPr lang="en-US" i="1" dirty="0"/>
-              <a:t> </a:t>
-            </a:r>
-            <a:r>
-              <a:rPr lang="en-US" i="0" dirty="0"/>
-              <a:t> is a good example where the .equals comparison </a:t>
-            </a:r>
-          </a:p>
-          <a:p>
-            <a:r>
-              <a:rPr lang="en-US" i="0" dirty="0"/>
-              <a:t>fails because it is not implemented properly in the default .equals method.</a:t>
-            </a:r>
-          </a:p>
-          <a:p>
-            <a:r>
-              <a:rPr lang="en-US" i="0" dirty="0"/>
-              <a:t>Without using the debugger, it could be pretty hard to track down the</a:t>
-            </a:r>
-          </a:p>
-          <a:p>
-            <a:r>
-              <a:rPr lang="en-US" i="0" dirty="0"/>
-              <a:t>specific problem that is occurring.</a:t>
-            </a:r>
-            <a:endParaRPr lang="en-US" dirty="0"/>
-          </a:p>
-        </p:txBody>
-      </p:sp>
-      <p:sp>
-        <p:nvSpPr>
-          <p:cNvPr id="4" name="Slide Number Placeholder 3"/>
-          <p:cNvSpPr>
-            <a:spLocks noGrp="1"/>
-          </p:cNvSpPr>
-          <p:nvPr>
-            <p:ph type="sldNum" sz="quarter" idx="5"/>
-          </p:nvPr>
-        </p:nvSpPr>
-        <p:spPr/>
-        <p:txBody>
-          <a:bodyPr/>
-          <a:lstStyle/>
-          <a:p>
-            <a:fld id="{9B5CF600-4147-7540-9DE4-6C8272E0EDC3}" type="slidenum">
-              <a:rPr lang="en-US" smtClean="0"/>
-              <a:t>15</a:t>
+              <a:t>11</a:t>
             </a:fld>
             <a:endParaRPr lang="en-US"/>
           </a:p>
@@ -1749,11 +1159,11 @@
 </file>
 
 <file path=ppt/notesSlides/notesSlide6.xml><?xml version="1.0" encoding="utf-8"?>
-<p:notes xmlns:a="http://schemas.openxmlformats.org/drawingml/2006/main" xmlns:r="http://schemas.openxmlformats.org/officeDocument/2006/relationships" xmlns:p="http://schemas.openxmlformats.org/presentationml/2006/main" showMasterSp="0" showMasterPhAnim="0">
+<p:notes xmlns:a="http://schemas.openxmlformats.org/drawingml/2006/main" xmlns:r="http://schemas.openxmlformats.org/officeDocument/2006/relationships" xmlns:p="http://schemas.openxmlformats.org/presentationml/2006/main">
   <p:cSld>
     <p:spTree>
       <p:nvGrpSpPr>
-        <p:cNvPr id="1" name="Shape 98"/>
+        <p:cNvPr id="1" name=""/>
         <p:cNvGrpSpPr/>
         <p:nvPr/>
       </p:nvGrpSpPr>
@@ -1767,88 +1177,261 @@
       </p:grpSpPr>
       <p:sp>
         <p:nvSpPr>
-          <p:cNvPr id="99" name="Google Shape;99;g787571e53b_0_161:notes"/>
+          <p:cNvPr id="181" name="Shape 181"/>
           <p:cNvSpPr>
             <a:spLocks noGrp="1" noRot="1" noChangeAspect="1"/>
           </p:cNvSpPr>
           <p:nvPr>
-            <p:ph type="sldImg" idx="2"/>
+            <p:ph type="sldImg"/>
           </p:nvPr>
         </p:nvSpPr>
         <p:spPr>
-          <a:xfrm>
-            <a:off x="1143000" y="685800"/>
-            <a:ext cx="4572000" cy="3429000"/>
-          </a:xfrm>
-          <a:custGeom>
-            <a:avLst/>
-            <a:gdLst/>
-            <a:ahLst/>
-            <a:cxnLst/>
-            <a:rect l="l" t="t" r="r" b="b"/>
-            <a:pathLst>
-              <a:path w="120000" h="120000" extrusionOk="0">
-                <a:moveTo>
-                  <a:pt x="0" y="0"/>
-                </a:moveTo>
-                <a:lnTo>
-                  <a:pt x="120000" y="0"/>
-                </a:lnTo>
-                <a:lnTo>
-                  <a:pt x="120000" y="120000"/>
-                </a:lnTo>
-                <a:lnTo>
-                  <a:pt x="0" y="120000"/>
-                </a:lnTo>
-                <a:close/>
-              </a:path>
-            </a:pathLst>
-          </a:custGeom>
-        </p:spPr>
-      </p:sp>
-      <p:sp>
-        <p:nvSpPr>
-          <p:cNvPr id="100" name="Google Shape;100;g787571e53b_0_161:notes"/>
-          <p:cNvSpPr txBox="1">
-            <a:spLocks noGrp="1"/>
-          </p:cNvSpPr>
-          <p:nvPr>
-            <p:ph type="body" idx="1"/>
-          </p:nvPr>
-        </p:nvSpPr>
-        <p:spPr>
-          <a:xfrm>
-            <a:off x="685800" y="4343400"/>
-            <a:ext cx="5486400" cy="4114800"/>
-          </a:xfrm>
           <a:prstGeom prst="rect">
             <a:avLst/>
           </a:prstGeom>
         </p:spPr>
         <p:txBody>
-          <a:bodyPr spcFirstLastPara="1" wrap="square" lIns="91425" tIns="91425" rIns="91425" bIns="91425" anchor="t" anchorCtr="0">
-            <a:noAutofit/>
-          </a:bodyPr>
-          <a:lstStyle/>
-          <a:p>
-            <a:pPr marL="0" lvl="0" indent="0" algn="l" rtl="0">
+          <a:bodyPr/>
+          <a:lstStyle/>
+          <a:p>
+            <a:pPr lvl="0"/>
+            <a:endParaRPr/>
+          </a:p>
+        </p:txBody>
+      </p:sp>
+      <p:sp>
+        <p:nvSpPr>
+          <p:cNvPr id="182" name="Shape 182"/>
+          <p:cNvSpPr>
+            <a:spLocks noGrp="1"/>
+          </p:cNvSpPr>
+          <p:nvPr>
+            <p:ph type="body" sz="quarter" idx="1"/>
+          </p:nvPr>
+        </p:nvSpPr>
+        <p:spPr>
+          <a:prstGeom prst="rect">
+            <a:avLst/>
+          </a:prstGeom>
+        </p:spPr>
+        <p:txBody>
+          <a:bodyPr/>
+          <a:lstStyle/>
+          <a:p>
+            <a:pPr lvl="0" defTabSz="914400">
+              <a:lnSpc>
+                <a:spcPct val="100000"/>
+              </a:lnSpc>
               <a:spcBef>
-                <a:spcPts val="0"/>
+                <a:spcPts val="400"/>
               </a:spcBef>
-              <a:spcAft>
-                <a:spcPts val="0"/>
-              </a:spcAft>
-              <a:buNone/>
+              <a:defRPr sz="1800"/>
             </a:pPr>
             <a:r>
-              <a:rPr lang="en"/>
-              <a:t>Send 220 memes via email this week and maybe I’ll add it to the slide deck next week...</a:t>
-            </a:r>
-            <a:endParaRPr/>
+              <a:rPr sz="1200" dirty="0">
+                <a:latin typeface="Calibri"/>
+                <a:ea typeface="Calibri"/>
+                <a:cs typeface="Calibri"/>
+                <a:sym typeface="Calibri"/>
+              </a:rPr>
+              <a:t>[Demonstrate the techniques in Eclipse by solving a problem or two from </a:t>
+            </a:r>
+            <a:r>
+              <a:rPr lang="en-US" sz="1200" dirty="0" err="1">
+                <a:latin typeface="+mn-lt"/>
+                <a:ea typeface="Calibri"/>
+                <a:cs typeface="Calibri"/>
+                <a:sym typeface="Calibri"/>
+              </a:rPr>
+              <a:t>DebugMeTest</a:t>
+            </a:r>
+            <a:r>
+              <a:rPr sz="1200" dirty="0">
+                <a:latin typeface="Calibri"/>
+                <a:ea typeface="Calibri"/>
+                <a:cs typeface="Calibri"/>
+                <a:sym typeface="Calibri"/>
+              </a:rPr>
+              <a:t> together, give them time to answer the quiz question, then have them complete </a:t>
+            </a:r>
+            <a:r>
+              <a:rPr lang="en-US" sz="1200" dirty="0" err="1">
+                <a:latin typeface="+mn-lt"/>
+                <a:ea typeface="Calibri"/>
+                <a:cs typeface="Calibri"/>
+                <a:sym typeface="Calibri"/>
+              </a:rPr>
+              <a:t>DebugMeTest</a:t>
+            </a:r>
+            <a:r>
+              <a:rPr sz="1200" dirty="0">
+                <a:latin typeface="Calibri"/>
+                <a:ea typeface="Calibri"/>
+                <a:cs typeface="Calibri"/>
+                <a:sym typeface="Calibri"/>
+              </a:rPr>
+              <a:t>.]</a:t>
+            </a:r>
+            <a:endParaRPr lang="en-US" sz="1200" dirty="0">
+              <a:latin typeface="Calibri"/>
+              <a:ea typeface="Calibri"/>
+              <a:cs typeface="Calibri"/>
+              <a:sym typeface="Calibri"/>
+            </a:endParaRPr>
+          </a:p>
+          <a:p>
+            <a:pPr lvl="0" defTabSz="914400">
+              <a:lnSpc>
+                <a:spcPct val="100000"/>
+              </a:lnSpc>
+              <a:spcBef>
+                <a:spcPts val="400"/>
+              </a:spcBef>
+              <a:defRPr sz="1800"/>
+            </a:pPr>
+            <a:r>
+              <a:rPr lang="en-US" sz="1200" dirty="0">
+                <a:latin typeface="Calibri"/>
+                <a:ea typeface="Calibri"/>
+                <a:cs typeface="Calibri"/>
+                <a:sym typeface="Calibri"/>
+              </a:rPr>
+              <a:t>[You can also point them to </a:t>
+            </a:r>
+            <a:r>
+              <a:rPr lang="en-US" sz="1200" dirty="0" err="1">
+                <a:latin typeface="Calibri"/>
+                <a:ea typeface="Calibri"/>
+                <a:cs typeface="Calibri"/>
+                <a:sym typeface="Calibri"/>
+              </a:rPr>
+              <a:t>WhackABug</a:t>
+            </a:r>
+            <a:r>
+              <a:rPr lang="en-US" sz="1200" baseline="0" dirty="0">
+                <a:latin typeface="Calibri"/>
+                <a:ea typeface="Calibri"/>
+                <a:cs typeface="Calibri"/>
+                <a:sym typeface="Calibri"/>
+              </a:rPr>
+              <a:t> to get more practice when running a Java Application instead of JUnit)]</a:t>
+            </a:r>
+            <a:endParaRPr lang="en-US" sz="1200" dirty="0">
+              <a:latin typeface="Calibri"/>
+              <a:ea typeface="Calibri"/>
+              <a:cs typeface="Calibri"/>
+              <a:sym typeface="Calibri"/>
+            </a:endParaRPr>
+          </a:p>
+          <a:p>
+            <a:pPr lvl="0" defTabSz="914400">
+              <a:lnSpc>
+                <a:spcPct val="100000"/>
+              </a:lnSpc>
+              <a:spcBef>
+                <a:spcPts val="400"/>
+              </a:spcBef>
+              <a:defRPr sz="1800"/>
+            </a:pPr>
+            <a:r>
+              <a:rPr lang="en-US" sz="1200" dirty="0" err="1">
+                <a:latin typeface="Calibri"/>
+                <a:ea typeface="Calibri"/>
+                <a:cs typeface="Calibri"/>
+                <a:sym typeface="Calibri"/>
+              </a:rPr>
+              <a:t>DebugMeTest</a:t>
+            </a:r>
+            <a:r>
+              <a:rPr lang="en-US" sz="1200" dirty="0">
+                <a:latin typeface="Calibri"/>
+                <a:ea typeface="Calibri"/>
+                <a:cs typeface="Calibri"/>
+                <a:sym typeface="Calibri"/>
+              </a:rPr>
+              <a:t> make sure to demo:</a:t>
+            </a:r>
+          </a:p>
+          <a:p>
+            <a:pPr lvl="0" defTabSz="914400">
+              <a:lnSpc>
+                <a:spcPct val="100000"/>
+              </a:lnSpc>
+              <a:spcBef>
+                <a:spcPts val="400"/>
+              </a:spcBef>
+              <a:defRPr sz="1800"/>
+            </a:pPr>
+            <a:r>
+              <a:rPr lang="en-US" sz="1800" kern="1200" dirty="0" err="1">
+                <a:solidFill>
+                  <a:schemeClr val="tx1"/>
+                </a:solidFill>
+                <a:latin typeface="+mn-lt"/>
+                <a:ea typeface="+mn-ea"/>
+                <a:cs typeface="+mn-cs"/>
+              </a:rPr>
+              <a:t>uppercaseIfExclaimation</a:t>
+            </a:r>
+            <a:r>
+              <a:rPr lang="en-US" sz="1800" kern="1200" dirty="0">
+                <a:solidFill>
+                  <a:schemeClr val="tx1"/>
+                </a:solidFill>
+                <a:latin typeface="+mn-lt"/>
+                <a:ea typeface="+mn-ea"/>
+                <a:cs typeface="+mn-cs"/>
+              </a:rPr>
+              <a:t> which ends up showing</a:t>
+            </a:r>
+            <a:r>
+              <a:rPr lang="en-US" sz="1800" kern="1200" baseline="0" dirty="0">
+                <a:solidFill>
+                  <a:schemeClr val="tx1"/>
+                </a:solidFill>
+                <a:latin typeface="+mn-lt"/>
+                <a:ea typeface="+mn-ea"/>
+                <a:cs typeface="+mn-cs"/>
+              </a:rPr>
+              <a:t> the </a:t>
+            </a:r>
+            <a:r>
+              <a:rPr lang="en-US" sz="1800" kern="1200" baseline="0" dirty="0" err="1">
+                <a:solidFill>
+                  <a:schemeClr val="tx1"/>
+                </a:solidFill>
+                <a:latin typeface="+mn-lt"/>
+                <a:ea typeface="+mn-ea"/>
+                <a:cs typeface="+mn-cs"/>
+              </a:rPr>
+              <a:t>gotcha</a:t>
+            </a:r>
+            <a:r>
+              <a:rPr lang="en-US" sz="1800" kern="1200" baseline="0" dirty="0">
+                <a:solidFill>
+                  <a:schemeClr val="tx1"/>
+                </a:solidFill>
+                <a:latin typeface="+mn-lt"/>
+                <a:ea typeface="+mn-ea"/>
+                <a:cs typeface="+mn-cs"/>
+              </a:rPr>
+              <a:t> “string are immutable” in two slides</a:t>
+            </a:r>
+            <a:endParaRPr sz="1200" dirty="0">
+              <a:latin typeface="Calibri"/>
+              <a:ea typeface="Calibri"/>
+              <a:cs typeface="Calibri"/>
+              <a:sym typeface="Calibri"/>
+            </a:endParaRPr>
           </a:p>
         </p:txBody>
       </p:sp>
     </p:spTree>
+    <p:extLst>
+      <p:ext uri="{BB962C8B-B14F-4D97-AF65-F5344CB8AC3E}">
+        <p14:creationId xmlns:p14="http://schemas.microsoft.com/office/powerpoint/2010/main" val="1168558161"/>
+      </p:ext>
+    </p:extLst>
   </p:cSld>
   <p:clrMapOvr>
     <a:masterClrMapping/>
@@ -1857,11 +1440,11 @@
 </file>
 
 <file path=ppt/notesSlides/notesSlide7.xml><?xml version="1.0" encoding="utf-8"?>
-<p:notes xmlns:a="http://schemas.openxmlformats.org/drawingml/2006/main" xmlns:r="http://schemas.openxmlformats.org/officeDocument/2006/relationships" xmlns:p="http://schemas.openxmlformats.org/presentationml/2006/main" showMasterSp="0" showMasterPhAnim="0">
+<p:notes xmlns:a="http://schemas.openxmlformats.org/drawingml/2006/main" xmlns:r="http://schemas.openxmlformats.org/officeDocument/2006/relationships" xmlns:p="http://schemas.openxmlformats.org/presentationml/2006/main">
   <p:cSld>
     <p:spTree>
       <p:nvGrpSpPr>
-        <p:cNvPr id="1" name="Shape 108"/>
+        <p:cNvPr id="1" name=""/>
         <p:cNvGrpSpPr/>
         <p:nvPr/>
       </p:nvGrpSpPr>
@@ -1875,84 +1458,106 @@
       </p:grpSpPr>
       <p:sp>
         <p:nvSpPr>
-          <p:cNvPr id="109" name="Google Shape;109;g787571e53b_0_172:notes"/>
+          <p:cNvPr id="2" name="Slide Image Placeholder 1"/>
           <p:cNvSpPr>
             <a:spLocks noGrp="1" noRot="1" noChangeAspect="1"/>
           </p:cNvSpPr>
           <p:nvPr>
-            <p:ph type="sldImg" idx="2"/>
-          </p:nvPr>
-        </p:nvSpPr>
-        <p:spPr>
-          <a:xfrm>
-            <a:off x="1143000" y="685800"/>
-            <a:ext cx="4572000" cy="3429000"/>
-          </a:xfrm>
-          <a:custGeom>
-            <a:avLst/>
-            <a:gdLst/>
-            <a:ahLst/>
-            <a:cxnLst/>
-            <a:rect l="l" t="t" r="r" b="b"/>
-            <a:pathLst>
-              <a:path w="120000" h="120000" extrusionOk="0">
-                <a:moveTo>
-                  <a:pt x="0" y="0"/>
-                </a:moveTo>
-                <a:lnTo>
-                  <a:pt x="120000" y="0"/>
-                </a:lnTo>
-                <a:lnTo>
-                  <a:pt x="120000" y="120000"/>
-                </a:lnTo>
-                <a:lnTo>
-                  <a:pt x="0" y="120000"/>
-                </a:lnTo>
-                <a:close/>
-              </a:path>
-            </a:pathLst>
-          </a:custGeom>
-        </p:spPr>
-      </p:sp>
-      <p:sp>
-        <p:nvSpPr>
-          <p:cNvPr id="110" name="Google Shape;110;g787571e53b_0_172:notes"/>
-          <p:cNvSpPr txBox="1">
+            <p:ph type="sldImg"/>
+          </p:nvPr>
+        </p:nvSpPr>
+        <p:spPr/>
+      </p:sp>
+      <p:sp>
+        <p:nvSpPr>
+          <p:cNvPr id="3" name="Notes Placeholder 2"/>
+          <p:cNvSpPr>
             <a:spLocks noGrp="1"/>
           </p:cNvSpPr>
           <p:nvPr>
             <p:ph type="body" idx="1"/>
           </p:nvPr>
         </p:nvSpPr>
-        <p:spPr>
-          <a:xfrm>
-            <a:off x="685800" y="4343400"/>
-            <a:ext cx="5486400" cy="4114800"/>
-          </a:xfrm>
-          <a:prstGeom prst="rect">
-            <a:avLst/>
-          </a:prstGeom>
-        </p:spPr>
-        <p:txBody>
-          <a:bodyPr spcFirstLastPara="1" wrap="square" lIns="91425" tIns="91425" rIns="91425" bIns="91425" anchor="t" anchorCtr="0">
-            <a:noAutofit/>
-          </a:bodyPr>
-          <a:lstStyle/>
-          <a:p>
-            <a:pPr marL="0" lvl="0" indent="0" algn="l" rtl="0">
+        <p:spPr/>
+        <p:txBody>
+          <a:bodyPr/>
+          <a:lstStyle/>
+          <a:p>
+            <a:pPr marL="0" marR="0" lvl="0" indent="0" algn="l" defTabSz="457200" rtl="0" eaLnBrk="1" fontAlgn="auto" latinLnBrk="0" hangingPunct="1">
+              <a:lnSpc>
+                <a:spcPct val="100000"/>
+              </a:lnSpc>
               <a:spcBef>
                 <a:spcPts val="0"/>
               </a:spcBef>
               <a:spcAft>
                 <a:spcPts val="0"/>
               </a:spcAft>
-              <a:buNone/>
+              <a:buClrTx/>
+              <a:buSzTx/>
+              <a:buFontTx/>
+              <a:buNone/>
+              <a:tabLst/>
+              <a:defRPr/>
             </a:pPr>
-            <a:endParaRPr/>
+            <a:r>
+              <a:rPr lang="en-US" dirty="0"/>
+              <a:t>Very useful when an exception is happening but you don’t know where or why</a:t>
+            </a:r>
+          </a:p>
+          <a:p>
+            <a:endParaRPr lang="en-US" dirty="0"/>
+          </a:p>
+          <a:p>
+            <a:r>
+              <a:rPr lang="en-US" dirty="0"/>
+              <a:t>Only spend time on this if you want to show the </a:t>
+            </a:r>
+            <a:r>
+              <a:rPr lang="en-US" dirty="0" err="1"/>
+              <a:t>DebugMeTest</a:t>
+            </a:r>
+            <a:r>
+              <a:rPr lang="en-US" dirty="0"/>
+              <a:t> examples,</a:t>
+            </a:r>
+            <a:r>
+              <a:rPr lang="en-US" baseline="0" dirty="0"/>
+              <a:t> in particular the final test which you can use to demonstrate this approach.</a:t>
+            </a:r>
+            <a:endParaRPr lang="en-US" dirty="0"/>
+          </a:p>
+        </p:txBody>
+      </p:sp>
+      <p:sp>
+        <p:nvSpPr>
+          <p:cNvPr id="4" name="Slide Number Placeholder 3"/>
+          <p:cNvSpPr>
+            <a:spLocks noGrp="1"/>
+          </p:cNvSpPr>
+          <p:nvPr>
+            <p:ph type="sldNum" sz="quarter" idx="10"/>
+          </p:nvPr>
+        </p:nvSpPr>
+        <p:spPr/>
+        <p:txBody>
+          <a:bodyPr/>
+          <a:lstStyle/>
+          <a:p>
+            <a:fld id="{9B5CF600-4147-7540-9DE4-6C8272E0EDC3}" type="slidenum">
+              <a:rPr lang="en-US" smtClean="0"/>
+              <a:t>8</a:t>
+            </a:fld>
+            <a:endParaRPr lang="en-US"/>
           </a:p>
         </p:txBody>
       </p:sp>
     </p:spTree>
+    <p:extLst>
+      <p:ext uri="{BB962C8B-B14F-4D97-AF65-F5344CB8AC3E}">
+        <p14:creationId xmlns:p14="http://schemas.microsoft.com/office/powerpoint/2010/main" val="3263308297"/>
+      </p:ext>
+    </p:extLst>
   </p:cSld>
   <p:clrMapOvr>
     <a:masterClrMapping/>
@@ -1979,7 +1584,7 @@
       </p:grpSpPr>
       <p:sp>
         <p:nvSpPr>
-          <p:cNvPr id="181" name="Shape 181"/>
+          <p:cNvPr id="2" name="Slide Image Placeholder 1"/>
           <p:cNvSpPr>
             <a:spLocks noGrp="1" noRot="1" noChangeAspect="1"/>
           </p:cNvSpPr>
@@ -1987,251 +1592,54 @@
             <p:ph type="sldImg"/>
           </p:nvPr>
         </p:nvSpPr>
-        <p:spPr>
-          <a:prstGeom prst="rect">
-            <a:avLst/>
-          </a:prstGeom>
-        </p:spPr>
+        <p:spPr/>
+      </p:sp>
+      <p:sp>
+        <p:nvSpPr>
+          <p:cNvPr id="3" name="Notes Placeholder 2"/>
+          <p:cNvSpPr>
+            <a:spLocks noGrp="1"/>
+          </p:cNvSpPr>
+          <p:nvPr>
+            <p:ph type="body" idx="1"/>
+          </p:nvPr>
+        </p:nvSpPr>
+        <p:spPr/>
         <p:txBody>
           <a:bodyPr/>
           <a:lstStyle/>
           <a:p>
-            <a:pPr lvl="0"/>
-            <a:endParaRPr/>
-          </a:p>
-        </p:txBody>
-      </p:sp>
-      <p:sp>
-        <p:nvSpPr>
-          <p:cNvPr id="182" name="Shape 182"/>
-          <p:cNvSpPr>
-            <a:spLocks noGrp="1"/>
-          </p:cNvSpPr>
-          <p:nvPr>
-            <p:ph type="body" sz="quarter" idx="1"/>
-          </p:nvPr>
-        </p:nvSpPr>
-        <p:spPr>
-          <a:prstGeom prst="rect">
-            <a:avLst/>
-          </a:prstGeom>
-        </p:spPr>
+            <a:endParaRPr lang="en-US" dirty="0"/>
+          </a:p>
+        </p:txBody>
+      </p:sp>
+      <p:sp>
+        <p:nvSpPr>
+          <p:cNvPr id="4" name="Slide Number Placeholder 3"/>
+          <p:cNvSpPr>
+            <a:spLocks noGrp="1"/>
+          </p:cNvSpPr>
+          <p:nvPr>
+            <p:ph type="sldNum" sz="quarter" idx="10"/>
+          </p:nvPr>
+        </p:nvSpPr>
+        <p:spPr/>
         <p:txBody>
           <a:bodyPr/>
           <a:lstStyle/>
           <a:p>
-            <a:pPr lvl="0" defTabSz="914400">
-              <a:lnSpc>
-                <a:spcPct val="100000"/>
-              </a:lnSpc>
-              <a:spcBef>
-                <a:spcPts val="400"/>
-              </a:spcBef>
-              <a:defRPr sz="1800"/>
-            </a:pPr>
-            <a:r>
-              <a:rPr sz="1200" dirty="0">
-                <a:latin typeface="Calibri"/>
-                <a:ea typeface="Calibri"/>
-                <a:cs typeface="Calibri"/>
-                <a:sym typeface="Calibri"/>
-              </a:rPr>
-              <a:t>[Demonstrate the techniques in Eclipse by solving a problem or two from </a:t>
-            </a:r>
-            <a:r>
-              <a:rPr lang="en-US" sz="1200" dirty="0" err="1">
-                <a:latin typeface="+mn-lt"/>
-                <a:ea typeface="Calibri"/>
-                <a:cs typeface="Calibri"/>
-                <a:sym typeface="Calibri"/>
-              </a:rPr>
-              <a:t>DebugMeTest</a:t>
-            </a:r>
-            <a:r>
-              <a:rPr sz="1200" dirty="0">
-                <a:latin typeface="Calibri"/>
-                <a:ea typeface="Calibri"/>
-                <a:cs typeface="Calibri"/>
-                <a:sym typeface="Calibri"/>
-              </a:rPr>
-              <a:t> together, give them time to answer the quiz question, then have them complete </a:t>
-            </a:r>
-            <a:r>
-              <a:rPr lang="en-US" sz="1200" dirty="0" err="1">
-                <a:latin typeface="+mn-lt"/>
-                <a:ea typeface="Calibri"/>
-                <a:cs typeface="Calibri"/>
-                <a:sym typeface="Calibri"/>
-              </a:rPr>
-              <a:t>DebugMeTest</a:t>
-            </a:r>
-            <a:r>
-              <a:rPr sz="1200" dirty="0">
-                <a:latin typeface="Calibri"/>
-                <a:ea typeface="Calibri"/>
-                <a:cs typeface="Calibri"/>
-                <a:sym typeface="Calibri"/>
-              </a:rPr>
-              <a:t>.]</a:t>
-            </a:r>
-            <a:endParaRPr lang="en-US" sz="1200" dirty="0">
-              <a:latin typeface="Calibri"/>
-              <a:ea typeface="Calibri"/>
-              <a:cs typeface="Calibri"/>
-              <a:sym typeface="Calibri"/>
-            </a:endParaRPr>
-          </a:p>
-          <a:p>
-            <a:pPr lvl="0" defTabSz="914400">
-              <a:lnSpc>
-                <a:spcPct val="100000"/>
-              </a:lnSpc>
-              <a:spcBef>
-                <a:spcPts val="400"/>
-              </a:spcBef>
-              <a:defRPr sz="1800"/>
-            </a:pPr>
-            <a:r>
-              <a:rPr lang="en-US" sz="1200" dirty="0">
-                <a:latin typeface="Calibri"/>
-                <a:ea typeface="Calibri"/>
-                <a:cs typeface="Calibri"/>
-                <a:sym typeface="Calibri"/>
-              </a:rPr>
-              <a:t>[You can also point them to </a:t>
-            </a:r>
-            <a:r>
-              <a:rPr lang="en-US" sz="1200" dirty="0" err="1">
-                <a:latin typeface="Calibri"/>
-                <a:ea typeface="Calibri"/>
-                <a:cs typeface="Calibri"/>
-                <a:sym typeface="Calibri"/>
-              </a:rPr>
-              <a:t>WhackABug</a:t>
-            </a:r>
-            <a:r>
-              <a:rPr lang="en-US" sz="1200" baseline="0" dirty="0">
-                <a:latin typeface="Calibri"/>
-                <a:ea typeface="Calibri"/>
-                <a:cs typeface="Calibri"/>
-                <a:sym typeface="Calibri"/>
-              </a:rPr>
-              <a:t> to get more practice when running a Java Application instead of JUnit)]</a:t>
-            </a:r>
-            <a:endParaRPr lang="en-US" sz="1200" dirty="0">
-              <a:latin typeface="Calibri"/>
-              <a:ea typeface="Calibri"/>
-              <a:cs typeface="Calibri"/>
-              <a:sym typeface="Calibri"/>
-            </a:endParaRPr>
-          </a:p>
-          <a:p>
-            <a:pPr lvl="0" defTabSz="914400">
-              <a:lnSpc>
-                <a:spcPct val="100000"/>
-              </a:lnSpc>
-              <a:spcBef>
-                <a:spcPts val="400"/>
-              </a:spcBef>
-              <a:defRPr sz="1800"/>
-            </a:pPr>
-            <a:r>
-              <a:rPr lang="en-US" sz="1200" dirty="0" err="1">
-                <a:latin typeface="Calibri"/>
-                <a:ea typeface="Calibri"/>
-                <a:cs typeface="Calibri"/>
-                <a:sym typeface="Calibri"/>
-              </a:rPr>
-              <a:t>DebugMeTest</a:t>
-            </a:r>
-            <a:r>
-              <a:rPr lang="en-US" sz="1200" dirty="0">
-                <a:latin typeface="Calibri"/>
-                <a:ea typeface="Calibri"/>
-                <a:cs typeface="Calibri"/>
-                <a:sym typeface="Calibri"/>
-              </a:rPr>
-              <a:t> make sure to demo:</a:t>
-            </a:r>
-          </a:p>
-          <a:p>
-            <a:pPr lvl="0" defTabSz="914400">
-              <a:lnSpc>
-                <a:spcPct val="100000"/>
-              </a:lnSpc>
-              <a:spcBef>
-                <a:spcPts val="400"/>
-              </a:spcBef>
-              <a:defRPr sz="1800"/>
-            </a:pPr>
-            <a:r>
-              <a:rPr lang="en-US" sz="1800" kern="1200" dirty="0" err="1">
-                <a:solidFill>
-                  <a:schemeClr val="tx1"/>
-                </a:solidFill>
-                <a:latin typeface="+mn-lt"/>
-                <a:ea typeface="+mn-ea"/>
-                <a:cs typeface="+mn-cs"/>
-              </a:rPr>
-              <a:t>uppercaseIfExclaimation</a:t>
-            </a:r>
-            <a:r>
-              <a:rPr lang="en-US" sz="1800" kern="1200" dirty="0">
-                <a:solidFill>
-                  <a:schemeClr val="tx1"/>
-                </a:solidFill>
-                <a:latin typeface="+mn-lt"/>
-                <a:ea typeface="+mn-ea"/>
-                <a:cs typeface="+mn-cs"/>
-              </a:rPr>
-              <a:t> which ends up showing</a:t>
-            </a:r>
-            <a:r>
-              <a:rPr lang="en-US" sz="1800" kern="1200" baseline="0" dirty="0">
-                <a:solidFill>
-                  <a:schemeClr val="tx1"/>
-                </a:solidFill>
-                <a:latin typeface="+mn-lt"/>
-                <a:ea typeface="+mn-ea"/>
-                <a:cs typeface="+mn-cs"/>
-              </a:rPr>
-              <a:t> the </a:t>
-            </a:r>
-            <a:r>
-              <a:rPr lang="en-US" sz="1800" kern="1200" baseline="0" dirty="0" err="1">
-                <a:solidFill>
-                  <a:schemeClr val="tx1"/>
-                </a:solidFill>
-                <a:latin typeface="+mn-lt"/>
-                <a:ea typeface="+mn-ea"/>
-                <a:cs typeface="+mn-cs"/>
-              </a:rPr>
-              <a:t>gotcha</a:t>
-            </a:r>
-            <a:r>
-              <a:rPr lang="en-US" sz="1800" kern="1200" baseline="0" dirty="0">
-                <a:solidFill>
-                  <a:schemeClr val="tx1"/>
-                </a:solidFill>
-                <a:latin typeface="+mn-lt"/>
-                <a:ea typeface="+mn-ea"/>
-                <a:cs typeface="+mn-cs"/>
-              </a:rPr>
-              <a:t> “string are immutable” in two slides</a:t>
-            </a:r>
-            <a:endParaRPr sz="1200" dirty="0">
-              <a:latin typeface="Calibri"/>
-              <a:ea typeface="Calibri"/>
-              <a:cs typeface="Calibri"/>
-              <a:sym typeface="Calibri"/>
-            </a:endParaRPr>
+            <a:fld id="{9B5CF600-4147-7540-9DE4-6C8272E0EDC3}" type="slidenum">
+              <a:rPr lang="en-US" smtClean="0"/>
+              <a:t>9</a:t>
+            </a:fld>
+            <a:endParaRPr lang="en-US"/>
           </a:p>
         </p:txBody>
       </p:sp>
     </p:spTree>
     <p:extLst>
       <p:ext uri="{BB962C8B-B14F-4D97-AF65-F5344CB8AC3E}">
-        <p14:creationId xmlns:p14="http://schemas.microsoft.com/office/powerpoint/2010/main" val="1168558161"/>
+        <p14:creationId xmlns:p14="http://schemas.microsoft.com/office/powerpoint/2010/main" val="983935836"/>
       </p:ext>
     </p:extLst>
   </p:cSld>
@@ -2242,11 +1650,11 @@
 </file>
 
 <file path=ppt/notesSlides/notesSlide9.xml><?xml version="1.0" encoding="utf-8"?>
-<p:notes xmlns:a="http://schemas.openxmlformats.org/drawingml/2006/main" xmlns:r="http://schemas.openxmlformats.org/officeDocument/2006/relationships" xmlns:p="http://schemas.openxmlformats.org/presentationml/2006/main" showMasterSp="0" showMasterPhAnim="0">
+<p:notes xmlns:a="http://schemas.openxmlformats.org/drawingml/2006/main" xmlns:r="http://schemas.openxmlformats.org/officeDocument/2006/relationships" xmlns:p="http://schemas.openxmlformats.org/presentationml/2006/main">
   <p:cSld>
     <p:spTree>
       <p:nvGrpSpPr>
-        <p:cNvPr id="1" name="Shape 133"/>
+        <p:cNvPr id="1" name=""/>
         <p:cNvGrpSpPr/>
         <p:nvPr/>
       </p:nvGrpSpPr>
@@ -2260,108 +1668,114 @@
       </p:grpSpPr>
       <p:sp>
         <p:nvSpPr>
-          <p:cNvPr id="134" name="Google Shape;134;g787571e53b_0_213:notes"/>
+          <p:cNvPr id="2" name="Slide Image Placeholder 1"/>
           <p:cNvSpPr>
             <a:spLocks noGrp="1" noRot="1" noChangeAspect="1"/>
           </p:cNvSpPr>
           <p:nvPr>
-            <p:ph type="sldImg" idx="2"/>
-          </p:nvPr>
-        </p:nvSpPr>
-        <p:spPr>
-          <a:xfrm>
-            <a:off x="1143000" y="685800"/>
-            <a:ext cx="4572000" cy="3429000"/>
-          </a:xfrm>
-          <a:custGeom>
-            <a:avLst/>
-            <a:gdLst/>
-            <a:ahLst/>
-            <a:cxnLst/>
-            <a:rect l="l" t="t" r="r" b="b"/>
-            <a:pathLst>
-              <a:path w="120000" h="120000" extrusionOk="0">
-                <a:moveTo>
-                  <a:pt x="0" y="0"/>
-                </a:moveTo>
-                <a:lnTo>
-                  <a:pt x="120000" y="0"/>
-                </a:lnTo>
-                <a:lnTo>
-                  <a:pt x="120000" y="120000"/>
-                </a:lnTo>
-                <a:lnTo>
-                  <a:pt x="0" y="120000"/>
-                </a:lnTo>
-                <a:close/>
-              </a:path>
-            </a:pathLst>
-          </a:custGeom>
-        </p:spPr>
-      </p:sp>
-      <p:sp>
-        <p:nvSpPr>
-          <p:cNvPr id="135" name="Google Shape;135;g787571e53b_0_213:notes"/>
-          <p:cNvSpPr txBox="1">
+            <p:ph type="sldImg"/>
+          </p:nvPr>
+        </p:nvSpPr>
+        <p:spPr/>
+      </p:sp>
+      <p:sp>
+        <p:nvSpPr>
+          <p:cNvPr id="3" name="Notes Placeholder 2"/>
+          <p:cNvSpPr>
             <a:spLocks noGrp="1"/>
           </p:cNvSpPr>
           <p:nvPr>
             <p:ph type="body" idx="1"/>
           </p:nvPr>
         </p:nvSpPr>
-        <p:spPr>
-          <a:xfrm>
-            <a:off x="685800" y="4343400"/>
-            <a:ext cx="5486400" cy="4114800"/>
-          </a:xfrm>
-          <a:prstGeom prst="rect">
-            <a:avLst/>
-          </a:prstGeom>
-        </p:spPr>
-        <p:txBody>
-          <a:bodyPr spcFirstLastPara="1" wrap="square" lIns="91425" tIns="91425" rIns="91425" bIns="91425" anchor="t" anchorCtr="0">
-            <a:noAutofit/>
-          </a:bodyPr>
-          <a:lstStyle/>
-          <a:p>
-            <a:pPr marL="0" lvl="0" indent="0" algn="l" rtl="0">
+        <p:spPr/>
+        <p:txBody>
+          <a:bodyPr/>
+          <a:lstStyle/>
+          <a:p>
+            <a:pPr marL="0" marR="0" lvl="0" indent="0" algn="l" defTabSz="457200" rtl="0" eaLnBrk="1" fontAlgn="auto" latinLnBrk="0" hangingPunct="1">
+              <a:lnSpc>
+                <a:spcPct val="100000"/>
+              </a:lnSpc>
               <a:spcBef>
                 <a:spcPts val="0"/>
               </a:spcBef>
               <a:spcAft>
                 <a:spcPts val="0"/>
               </a:spcAft>
-              <a:buNone/>
+              <a:buClrTx/>
+              <a:buSzTx/>
+              <a:buFontTx/>
+              <a:buNone/>
+              <a:tabLst/>
+              <a:defRPr/>
             </a:pPr>
             <a:r>
-              <a:rPr lang="en" sz="1800">
+              <a:rPr lang="en-US" sz="1200" kern="1200" dirty="0" err="1">
                 <a:solidFill>
-                  <a:srgbClr val="840629"/>
+                  <a:schemeClr val="tx1"/>
                 </a:solidFill>
+                <a:latin typeface="+mn-lt"/>
+                <a:ea typeface="+mn-ea"/>
+                <a:cs typeface="+mn-cs"/>
               </a:rPr>
-              <a:t>CAREFUL- if you do not stop the running debugger, you can have multiple instances running and the debugger variables you see might be from a different running </a:t>
-            </a:r>
-            <a:endParaRPr sz="1800">
-              <a:solidFill>
-                <a:srgbClr val="840629"/>
-              </a:solidFill>
-            </a:endParaRPr>
-          </a:p>
-          <a:p>
-            <a:pPr marL="0" lvl="0" indent="0" algn="l" rtl="0">
-              <a:spcBef>
-                <a:spcPts val="0"/>
-              </a:spcBef>
-              <a:spcAft>
-                <a:spcPts val="0"/>
-              </a:spcAft>
-              <a:buNone/>
-            </a:pPr>
-            <a:endParaRPr/>
+              <a:t>uppercaseIfExclaimation</a:t>
+            </a:r>
+            <a:r>
+              <a:rPr lang="en-US" sz="1200" kern="1200" dirty="0">
+                <a:solidFill>
+                  <a:schemeClr val="tx1"/>
+                </a:solidFill>
+                <a:latin typeface="+mn-lt"/>
+                <a:ea typeface="+mn-ea"/>
+                <a:cs typeface="+mn-cs"/>
+              </a:rPr>
+              <a:t> ends up showing</a:t>
+            </a:r>
+            <a:r>
+              <a:rPr lang="en-US" sz="1200" kern="1200" baseline="0" dirty="0">
+                <a:solidFill>
+                  <a:schemeClr val="tx1"/>
+                </a:solidFill>
+                <a:latin typeface="+mn-lt"/>
+                <a:ea typeface="+mn-ea"/>
+                <a:cs typeface="+mn-cs"/>
+              </a:rPr>
+              <a:t> this</a:t>
+            </a:r>
+            <a:endParaRPr lang="en-US" dirty="0"/>
+          </a:p>
+        </p:txBody>
+      </p:sp>
+      <p:sp>
+        <p:nvSpPr>
+          <p:cNvPr id="4" name="Slide Number Placeholder 3"/>
+          <p:cNvSpPr>
+            <a:spLocks noGrp="1"/>
+          </p:cNvSpPr>
+          <p:nvPr>
+            <p:ph type="sldNum" sz="quarter" idx="10"/>
+          </p:nvPr>
+        </p:nvSpPr>
+        <p:spPr/>
+        <p:txBody>
+          <a:bodyPr/>
+          <a:lstStyle/>
+          <a:p>
+            <a:fld id="{9B5CF600-4147-7540-9DE4-6C8272E0EDC3}" type="slidenum">
+              <a:rPr lang="en-US" smtClean="0"/>
+              <a:t>10</a:t>
+            </a:fld>
+            <a:endParaRPr lang="en-US"/>
           </a:p>
         </p:txBody>
       </p:sp>
     </p:spTree>
+    <p:extLst>
+      <p:ext uri="{BB962C8B-B14F-4D97-AF65-F5344CB8AC3E}">
+        <p14:creationId xmlns:p14="http://schemas.microsoft.com/office/powerpoint/2010/main" val="2214325646"/>
+      </p:ext>
+    </p:extLst>
   </p:cSld>
   <p:clrMapOvr>
     <a:masterClrMapping/>
@@ -2548,7 +1962,7 @@
           <a:p>
             <a:fld id="{5B07E745-2C70-2943-8487-A8F6E88ADF5E}" type="datetimeFigureOut">
               <a:rPr lang="en-US" smtClean="0"/>
-              <a:t>3/3/2025</a:t>
+              <a:t>9/11/2026</a:t>
             </a:fld>
             <a:endParaRPr lang="en-US"/>
           </a:p>
@@ -2716,7 +2130,7 @@
           <a:p>
             <a:fld id="{5B07E745-2C70-2943-8487-A8F6E88ADF5E}" type="datetimeFigureOut">
               <a:rPr lang="en-US" smtClean="0"/>
-              <a:t>3/3/2025</a:t>
+              <a:t>9/11/2026</a:t>
             </a:fld>
             <a:endParaRPr lang="en-US"/>
           </a:p>
@@ -2894,7 +2308,7 @@
           <a:p>
             <a:fld id="{5B07E745-2C70-2943-8487-A8F6E88ADF5E}" type="datetimeFigureOut">
               <a:rPr lang="en-US" smtClean="0"/>
-              <a:t>3/3/2025</a:t>
+              <a:t>9/11/2026</a:t>
             </a:fld>
             <a:endParaRPr lang="en-US"/>
           </a:p>
@@ -3439,7 +2853,7 @@
           <a:p>
             <a:fld id="{5B07E745-2C70-2943-8487-A8F6E88ADF5E}" type="datetimeFigureOut">
               <a:rPr lang="en-US" smtClean="0"/>
-              <a:t>3/3/2025</a:t>
+              <a:t>9/11/2026</a:t>
             </a:fld>
             <a:endParaRPr lang="en-US"/>
           </a:p>
@@ -3684,7 +3098,7 @@
           <a:p>
             <a:fld id="{5B07E745-2C70-2943-8487-A8F6E88ADF5E}" type="datetimeFigureOut">
               <a:rPr lang="en-US" smtClean="0"/>
-              <a:t>3/3/2025</a:t>
+              <a:t>9/11/2026</a:t>
             </a:fld>
             <a:endParaRPr lang="en-US"/>
           </a:p>
@@ -3969,7 +3383,7 @@
           <a:p>
             <a:fld id="{5B07E745-2C70-2943-8487-A8F6E88ADF5E}" type="datetimeFigureOut">
               <a:rPr lang="en-US" smtClean="0"/>
-              <a:t>3/3/2025</a:t>
+              <a:t>9/11/2026</a:t>
             </a:fld>
             <a:endParaRPr lang="en-US"/>
           </a:p>
@@ -4388,7 +3802,7 @@
           <a:p>
             <a:fld id="{5B07E745-2C70-2943-8487-A8F6E88ADF5E}" type="datetimeFigureOut">
               <a:rPr lang="en-US" smtClean="0"/>
-              <a:t>3/3/2025</a:t>
+              <a:t>9/11/2026</a:t>
             </a:fld>
             <a:endParaRPr lang="en-US"/>
           </a:p>
@@ -4505,7 +3919,7 @@
           <a:p>
             <a:fld id="{5B07E745-2C70-2943-8487-A8F6E88ADF5E}" type="datetimeFigureOut">
               <a:rPr lang="en-US" smtClean="0"/>
-              <a:t>3/3/2025</a:t>
+              <a:t>9/11/2026</a:t>
             </a:fld>
             <a:endParaRPr lang="en-US"/>
           </a:p>
@@ -4600,7 +4014,7 @@
           <a:p>
             <a:fld id="{5B07E745-2C70-2943-8487-A8F6E88ADF5E}" type="datetimeFigureOut">
               <a:rPr lang="en-US" smtClean="0"/>
-              <a:t>3/3/2025</a:t>
+              <a:t>9/11/2026</a:t>
             </a:fld>
             <a:endParaRPr lang="en-US"/>
           </a:p>
@@ -4875,7 +4289,7 @@
           <a:p>
             <a:fld id="{5B07E745-2C70-2943-8487-A8F6E88ADF5E}" type="datetimeFigureOut">
               <a:rPr lang="en-US" smtClean="0"/>
-              <a:t>3/3/2025</a:t>
+              <a:t>9/11/2026</a:t>
             </a:fld>
             <a:endParaRPr lang="en-US"/>
           </a:p>
@@ -5127,7 +4541,7 @@
           <a:p>
             <a:fld id="{5B07E745-2C70-2943-8487-A8F6E88ADF5E}" type="datetimeFigureOut">
               <a:rPr lang="en-US" smtClean="0"/>
-              <a:t>3/3/2025</a:t>
+              <a:t>9/11/2026</a:t>
             </a:fld>
             <a:endParaRPr lang="en-US"/>
           </a:p>
@@ -5338,7 +4752,7 @@
           <a:p>
             <a:fld id="{5B07E745-2C70-2943-8487-A8F6E88ADF5E}" type="datetimeFigureOut">
               <a:rPr lang="en-US" smtClean="0"/>
-              <a:t>3/3/2025</a:t>
+              <a:t>9/11/2026</a:t>
             </a:fld>
             <a:endParaRPr lang="en-US"/>
           </a:p>
@@ -5776,1188 +5190,6 @@
   <p:cSld>
     <p:spTree>
       <p:nvGrpSpPr>
-        <p:cNvPr id="1" name="Shape 136"/>
-        <p:cNvGrpSpPr/>
-        <p:nvPr/>
-      </p:nvGrpSpPr>
-      <p:grpSpPr>
-        <a:xfrm>
-          <a:off x="0" y="0"/>
-          <a:ext cx="0" cy="0"/>
-          <a:chOff x="0" y="0"/>
-          <a:chExt cx="0" cy="0"/>
-        </a:xfrm>
-      </p:grpSpPr>
-      <p:sp>
-        <p:nvSpPr>
-          <p:cNvPr id="137" name="Google Shape;137;p27"/>
-          <p:cNvSpPr txBox="1"/>
-          <p:nvPr/>
-        </p:nvSpPr>
-        <p:spPr>
-          <a:xfrm>
-            <a:off x="4738400" y="3985575"/>
-            <a:ext cx="1158000" cy="778800"/>
-          </a:xfrm>
-          <a:prstGeom prst="rect">
-            <a:avLst/>
-          </a:prstGeom>
-          <a:solidFill>
-            <a:srgbClr val="F9CB9C"/>
-          </a:solidFill>
-          <a:ln w="19050" cap="flat" cmpd="sng">
-            <a:solidFill>
-              <a:srgbClr val="000000"/>
-            </a:solidFill>
-            <a:prstDash val="solid"/>
-            <a:round/>
-            <a:headEnd type="none" w="sm" len="sm"/>
-            <a:tailEnd type="none" w="sm" len="sm"/>
-          </a:ln>
-        </p:spPr>
-        <p:txBody>
-          <a:bodyPr spcFirstLastPara="1" wrap="square" lIns="91425" tIns="91425" rIns="91425" bIns="91425" anchor="t" anchorCtr="0">
-            <a:noAutofit/>
-          </a:bodyPr>
-          <a:lstStyle/>
-          <a:p>
-            <a:pPr>
-              <a:spcBef>
-                <a:spcPts val="0"/>
-              </a:spcBef>
-              <a:spcAft>
-                <a:spcPts val="0"/>
-              </a:spcAft>
-            </a:pPr>
-            <a:r>
-              <a:rPr lang="en" sz="1600"/>
-              <a:t>Step Into</a:t>
-            </a:r>
-            <a:endParaRPr sz="1600"/>
-          </a:p>
-          <a:p>
-            <a:pPr>
-              <a:spcBef>
-                <a:spcPts val="0"/>
-              </a:spcBef>
-              <a:spcAft>
-                <a:spcPts val="0"/>
-              </a:spcAft>
-            </a:pPr>
-            <a:r>
-              <a:rPr lang="en" sz="1600"/>
-              <a:t>method</a:t>
-            </a:r>
-            <a:endParaRPr sz="1600"/>
-          </a:p>
-        </p:txBody>
-      </p:sp>
-      <p:sp>
-        <p:nvSpPr>
-          <p:cNvPr id="138" name="Google Shape;138;p27"/>
-          <p:cNvSpPr txBox="1"/>
-          <p:nvPr/>
-        </p:nvSpPr>
-        <p:spPr>
-          <a:xfrm>
-            <a:off x="189650" y="4165575"/>
-            <a:ext cx="1384500" cy="1513800"/>
-          </a:xfrm>
-          <a:prstGeom prst="rect">
-            <a:avLst/>
-          </a:prstGeom>
-          <a:solidFill>
-            <a:srgbClr val="F9CB9C"/>
-          </a:solidFill>
-          <a:ln w="19050" cap="flat" cmpd="sng">
-            <a:solidFill>
-              <a:srgbClr val="000000"/>
-            </a:solidFill>
-            <a:prstDash val="solid"/>
-            <a:round/>
-            <a:headEnd type="none" w="sm" len="sm"/>
-            <a:tailEnd type="none" w="sm" len="sm"/>
-          </a:ln>
-        </p:spPr>
-        <p:txBody>
-          <a:bodyPr spcFirstLastPara="1" wrap="square" lIns="91425" tIns="91425" rIns="91425" bIns="91425" anchor="t" anchorCtr="0">
-            <a:noAutofit/>
-          </a:bodyPr>
-          <a:lstStyle/>
-          <a:p>
-            <a:pPr>
-              <a:spcBef>
-                <a:spcPts val="0"/>
-              </a:spcBef>
-              <a:spcAft>
-                <a:spcPts val="0"/>
-              </a:spcAft>
-            </a:pPr>
-            <a:r>
-              <a:rPr lang="en" sz="1600"/>
-              <a:t>Resume</a:t>
-            </a:r>
-            <a:endParaRPr sz="1600"/>
-          </a:p>
-          <a:p>
-            <a:pPr>
-              <a:spcBef>
-                <a:spcPts val="0"/>
-              </a:spcBef>
-              <a:spcAft>
-                <a:spcPts val="0"/>
-              </a:spcAft>
-            </a:pPr>
-            <a:r>
-              <a:rPr lang="en" sz="1600"/>
-              <a:t>(until next break point or complete)</a:t>
-            </a:r>
-            <a:endParaRPr sz="1600"/>
-          </a:p>
-        </p:txBody>
-      </p:sp>
-      <p:sp>
-        <p:nvSpPr>
-          <p:cNvPr id="139" name="Google Shape;139;p27"/>
-          <p:cNvSpPr txBox="1">
-            <a:spLocks noGrp="1"/>
-          </p:cNvSpPr>
-          <p:nvPr>
-            <p:ph type="title"/>
-          </p:nvPr>
-        </p:nvSpPr>
-        <p:spPr>
-          <a:xfrm>
-            <a:off x="141350" y="919625"/>
-            <a:ext cx="8928600" cy="817200"/>
-          </a:xfrm>
-          <a:prstGeom prst="rect">
-            <a:avLst/>
-          </a:prstGeom>
-        </p:spPr>
-        <p:txBody>
-          <a:bodyPr spcFirstLastPara="1" vert="horz" wrap="square" lIns="91425" tIns="91425" rIns="91425" bIns="91425" rtlCol="0" anchor="b" anchorCtr="0">
-            <a:noAutofit/>
-          </a:bodyPr>
-          <a:lstStyle/>
-          <a:p>
-            <a:r>
-              <a:rPr lang="en" sz="2400">
-                <a:solidFill>
-                  <a:srgbClr val="840629"/>
-                </a:solidFill>
-              </a:rPr>
-              <a:t>Debugger Controls Up Close</a:t>
-            </a:r>
-            <a:endParaRPr sz="2400">
-              <a:solidFill>
-                <a:srgbClr val="840629"/>
-              </a:solidFill>
-            </a:endParaRPr>
-          </a:p>
-        </p:txBody>
-      </p:sp>
-      <p:pic>
-        <p:nvPicPr>
-          <p:cNvPr id="140" name="Google Shape;140;p27"/>
-          <p:cNvPicPr preferRelativeResize="0"/>
-          <p:nvPr/>
-        </p:nvPicPr>
-        <p:blipFill>
-          <a:blip r:embed="rId3">
-            <a:alphaModFix/>
-          </a:blip>
-          <a:stretch>
-            <a:fillRect/>
-          </a:stretch>
-        </p:blipFill>
-        <p:spPr>
-          <a:xfrm>
-            <a:off x="1574064" y="1924439"/>
-            <a:ext cx="5436825" cy="995475"/>
-          </a:xfrm>
-          <a:prstGeom prst="rect">
-            <a:avLst/>
-          </a:prstGeom>
-          <a:noFill/>
-          <a:ln>
-            <a:noFill/>
-          </a:ln>
-        </p:spPr>
-      </p:pic>
-      <p:sp>
-        <p:nvSpPr>
-          <p:cNvPr id="141" name="Google Shape;141;p27"/>
-          <p:cNvSpPr txBox="1"/>
-          <p:nvPr/>
-        </p:nvSpPr>
-        <p:spPr>
-          <a:xfrm>
-            <a:off x="1709475" y="4165575"/>
-            <a:ext cx="1158000" cy="534600"/>
-          </a:xfrm>
-          <a:prstGeom prst="rect">
-            <a:avLst/>
-          </a:prstGeom>
-          <a:solidFill>
-            <a:srgbClr val="F9CB9C"/>
-          </a:solidFill>
-          <a:ln w="19050" cap="flat" cmpd="sng">
-            <a:solidFill>
-              <a:srgbClr val="000000"/>
-            </a:solidFill>
-            <a:prstDash val="solid"/>
-            <a:round/>
-            <a:headEnd type="none" w="sm" len="sm"/>
-            <a:tailEnd type="none" w="sm" len="sm"/>
-          </a:ln>
-        </p:spPr>
-        <p:txBody>
-          <a:bodyPr spcFirstLastPara="1" wrap="square" lIns="91425" tIns="91425" rIns="91425" bIns="91425" anchor="t" anchorCtr="0">
-            <a:noAutofit/>
-          </a:bodyPr>
-          <a:lstStyle/>
-          <a:p>
-            <a:pPr>
-              <a:spcBef>
-                <a:spcPts val="0"/>
-              </a:spcBef>
-              <a:spcAft>
-                <a:spcPts val="0"/>
-              </a:spcAft>
-            </a:pPr>
-            <a:r>
-              <a:rPr lang="en" sz="1600"/>
-              <a:t>Suspend</a:t>
-            </a:r>
-            <a:endParaRPr sz="1600"/>
-          </a:p>
-        </p:txBody>
-      </p:sp>
-      <p:sp>
-        <p:nvSpPr>
-          <p:cNvPr id="142" name="Google Shape;142;p27"/>
-          <p:cNvSpPr txBox="1"/>
-          <p:nvPr/>
-        </p:nvSpPr>
-        <p:spPr>
-          <a:xfrm>
-            <a:off x="3111100" y="4165575"/>
-            <a:ext cx="1158000" cy="534600"/>
-          </a:xfrm>
-          <a:prstGeom prst="rect">
-            <a:avLst/>
-          </a:prstGeom>
-          <a:solidFill>
-            <a:srgbClr val="F9CB9C"/>
-          </a:solidFill>
-          <a:ln w="19050" cap="flat" cmpd="sng">
-            <a:solidFill>
-              <a:srgbClr val="000000"/>
-            </a:solidFill>
-            <a:prstDash val="solid"/>
-            <a:round/>
-            <a:headEnd type="none" w="sm" len="sm"/>
-            <a:tailEnd type="none" w="sm" len="sm"/>
-          </a:ln>
-        </p:spPr>
-        <p:txBody>
-          <a:bodyPr spcFirstLastPara="1" wrap="square" lIns="91425" tIns="91425" rIns="91425" bIns="91425" anchor="t" anchorCtr="0">
-            <a:noAutofit/>
-          </a:bodyPr>
-          <a:lstStyle/>
-          <a:p>
-            <a:pPr>
-              <a:spcBef>
-                <a:spcPts val="0"/>
-              </a:spcBef>
-              <a:spcAft>
-                <a:spcPts val="0"/>
-              </a:spcAft>
-            </a:pPr>
-            <a:r>
-              <a:rPr lang="en" sz="1600"/>
-              <a:t>Terminate</a:t>
-            </a:r>
-            <a:endParaRPr sz="1600"/>
-          </a:p>
-        </p:txBody>
-      </p:sp>
-      <p:sp>
-        <p:nvSpPr>
-          <p:cNvPr id="143" name="Google Shape;143;p27"/>
-          <p:cNvSpPr txBox="1"/>
-          <p:nvPr/>
-        </p:nvSpPr>
-        <p:spPr>
-          <a:xfrm>
-            <a:off x="5996650" y="3985575"/>
-            <a:ext cx="1158000" cy="778800"/>
-          </a:xfrm>
-          <a:prstGeom prst="rect">
-            <a:avLst/>
-          </a:prstGeom>
-          <a:solidFill>
-            <a:srgbClr val="F9CB9C"/>
-          </a:solidFill>
-          <a:ln w="19050" cap="flat" cmpd="sng">
-            <a:solidFill>
-              <a:srgbClr val="000000"/>
-            </a:solidFill>
-            <a:prstDash val="solid"/>
-            <a:round/>
-            <a:headEnd type="none" w="sm" len="sm"/>
-            <a:tailEnd type="none" w="sm" len="sm"/>
-          </a:ln>
-        </p:spPr>
-        <p:txBody>
-          <a:bodyPr spcFirstLastPara="1" wrap="square" lIns="91425" tIns="91425" rIns="91425" bIns="91425" anchor="t" anchorCtr="0">
-            <a:noAutofit/>
-          </a:bodyPr>
-          <a:lstStyle/>
-          <a:p>
-            <a:pPr>
-              <a:spcBef>
-                <a:spcPts val="0"/>
-              </a:spcBef>
-              <a:spcAft>
-                <a:spcPts val="0"/>
-              </a:spcAft>
-            </a:pPr>
-            <a:r>
-              <a:rPr lang="en" sz="1600"/>
-              <a:t>Step Over</a:t>
-            </a:r>
-            <a:endParaRPr sz="1600"/>
-          </a:p>
-          <a:p>
-            <a:pPr>
-              <a:spcBef>
-                <a:spcPts val="0"/>
-              </a:spcBef>
-              <a:spcAft>
-                <a:spcPts val="0"/>
-              </a:spcAft>
-            </a:pPr>
-            <a:r>
-              <a:rPr lang="en" sz="1600"/>
-              <a:t>method</a:t>
-            </a:r>
-            <a:endParaRPr sz="1600"/>
-          </a:p>
-        </p:txBody>
-      </p:sp>
-      <p:sp>
-        <p:nvSpPr>
-          <p:cNvPr id="144" name="Google Shape;144;p27"/>
-          <p:cNvSpPr txBox="1"/>
-          <p:nvPr/>
-        </p:nvSpPr>
-        <p:spPr>
-          <a:xfrm>
-            <a:off x="7332350" y="4024275"/>
-            <a:ext cx="1347300" cy="870600"/>
-          </a:xfrm>
-          <a:prstGeom prst="rect">
-            <a:avLst/>
-          </a:prstGeom>
-          <a:solidFill>
-            <a:srgbClr val="F9CB9C"/>
-          </a:solidFill>
-          <a:ln w="19050" cap="flat" cmpd="sng">
-            <a:solidFill>
-              <a:srgbClr val="000000"/>
-            </a:solidFill>
-            <a:prstDash val="solid"/>
-            <a:round/>
-            <a:headEnd type="none" w="sm" len="sm"/>
-            <a:tailEnd type="none" w="sm" len="sm"/>
-          </a:ln>
-        </p:spPr>
-        <p:txBody>
-          <a:bodyPr spcFirstLastPara="1" wrap="square" lIns="91425" tIns="91425" rIns="91425" bIns="91425" anchor="t" anchorCtr="0">
-            <a:noAutofit/>
-          </a:bodyPr>
-          <a:lstStyle/>
-          <a:p>
-            <a:pPr>
-              <a:spcBef>
-                <a:spcPts val="0"/>
-              </a:spcBef>
-              <a:spcAft>
-                <a:spcPts val="0"/>
-              </a:spcAft>
-            </a:pPr>
-            <a:r>
-              <a:rPr lang="en" sz="1600"/>
-              <a:t>Step Return (Out)</a:t>
-            </a:r>
-            <a:endParaRPr sz="1600"/>
-          </a:p>
-        </p:txBody>
-      </p:sp>
-      <p:cxnSp>
-        <p:nvCxnSpPr>
-          <p:cNvPr id="145" name="Google Shape;145;p27"/>
-          <p:cNvCxnSpPr/>
-          <p:nvPr/>
-        </p:nvCxnSpPr>
-        <p:spPr>
-          <a:xfrm rot="10800000" flipH="1">
-            <a:off x="835875" y="2850375"/>
-            <a:ext cx="1080000" cy="1315200"/>
-          </a:xfrm>
-          <a:prstGeom prst="straightConnector1">
-            <a:avLst/>
-          </a:prstGeom>
-          <a:noFill/>
-          <a:ln w="76200" cap="flat" cmpd="sng">
-            <a:solidFill>
-              <a:schemeClr val="dk2"/>
-            </a:solidFill>
-            <a:prstDash val="solid"/>
-            <a:round/>
-            <a:headEnd type="none" w="med" len="med"/>
-            <a:tailEnd type="triangle" w="med" len="med"/>
-          </a:ln>
-        </p:spPr>
-      </p:cxnSp>
-      <p:cxnSp>
-        <p:nvCxnSpPr>
-          <p:cNvPr id="146" name="Google Shape;146;p27"/>
-          <p:cNvCxnSpPr>
-            <a:stCxn id="142" idx="0"/>
-          </p:cNvCxnSpPr>
-          <p:nvPr/>
-        </p:nvCxnSpPr>
-        <p:spPr>
-          <a:xfrm rot="10800000">
-            <a:off x="3639100" y="2721675"/>
-            <a:ext cx="51000" cy="1443900"/>
-          </a:xfrm>
-          <a:prstGeom prst="straightConnector1">
-            <a:avLst/>
-          </a:prstGeom>
-          <a:noFill/>
-          <a:ln w="76200" cap="flat" cmpd="sng">
-            <a:solidFill>
-              <a:schemeClr val="dk2"/>
-            </a:solidFill>
-            <a:prstDash val="solid"/>
-            <a:round/>
-            <a:headEnd type="none" w="med" len="med"/>
-            <a:tailEnd type="triangle" w="med" len="med"/>
-          </a:ln>
-        </p:spPr>
-      </p:cxnSp>
-      <p:cxnSp>
-        <p:nvCxnSpPr>
-          <p:cNvPr id="147" name="Google Shape;147;p27"/>
-          <p:cNvCxnSpPr>
-            <a:stCxn id="141" idx="0"/>
-          </p:cNvCxnSpPr>
-          <p:nvPr/>
-        </p:nvCxnSpPr>
-        <p:spPr>
-          <a:xfrm rot="10800000" flipH="1">
-            <a:off x="2288475" y="2824575"/>
-            <a:ext cx="579000" cy="1341000"/>
-          </a:xfrm>
-          <a:prstGeom prst="straightConnector1">
-            <a:avLst/>
-          </a:prstGeom>
-          <a:noFill/>
-          <a:ln w="76200" cap="flat" cmpd="sng">
-            <a:solidFill>
-              <a:schemeClr val="dk2"/>
-            </a:solidFill>
-            <a:prstDash val="solid"/>
-            <a:round/>
-            <a:headEnd type="none" w="med" len="med"/>
-            <a:tailEnd type="triangle" w="med" len="med"/>
-          </a:ln>
-        </p:spPr>
-      </p:cxnSp>
-      <p:cxnSp>
-        <p:nvCxnSpPr>
-          <p:cNvPr id="148" name="Google Shape;148;p27"/>
-          <p:cNvCxnSpPr>
-            <a:stCxn id="137" idx="0"/>
-          </p:cNvCxnSpPr>
-          <p:nvPr/>
-        </p:nvCxnSpPr>
-        <p:spPr>
-          <a:xfrm rot="10800000">
-            <a:off x="5027900" y="2811675"/>
-            <a:ext cx="289500" cy="1173900"/>
-          </a:xfrm>
-          <a:prstGeom prst="straightConnector1">
-            <a:avLst/>
-          </a:prstGeom>
-          <a:noFill/>
-          <a:ln w="76200" cap="flat" cmpd="sng">
-            <a:solidFill>
-              <a:schemeClr val="dk2"/>
-            </a:solidFill>
-            <a:prstDash val="solid"/>
-            <a:round/>
-            <a:headEnd type="none" w="med" len="med"/>
-            <a:tailEnd type="triangle" w="med" len="med"/>
-          </a:ln>
-        </p:spPr>
-      </p:cxnSp>
-      <p:cxnSp>
-        <p:nvCxnSpPr>
-          <p:cNvPr id="149" name="Google Shape;149;p27"/>
-          <p:cNvCxnSpPr>
-            <a:stCxn id="143" idx="0"/>
-          </p:cNvCxnSpPr>
-          <p:nvPr/>
-        </p:nvCxnSpPr>
-        <p:spPr>
-          <a:xfrm rot="10800000">
-            <a:off x="5767450" y="2666175"/>
-            <a:ext cx="808200" cy="1319400"/>
-          </a:xfrm>
-          <a:prstGeom prst="straightConnector1">
-            <a:avLst/>
-          </a:prstGeom>
-          <a:noFill/>
-          <a:ln w="76200" cap="flat" cmpd="sng">
-            <a:solidFill>
-              <a:schemeClr val="dk2"/>
-            </a:solidFill>
-            <a:prstDash val="solid"/>
-            <a:round/>
-            <a:headEnd type="none" w="med" len="med"/>
-            <a:tailEnd type="triangle" w="med" len="med"/>
-          </a:ln>
-        </p:spPr>
-      </p:cxnSp>
-      <p:cxnSp>
-        <p:nvCxnSpPr>
-          <p:cNvPr id="150" name="Google Shape;150;p27"/>
-          <p:cNvCxnSpPr>
-            <a:stCxn id="144" idx="0"/>
-          </p:cNvCxnSpPr>
-          <p:nvPr/>
-        </p:nvCxnSpPr>
-        <p:spPr>
-          <a:xfrm rot="10800000">
-            <a:off x="6621500" y="2740575"/>
-            <a:ext cx="1384500" cy="1283700"/>
-          </a:xfrm>
-          <a:prstGeom prst="straightConnector1">
-            <a:avLst/>
-          </a:prstGeom>
-          <a:noFill/>
-          <a:ln w="76200" cap="flat" cmpd="sng">
-            <a:solidFill>
-              <a:schemeClr val="dk2"/>
-            </a:solidFill>
-            <a:prstDash val="solid"/>
-            <a:round/>
-            <a:headEnd type="none" w="med" len="med"/>
-            <a:tailEnd type="triangle" w="med" len="med"/>
-          </a:ln>
-        </p:spPr>
-      </p:cxnSp>
-    </p:spTree>
-  </p:cSld>
-  <p:clrMapOvr>
-    <a:masterClrMapping/>
-  </p:clrMapOvr>
-</p:sld>
-</file>
-
-<file path=ppt/slides/slide11.xml><?xml version="1.0" encoding="utf-8"?>
-<p:sld xmlns:a="http://schemas.openxmlformats.org/drawingml/2006/main" xmlns:r="http://schemas.openxmlformats.org/officeDocument/2006/relationships" xmlns:p="http://schemas.openxmlformats.org/presentationml/2006/main">
-  <p:cSld>
-    <p:spTree>
-      <p:nvGrpSpPr>
-        <p:cNvPr id="1" name="Shape 123"/>
-        <p:cNvGrpSpPr/>
-        <p:nvPr/>
-      </p:nvGrpSpPr>
-      <p:grpSpPr>
-        <a:xfrm>
-          <a:off x="0" y="0"/>
-          <a:ext cx="0" cy="0"/>
-          <a:chOff x="0" y="0"/>
-          <a:chExt cx="0" cy="0"/>
-        </a:xfrm>
-      </p:grpSpPr>
-      <p:pic>
-        <p:nvPicPr>
-          <p:cNvPr id="124" name="Google Shape;124;p26"/>
-          <p:cNvPicPr preferRelativeResize="0"/>
-          <p:nvPr/>
-        </p:nvPicPr>
-        <p:blipFill>
-          <a:blip r:embed="rId3">
-            <a:alphaModFix/>
-          </a:blip>
-          <a:stretch>
-            <a:fillRect/>
-          </a:stretch>
-        </p:blipFill>
-        <p:spPr>
-          <a:xfrm>
-            <a:off x="5501650" y="1873100"/>
-            <a:ext cx="3088000" cy="1478750"/>
-          </a:xfrm>
-          <a:prstGeom prst="rect">
-            <a:avLst/>
-          </a:prstGeom>
-          <a:noFill/>
-          <a:ln>
-            <a:noFill/>
-          </a:ln>
-        </p:spPr>
-      </p:pic>
-      <p:cxnSp>
-        <p:nvCxnSpPr>
-          <p:cNvPr id="125" name="Google Shape;125;p26"/>
-          <p:cNvCxnSpPr>
-            <a:stCxn id="126" idx="0"/>
-          </p:cNvCxnSpPr>
-          <p:nvPr/>
-        </p:nvCxnSpPr>
-        <p:spPr>
-          <a:xfrm rot="10800000">
-            <a:off x="6082100" y="2670450"/>
-            <a:ext cx="1337400" cy="1526400"/>
-          </a:xfrm>
-          <a:prstGeom prst="straightConnector1">
-            <a:avLst/>
-          </a:prstGeom>
-          <a:noFill/>
-          <a:ln w="76200" cap="flat" cmpd="sng">
-            <a:solidFill>
-              <a:schemeClr val="dk2"/>
-            </a:solidFill>
-            <a:prstDash val="solid"/>
-            <a:round/>
-            <a:headEnd type="none" w="med" len="med"/>
-            <a:tailEnd type="triangle" w="med" len="med"/>
-          </a:ln>
-        </p:spPr>
-      </p:cxnSp>
-      <p:sp>
-        <p:nvSpPr>
-          <p:cNvPr id="126" name="Google Shape;126;p26"/>
-          <p:cNvSpPr txBox="1"/>
-          <p:nvPr/>
-        </p:nvSpPr>
-        <p:spPr>
-          <a:xfrm>
-            <a:off x="6249350" y="4196850"/>
-            <a:ext cx="2340300" cy="733200"/>
-          </a:xfrm>
-          <a:prstGeom prst="rect">
-            <a:avLst/>
-          </a:prstGeom>
-          <a:solidFill>
-            <a:srgbClr val="F9CB9C"/>
-          </a:solidFill>
-          <a:ln w="19050" cap="flat" cmpd="sng">
-            <a:solidFill>
-              <a:srgbClr val="000000"/>
-            </a:solidFill>
-            <a:prstDash val="solid"/>
-            <a:round/>
-            <a:headEnd type="none" w="sm" len="sm"/>
-            <a:tailEnd type="none" w="sm" len="sm"/>
-          </a:ln>
-        </p:spPr>
-        <p:txBody>
-          <a:bodyPr spcFirstLastPara="1" wrap="square" lIns="91425" tIns="91425" rIns="91425" bIns="91425" anchor="t" anchorCtr="0">
-            <a:noAutofit/>
-          </a:bodyPr>
-          <a:lstStyle/>
-          <a:p>
-            <a:pPr>
-              <a:spcBef>
-                <a:spcPts val="0"/>
-              </a:spcBef>
-              <a:spcAft>
-                <a:spcPts val="0"/>
-              </a:spcAft>
-            </a:pPr>
-            <a:r>
-              <a:rPr lang="en" sz="1600"/>
-              <a:t>Indicates that the program is still running</a:t>
-            </a:r>
-            <a:endParaRPr sz="1600"/>
-          </a:p>
-        </p:txBody>
-      </p:sp>
-      <p:sp>
-        <p:nvSpPr>
-          <p:cNvPr id="127" name="Google Shape;127;p26"/>
-          <p:cNvSpPr txBox="1"/>
-          <p:nvPr/>
-        </p:nvSpPr>
-        <p:spPr>
-          <a:xfrm>
-            <a:off x="320725" y="3756000"/>
-            <a:ext cx="2803200" cy="1614900"/>
-          </a:xfrm>
-          <a:prstGeom prst="rect">
-            <a:avLst/>
-          </a:prstGeom>
-          <a:solidFill>
-            <a:srgbClr val="F9CB9C"/>
-          </a:solidFill>
-          <a:ln w="19050" cap="flat" cmpd="sng">
-            <a:solidFill>
-              <a:srgbClr val="000000"/>
-            </a:solidFill>
-            <a:prstDash val="solid"/>
-            <a:round/>
-            <a:headEnd type="none" w="sm" len="sm"/>
-            <a:tailEnd type="none" w="sm" len="sm"/>
-          </a:ln>
-        </p:spPr>
-        <p:txBody>
-          <a:bodyPr spcFirstLastPara="1" wrap="square" lIns="91425" tIns="91425" rIns="91425" bIns="91425" anchor="t" anchorCtr="0">
-            <a:noAutofit/>
-          </a:bodyPr>
-          <a:lstStyle/>
-          <a:p>
-            <a:pPr>
-              <a:spcBef>
-                <a:spcPts val="0"/>
-              </a:spcBef>
-              <a:spcAft>
-                <a:spcPts val="0"/>
-              </a:spcAft>
-            </a:pPr>
-            <a:r>
-              <a:rPr lang="en" sz="1600"/>
-              <a:t>Even after you click the red STOP SQUARE, if you ran it multiple times before, you have to repeatedly clear it (or restart Eclipse)</a:t>
-            </a:r>
-            <a:endParaRPr sz="1600"/>
-          </a:p>
-        </p:txBody>
-      </p:sp>
-      <p:pic>
-        <p:nvPicPr>
-          <p:cNvPr id="128" name="Google Shape;128;p26"/>
-          <p:cNvPicPr preferRelativeResize="0"/>
-          <p:nvPr/>
-        </p:nvPicPr>
-        <p:blipFill>
-          <a:blip r:embed="rId4">
-            <a:alphaModFix/>
-          </a:blip>
-          <a:stretch>
-            <a:fillRect/>
-          </a:stretch>
-        </p:blipFill>
-        <p:spPr>
-          <a:xfrm>
-            <a:off x="435301" y="1975950"/>
-            <a:ext cx="3988125" cy="898500"/>
-          </a:xfrm>
-          <a:prstGeom prst="rect">
-            <a:avLst/>
-          </a:prstGeom>
-          <a:noFill/>
-          <a:ln>
-            <a:noFill/>
-          </a:ln>
-        </p:spPr>
-      </p:pic>
-      <p:pic>
-        <p:nvPicPr>
-          <p:cNvPr id="129" name="Google Shape;129;p26"/>
-          <p:cNvPicPr preferRelativeResize="0"/>
-          <p:nvPr/>
-        </p:nvPicPr>
-        <p:blipFill>
-          <a:blip r:embed="rId5">
-            <a:alphaModFix/>
-          </a:blip>
-          <a:stretch>
-            <a:fillRect/>
-          </a:stretch>
-        </p:blipFill>
-        <p:spPr>
-          <a:xfrm>
-            <a:off x="3905588" y="4196850"/>
-            <a:ext cx="1562100" cy="1524000"/>
-          </a:xfrm>
-          <a:prstGeom prst="rect">
-            <a:avLst/>
-          </a:prstGeom>
-          <a:noFill/>
-          <a:ln w="19050" cap="flat" cmpd="sng">
-            <a:solidFill>
-              <a:schemeClr val="dk2"/>
-            </a:solidFill>
-            <a:prstDash val="solid"/>
-            <a:round/>
-            <a:headEnd type="none" w="sm" len="sm"/>
-            <a:tailEnd type="none" w="sm" len="sm"/>
-          </a:ln>
-        </p:spPr>
-      </p:pic>
-      <p:cxnSp>
-        <p:nvCxnSpPr>
-          <p:cNvPr id="130" name="Google Shape;130;p26"/>
-          <p:cNvCxnSpPr/>
-          <p:nvPr/>
-        </p:nvCxnSpPr>
-        <p:spPr>
-          <a:xfrm rot="10800000" flipH="1">
-            <a:off x="1183000" y="2580125"/>
-            <a:ext cx="38700" cy="1183200"/>
-          </a:xfrm>
-          <a:prstGeom prst="straightConnector1">
-            <a:avLst/>
-          </a:prstGeom>
-          <a:noFill/>
-          <a:ln w="76200" cap="flat" cmpd="sng">
-            <a:solidFill>
-              <a:schemeClr val="dk2"/>
-            </a:solidFill>
-            <a:prstDash val="solid"/>
-            <a:round/>
-            <a:headEnd type="none" w="med" len="med"/>
-            <a:tailEnd type="triangle" w="med" len="med"/>
-          </a:ln>
-        </p:spPr>
-      </p:cxnSp>
-      <p:cxnSp>
-        <p:nvCxnSpPr>
-          <p:cNvPr id="131" name="Google Shape;131;p26"/>
-          <p:cNvCxnSpPr>
-            <a:endCxn id="129" idx="1"/>
-          </p:cNvCxnSpPr>
-          <p:nvPr/>
-        </p:nvCxnSpPr>
-        <p:spPr>
-          <a:xfrm>
-            <a:off x="2918888" y="4804950"/>
-            <a:ext cx="986700" cy="153900"/>
-          </a:xfrm>
-          <a:prstGeom prst="straightConnector1">
-            <a:avLst/>
-          </a:prstGeom>
-          <a:noFill/>
-          <a:ln w="76200" cap="flat" cmpd="sng">
-            <a:solidFill>
-              <a:schemeClr val="dk2"/>
-            </a:solidFill>
-            <a:prstDash val="solid"/>
-            <a:round/>
-            <a:headEnd type="none" w="med" len="med"/>
-            <a:tailEnd type="triangle" w="med" len="med"/>
-          </a:ln>
-        </p:spPr>
-      </p:cxnSp>
-      <p:sp>
-        <p:nvSpPr>
-          <p:cNvPr id="132" name="Google Shape;132;p26"/>
-          <p:cNvSpPr txBox="1">
-            <a:spLocks noGrp="1"/>
-          </p:cNvSpPr>
-          <p:nvPr>
-            <p:ph type="title"/>
-          </p:nvPr>
-        </p:nvSpPr>
-        <p:spPr>
-          <a:xfrm>
-            <a:off x="141350" y="919625"/>
-            <a:ext cx="8928600" cy="817200"/>
-          </a:xfrm>
-          <a:prstGeom prst="rect">
-            <a:avLst/>
-          </a:prstGeom>
-        </p:spPr>
-        <p:txBody>
-          <a:bodyPr spcFirstLastPara="1" vert="horz" wrap="square" lIns="91425" tIns="91425" rIns="91425" bIns="91425" rtlCol="0" anchor="b" anchorCtr="0">
-            <a:noAutofit/>
-          </a:bodyPr>
-          <a:lstStyle/>
-          <a:p>
-            <a:r>
-              <a:rPr lang="en" sz="2400">
-                <a:solidFill>
-                  <a:srgbClr val="840629"/>
-                </a:solidFill>
-              </a:rPr>
-              <a:t>ALWAYS (1) </a:t>
-            </a:r>
-            <a:r>
-              <a:rPr lang="en" sz="2400" u="sng">
-                <a:solidFill>
-                  <a:srgbClr val="840629"/>
-                </a:solidFill>
-              </a:rPr>
-              <a:t>stop</a:t>
-            </a:r>
-            <a:r>
-              <a:rPr lang="en" sz="2400">
-                <a:solidFill>
-                  <a:srgbClr val="840629"/>
-                </a:solidFill>
-              </a:rPr>
-              <a:t> the debugger AND (2) </a:t>
-            </a:r>
-            <a:r>
-              <a:rPr lang="en" sz="2400" u="sng">
-                <a:solidFill>
-                  <a:srgbClr val="840629"/>
-                </a:solidFill>
-              </a:rPr>
-              <a:t>clear</a:t>
-            </a:r>
-            <a:r>
-              <a:rPr lang="en" sz="2400">
-                <a:solidFill>
-                  <a:srgbClr val="840629"/>
-                </a:solidFill>
-              </a:rPr>
-              <a:t> it when done!</a:t>
-            </a:r>
-            <a:endParaRPr sz="2400">
-              <a:solidFill>
-                <a:srgbClr val="840629"/>
-              </a:solidFill>
-            </a:endParaRPr>
-          </a:p>
-        </p:txBody>
-      </p:sp>
-    </p:spTree>
-  </p:cSld>
-  <p:clrMapOvr>
-    <a:masterClrMapping/>
-  </p:clrMapOvr>
-</p:sld>
-</file>
-
-<file path=ppt/slides/slide12.xml><?xml version="1.0" encoding="utf-8"?>
-<p:sld xmlns:a="http://schemas.openxmlformats.org/drawingml/2006/main" xmlns:r="http://schemas.openxmlformats.org/officeDocument/2006/relationships" xmlns:p="http://schemas.openxmlformats.org/presentationml/2006/main">
-  <p:cSld>
-    <p:spTree>
-      <p:nvGrpSpPr>
-        <p:cNvPr id="1" name=""/>
-        <p:cNvGrpSpPr/>
-        <p:nvPr/>
-      </p:nvGrpSpPr>
-      <p:grpSpPr>
-        <a:xfrm>
-          <a:off x="0" y="0"/>
-          <a:ext cx="0" cy="0"/>
-          <a:chOff x="0" y="0"/>
-          <a:chExt cx="0" cy="0"/>
-        </a:xfrm>
-      </p:grpSpPr>
-      <p:sp>
-        <p:nvSpPr>
-          <p:cNvPr id="2" name="Title 1"/>
-          <p:cNvSpPr>
-            <a:spLocks noGrp="1"/>
-          </p:cNvSpPr>
-          <p:nvPr>
-            <p:ph type="title"/>
-          </p:nvPr>
-        </p:nvSpPr>
-        <p:spPr/>
-        <p:txBody>
-          <a:bodyPr/>
-          <a:lstStyle/>
-          <a:p>
-            <a:r>
-              <a:rPr lang="en-US" dirty="0"/>
-              <a:t>Exception Breakpoint</a:t>
-            </a:r>
-          </a:p>
-        </p:txBody>
-      </p:sp>
-      <p:sp>
-        <p:nvSpPr>
-          <p:cNvPr id="3" name="Content Placeholder 2"/>
-          <p:cNvSpPr>
-            <a:spLocks noGrp="1"/>
-          </p:cNvSpPr>
-          <p:nvPr>
-            <p:ph idx="1"/>
-          </p:nvPr>
-        </p:nvSpPr>
-        <p:spPr>
-          <a:xfrm>
-            <a:off x="457200" y="1179786"/>
-            <a:ext cx="8229600" cy="4525963"/>
-          </a:xfrm>
-        </p:spPr>
-        <p:txBody>
-          <a:bodyPr/>
-          <a:lstStyle/>
-          <a:p>
-            <a:pPr marL="0" indent="0">
-              <a:buNone/>
-            </a:pPr>
-            <a:r>
-              <a:rPr lang="en-US" dirty="0"/>
-              <a:t>Very useful when an exception is happening but you don’t know where or why</a:t>
-            </a:r>
-          </a:p>
-          <a:p>
-            <a:r>
-              <a:rPr lang="en-US" dirty="0"/>
-              <a:t>Exception Tab</a:t>
-            </a:r>
-          </a:p>
-          <a:p>
-            <a:r>
-              <a:rPr lang="en-US" dirty="0"/>
-              <a:t>Exclamation point button</a:t>
-            </a:r>
-          </a:p>
-          <a:p>
-            <a:r>
-              <a:rPr lang="en-US" dirty="0"/>
-              <a:t>Find the exception type you want</a:t>
-            </a:r>
-          </a:p>
-          <a:p>
-            <a:r>
-              <a:rPr lang="en-US" dirty="0"/>
-              <a:t>Add a breakpoint</a:t>
-            </a:r>
-          </a:p>
-        </p:txBody>
-      </p:sp>
-      <p:pic>
-        <p:nvPicPr>
-          <p:cNvPr id="4" name="Picture 3"/>
-          <p:cNvPicPr>
-            <a:picLocks noChangeAspect="1"/>
-          </p:cNvPicPr>
-          <p:nvPr/>
-        </p:nvPicPr>
-        <p:blipFill rotWithShape="1">
-          <a:blip r:embed="rId3"/>
-          <a:srcRect b="39740"/>
-          <a:stretch/>
-        </p:blipFill>
-        <p:spPr>
-          <a:xfrm>
-            <a:off x="176869" y="4599549"/>
-            <a:ext cx="8509931" cy="2212400"/>
-          </a:xfrm>
-          <a:prstGeom prst="rect">
-            <a:avLst/>
-          </a:prstGeom>
-        </p:spPr>
-      </p:pic>
-    </p:spTree>
-    <p:extLst>
-      <p:ext uri="{BB962C8B-B14F-4D97-AF65-F5344CB8AC3E}">
-        <p14:creationId xmlns:p14="http://schemas.microsoft.com/office/powerpoint/2010/main" val="2752612510"/>
-      </p:ext>
-    </p:extLst>
-  </p:cSld>
-  <p:clrMapOvr>
-    <a:masterClrMapping/>
-  </p:clrMapOvr>
-</p:sld>
-</file>
-
-<file path=ppt/slides/slide13.xml><?xml version="1.0" encoding="utf-8"?>
-<p:sld xmlns:a="http://schemas.openxmlformats.org/drawingml/2006/main" xmlns:r="http://schemas.openxmlformats.org/officeDocument/2006/relationships" xmlns:p="http://schemas.openxmlformats.org/presentationml/2006/main">
-  <p:cSld>
-    <p:spTree>
-      <p:nvGrpSpPr>
-        <p:cNvPr id="1" name=""/>
-        <p:cNvGrpSpPr/>
-        <p:nvPr/>
-      </p:nvGrpSpPr>
-      <p:grpSpPr>
-        <a:xfrm>
-          <a:off x="0" y="0"/>
-          <a:ext cx="0" cy="0"/>
-          <a:chOff x="0" y="0"/>
-          <a:chExt cx="0" cy="0"/>
-        </a:xfrm>
-      </p:grpSpPr>
-      <p:sp>
-        <p:nvSpPr>
-          <p:cNvPr id="2" name="Title 1"/>
-          <p:cNvSpPr>
-            <a:spLocks noGrp="1"/>
-          </p:cNvSpPr>
-          <p:nvPr>
-            <p:ph type="title"/>
-          </p:nvPr>
-        </p:nvSpPr>
-        <p:spPr>
-          <a:xfrm>
-            <a:off x="457200" y="0"/>
-            <a:ext cx="8229600" cy="851770"/>
-          </a:xfrm>
-        </p:spPr>
-        <p:txBody>
-          <a:bodyPr/>
-          <a:lstStyle/>
-          <a:p>
-            <a:r>
-              <a:rPr lang="en-US" dirty="0"/>
-              <a:t>Interpreting a JUnit Test Failure</a:t>
-            </a:r>
-          </a:p>
-        </p:txBody>
-      </p:sp>
-      <p:pic>
-        <p:nvPicPr>
-          <p:cNvPr id="6" name="Content Placeholder 5" descr="Text&#10;&#10;Description automatically generated">
-            <a:extLst>
-              <a:ext uri="{FF2B5EF4-FFF2-40B4-BE49-F238E27FC236}">
-                <a16:creationId xmlns:a16="http://schemas.microsoft.com/office/drawing/2014/main" id="{CE5397F3-8D2F-904C-8EC3-781843287773}"/>
-              </a:ext>
-            </a:extLst>
-          </p:cNvPr>
-          <p:cNvPicPr>
-            <a:picLocks noGrp="1" noChangeAspect="1"/>
-          </p:cNvPicPr>
-          <p:nvPr>
-            <p:ph idx="1"/>
-          </p:nvPr>
-        </p:nvPicPr>
-        <p:blipFill>
-          <a:blip r:embed="rId3"/>
-          <a:stretch>
-            <a:fillRect/>
-          </a:stretch>
-        </p:blipFill>
-        <p:spPr>
-          <a:xfrm>
-            <a:off x="407807" y="868495"/>
-            <a:ext cx="8435568" cy="5989505"/>
-          </a:xfrm>
-        </p:spPr>
-      </p:pic>
-    </p:spTree>
-    <p:extLst>
-      <p:ext uri="{BB962C8B-B14F-4D97-AF65-F5344CB8AC3E}">
-        <p14:creationId xmlns:p14="http://schemas.microsoft.com/office/powerpoint/2010/main" val="1404785762"/>
-      </p:ext>
-    </p:extLst>
-  </p:cSld>
-  <p:clrMapOvr>
-    <a:masterClrMapping/>
-  </p:clrMapOvr>
-</p:sld>
-</file>
-
-<file path=ppt/slides/slide14.xml><?xml version="1.0" encoding="utf-8"?>
-<p:sld xmlns:a="http://schemas.openxmlformats.org/drawingml/2006/main" xmlns:r="http://schemas.openxmlformats.org/officeDocument/2006/relationships" xmlns:p="http://schemas.openxmlformats.org/presentationml/2006/main">
-  <p:cSld>
-    <p:spTree>
-      <p:nvGrpSpPr>
         <p:cNvPr id="1" name=""/>
         <p:cNvGrpSpPr/>
         <p:nvPr/>
@@ -7296,7 +5528,7 @@
 </p:sld>
 </file>
 
-<file path=ppt/slides/slide15.xml><?xml version="1.0" encoding="utf-8"?>
+<file path=ppt/slides/slide11.xml><?xml version="1.0" encoding="utf-8"?>
 <p:sld xmlns:a="http://schemas.openxmlformats.org/drawingml/2006/main" xmlns:r="http://schemas.openxmlformats.org/officeDocument/2006/relationships" xmlns:p="http://schemas.openxmlformats.org/presentationml/2006/main">
   <p:cSld>
     <p:spTree>
@@ -7359,19 +5591,19 @@
         </p:nvSpPr>
         <p:spPr>
           <a:xfrm>
-            <a:off x="0" y="1637071"/>
-            <a:ext cx="3844413" cy="4525963"/>
+            <a:off x="290512" y="1637071"/>
+            <a:ext cx="8562975" cy="4525963"/>
           </a:xfrm>
         </p:spPr>
         <p:txBody>
           <a:bodyPr>
-            <a:normAutofit lnSpcReduction="10000"/>
+            <a:normAutofit/>
           </a:bodyPr>
           <a:lstStyle/>
           <a:p>
             <a:r>
               <a:rPr lang="en-US" dirty="0"/>
-              <a:t>Try to use the debugger to find the bug in </a:t>
+              <a:t>Use the debugger to fix </a:t>
             </a:r>
             <a:r>
               <a:rPr lang="en-US" i="1" dirty="0" err="1"/>
@@ -7402,321 +5634,6 @@
           </a:p>
         </p:txBody>
       </p:sp>
-      <p:pic>
-        <p:nvPicPr>
-          <p:cNvPr id="5" name="Picture 4">
-            <a:extLst>
-              <a:ext uri="{FF2B5EF4-FFF2-40B4-BE49-F238E27FC236}">
-                <a16:creationId xmlns:a16="http://schemas.microsoft.com/office/drawing/2014/main" id="{471990F0-373E-30C8-4DB3-027CA20CA751}"/>
-              </a:ext>
-            </a:extLst>
-          </p:cNvPr>
-          <p:cNvPicPr>
-            <a:picLocks noChangeAspect="1"/>
-          </p:cNvPicPr>
-          <p:nvPr/>
-        </p:nvPicPr>
-        <p:blipFill>
-          <a:blip r:embed="rId3"/>
-          <a:stretch>
-            <a:fillRect/>
-          </a:stretch>
-        </p:blipFill>
-        <p:spPr>
-          <a:xfrm>
-            <a:off x="3778631" y="1818150"/>
-            <a:ext cx="5284506" cy="2045031"/>
-          </a:xfrm>
-          <a:prstGeom prst="rect">
-            <a:avLst/>
-          </a:prstGeom>
-        </p:spPr>
-      </p:pic>
-      <mc:AlternateContent xmlns:mc="http://schemas.openxmlformats.org/markup-compatibility/2006" xmlns:p14="http://schemas.microsoft.com/office/powerpoint/2010/main">
-        <mc:Choice Requires="p14">
-          <p:contentPart p14:bwMode="auto" r:id="rId4">
-            <p14:nvContentPartPr>
-              <p14:cNvPr id="6" name="Ink 5">
-                <a:extLst>
-                  <a:ext uri="{FF2B5EF4-FFF2-40B4-BE49-F238E27FC236}">
-                    <a16:creationId xmlns:a16="http://schemas.microsoft.com/office/drawing/2014/main" id="{D4B924ED-D31E-E782-2ED4-2601F258673B}"/>
-                  </a:ext>
-                </a:extLst>
-              </p14:cNvPr>
-              <p14:cNvContentPartPr/>
-              <p14:nvPr/>
-            </p14:nvContentPartPr>
-            <p14:xfrm>
-              <a:off x="3165732" y="2625124"/>
-              <a:ext cx="1480680" cy="596520"/>
-            </p14:xfrm>
-          </p:contentPart>
-        </mc:Choice>
-        <mc:Fallback xmlns="">
-          <p:pic>
-            <p:nvPicPr>
-              <p:cNvPr id="6" name="Ink 5">
-                <a:extLst>
-                  <a:ext uri="{FF2B5EF4-FFF2-40B4-BE49-F238E27FC236}">
-                    <a16:creationId xmlns:a16="http://schemas.microsoft.com/office/drawing/2014/main" id="{D4B924ED-D31E-E782-2ED4-2601F258673B}"/>
-                  </a:ext>
-                </a:extLst>
-              </p:cNvPr>
-              <p:cNvPicPr/>
-              <p:nvPr/>
-            </p:nvPicPr>
-            <p:blipFill>
-              <a:blip r:embed="rId5"/>
-              <a:stretch>
-                <a:fillRect/>
-              </a:stretch>
-            </p:blipFill>
-            <p:spPr>
-              <a:xfrm>
-                <a:off x="3156732" y="2616124"/>
-                <a:ext cx="1498320" cy="614160"/>
-              </a:xfrm>
-              <a:prstGeom prst="rect">
-                <a:avLst/>
-              </a:prstGeom>
-            </p:spPr>
-          </p:pic>
-        </mc:Fallback>
-      </mc:AlternateContent>
-      <mc:AlternateContent xmlns:mc="http://schemas.openxmlformats.org/markup-compatibility/2006" xmlns:p14="http://schemas.microsoft.com/office/powerpoint/2010/main">
-        <mc:Choice Requires="p14">
-          <p:contentPart p14:bwMode="auto" r:id="rId6">
-            <p14:nvContentPartPr>
-              <p14:cNvPr id="7" name="Ink 6">
-                <a:extLst>
-                  <a:ext uri="{FF2B5EF4-FFF2-40B4-BE49-F238E27FC236}">
-                    <a16:creationId xmlns:a16="http://schemas.microsoft.com/office/drawing/2014/main" id="{8E9CD02D-9E8D-660D-2DBF-81720D282FF1}"/>
-                  </a:ext>
-                </a:extLst>
-              </p14:cNvPr>
-              <p14:cNvContentPartPr/>
-              <p14:nvPr/>
-            </p14:nvContentPartPr>
-            <p14:xfrm>
-              <a:off x="3706452" y="2953804"/>
-              <a:ext cx="949320" cy="1203480"/>
-            </p14:xfrm>
-          </p:contentPart>
-        </mc:Choice>
-        <mc:Fallback xmlns="">
-          <p:pic>
-            <p:nvPicPr>
-              <p:cNvPr id="7" name="Ink 6">
-                <a:extLst>
-                  <a:ext uri="{FF2B5EF4-FFF2-40B4-BE49-F238E27FC236}">
-                    <a16:creationId xmlns:a16="http://schemas.microsoft.com/office/drawing/2014/main" id="{8E9CD02D-9E8D-660D-2DBF-81720D282FF1}"/>
-                  </a:ext>
-                </a:extLst>
-              </p:cNvPr>
-              <p:cNvPicPr/>
-              <p:nvPr/>
-            </p:nvPicPr>
-            <p:blipFill>
-              <a:blip r:embed="rId7"/>
-              <a:stretch>
-                <a:fillRect/>
-              </a:stretch>
-            </p:blipFill>
-            <p:spPr>
-              <a:xfrm>
-                <a:off x="3697452" y="2945164"/>
-                <a:ext cx="966960" cy="1221120"/>
-              </a:xfrm>
-              <a:prstGeom prst="rect">
-                <a:avLst/>
-              </a:prstGeom>
-            </p:spPr>
-          </p:pic>
-        </mc:Fallback>
-      </mc:AlternateContent>
-      <mc:AlternateContent xmlns:mc="http://schemas.openxmlformats.org/markup-compatibility/2006" xmlns:p14="http://schemas.microsoft.com/office/powerpoint/2010/main">
-        <mc:Choice Requires="p14">
-          <p:contentPart p14:bwMode="auto" r:id="rId8">
-            <p14:nvContentPartPr>
-              <p14:cNvPr id="8" name="Ink 7">
-                <a:extLst>
-                  <a:ext uri="{FF2B5EF4-FFF2-40B4-BE49-F238E27FC236}">
-                    <a16:creationId xmlns:a16="http://schemas.microsoft.com/office/drawing/2014/main" id="{A426FBBE-2281-D31F-645B-58578A2C22A3}"/>
-                  </a:ext>
-                </a:extLst>
-              </p14:cNvPr>
-              <p14:cNvContentPartPr/>
-              <p14:nvPr/>
-            </p14:nvContentPartPr>
-            <p14:xfrm>
-              <a:off x="2585412" y="3342964"/>
-              <a:ext cx="2050200" cy="2271600"/>
-            </p14:xfrm>
-          </p:contentPart>
-        </mc:Choice>
-        <mc:Fallback xmlns="">
-          <p:pic>
-            <p:nvPicPr>
-              <p:cNvPr id="8" name="Ink 7">
-                <a:extLst>
-                  <a:ext uri="{FF2B5EF4-FFF2-40B4-BE49-F238E27FC236}">
-                    <a16:creationId xmlns:a16="http://schemas.microsoft.com/office/drawing/2014/main" id="{A426FBBE-2281-D31F-645B-58578A2C22A3}"/>
-                  </a:ext>
-                </a:extLst>
-              </p:cNvPr>
-              <p:cNvPicPr/>
-              <p:nvPr/>
-            </p:nvPicPr>
-            <p:blipFill>
-              <a:blip r:embed="rId9"/>
-              <a:stretch>
-                <a:fillRect/>
-              </a:stretch>
-            </p:blipFill>
-            <p:spPr>
-              <a:xfrm>
-                <a:off x="2576772" y="3333964"/>
-                <a:ext cx="2067840" cy="2289240"/>
-              </a:xfrm>
-              <a:prstGeom prst="rect">
-                <a:avLst/>
-              </a:prstGeom>
-            </p:spPr>
-          </p:pic>
-        </mc:Fallback>
-      </mc:AlternateContent>
-      <p:pic>
-        <p:nvPicPr>
-          <p:cNvPr id="10" name="Picture 9">
-            <a:extLst>
-              <a:ext uri="{FF2B5EF4-FFF2-40B4-BE49-F238E27FC236}">
-                <a16:creationId xmlns:a16="http://schemas.microsoft.com/office/drawing/2014/main" id="{50C39248-2F65-3D16-2268-6FDF4DA44966}"/>
-              </a:ext>
-            </a:extLst>
-          </p:cNvPr>
-          <p:cNvPicPr>
-            <a:picLocks noChangeAspect="1"/>
-          </p:cNvPicPr>
-          <p:nvPr/>
-        </p:nvPicPr>
-        <p:blipFill>
-          <a:blip r:embed="rId10"/>
-          <a:stretch>
-            <a:fillRect/>
-          </a:stretch>
-        </p:blipFill>
-        <p:spPr>
-          <a:xfrm>
-            <a:off x="358609" y="5933796"/>
-            <a:ext cx="8249801" cy="752580"/>
-          </a:xfrm>
-          <a:prstGeom prst="rect">
-            <a:avLst/>
-          </a:prstGeom>
-        </p:spPr>
-      </p:pic>
-      <mc:AlternateContent xmlns:mc="http://schemas.openxmlformats.org/markup-compatibility/2006" xmlns:p14="http://schemas.microsoft.com/office/powerpoint/2010/main">
-        <mc:Choice Requires="p14">
-          <p:contentPart p14:bwMode="auto" r:id="rId11">
-            <p14:nvContentPartPr>
-              <p14:cNvPr id="11" name="Ink 10">
-                <a:extLst>
-                  <a:ext uri="{FF2B5EF4-FFF2-40B4-BE49-F238E27FC236}">
-                    <a16:creationId xmlns:a16="http://schemas.microsoft.com/office/drawing/2014/main" id="{E9BFC0BB-C1F3-77A0-F02D-8361BDC70A70}"/>
-                  </a:ext>
-                </a:extLst>
-              </p14:cNvPr>
-              <p14:cNvContentPartPr/>
-              <p14:nvPr/>
-            </p14:nvContentPartPr>
-            <p14:xfrm>
-              <a:off x="2132137" y="5594044"/>
-              <a:ext cx="768600" cy="696600"/>
-            </p14:xfrm>
-          </p:contentPart>
-        </mc:Choice>
-        <mc:Fallback xmlns="">
-          <p:pic>
-            <p:nvPicPr>
-              <p:cNvPr id="11" name="Ink 10">
-                <a:extLst>
-                  <a:ext uri="{FF2B5EF4-FFF2-40B4-BE49-F238E27FC236}">
-                    <a16:creationId xmlns:a16="http://schemas.microsoft.com/office/drawing/2014/main" id="{E9BFC0BB-C1F3-77A0-F02D-8361BDC70A70}"/>
-                  </a:ext>
-                </a:extLst>
-              </p:cNvPr>
-              <p:cNvPicPr/>
-              <p:nvPr/>
-            </p:nvPicPr>
-            <p:blipFill>
-              <a:blip r:embed="rId12"/>
-              <a:stretch>
-                <a:fillRect/>
-              </a:stretch>
-            </p:blipFill>
-            <p:spPr>
-              <a:xfrm>
-                <a:off x="2123137" y="5585044"/>
-                <a:ext cx="786240" cy="714240"/>
-              </a:xfrm>
-              <a:prstGeom prst="rect">
-                <a:avLst/>
-              </a:prstGeom>
-            </p:spPr>
-          </p:pic>
-        </mc:Fallback>
-      </mc:AlternateContent>
-      <mc:AlternateContent xmlns:mc="http://schemas.openxmlformats.org/markup-compatibility/2006" xmlns:p14="http://schemas.microsoft.com/office/powerpoint/2010/main">
-        <mc:Choice Requires="p14">
-          <p:contentPart p14:bwMode="auto" r:id="rId13">
-            <p14:nvContentPartPr>
-              <p14:cNvPr id="12" name="Ink 11">
-                <a:extLst>
-                  <a:ext uri="{FF2B5EF4-FFF2-40B4-BE49-F238E27FC236}">
-                    <a16:creationId xmlns:a16="http://schemas.microsoft.com/office/drawing/2014/main" id="{77642963-CC15-1B11-1E89-FDA89190CD9D}"/>
-                  </a:ext>
-                </a:extLst>
-              </p14:cNvPr>
-              <p14:cNvContentPartPr/>
-              <p14:nvPr/>
-            </p14:nvContentPartPr>
-            <p14:xfrm>
-              <a:off x="2831257" y="5614204"/>
-              <a:ext cx="4493520" cy="733680"/>
-            </p14:xfrm>
-          </p:contentPart>
-        </mc:Choice>
-        <mc:Fallback xmlns="">
-          <p:pic>
-            <p:nvPicPr>
-              <p:cNvPr id="12" name="Ink 11">
-                <a:extLst>
-                  <a:ext uri="{FF2B5EF4-FFF2-40B4-BE49-F238E27FC236}">
-                    <a16:creationId xmlns:a16="http://schemas.microsoft.com/office/drawing/2014/main" id="{77642963-CC15-1B11-1E89-FDA89190CD9D}"/>
-                  </a:ext>
-                </a:extLst>
-              </p:cNvPr>
-              <p:cNvPicPr/>
-              <p:nvPr/>
-            </p:nvPicPr>
-            <p:blipFill>
-              <a:blip r:embed="rId14"/>
-              <a:stretch>
-                <a:fillRect/>
-              </a:stretch>
-            </p:blipFill>
-            <p:spPr>
-              <a:xfrm>
-                <a:off x="2822617" y="5605204"/>
-                <a:ext cx="4511160" cy="751320"/>
-              </a:xfrm>
-              <a:prstGeom prst="rect">
-                <a:avLst/>
-              </a:prstGeom>
-            </p:spPr>
-          </p:pic>
-        </mc:Fallback>
-      </mc:AlternateContent>
     </p:spTree>
     <p:extLst>
       <p:ext uri="{BB962C8B-B14F-4D97-AF65-F5344CB8AC3E}">
@@ -7730,7 +5647,7 @@
 </p:sld>
 </file>
 
-<file path=ppt/slides/slide16.xml><?xml version="1.0" encoding="utf-8"?>
+<file path=ppt/slides/slide12.xml><?xml version="1.0" encoding="utf-8"?>
 <p:sld xmlns:a="http://schemas.openxmlformats.org/drawingml/2006/main" xmlns:r="http://schemas.openxmlformats.org/officeDocument/2006/relationships" xmlns:p="http://schemas.openxmlformats.org/presentationml/2006/main">
   <p:cSld>
     <p:spTree>
@@ -7955,7 +5872,7 @@
 </p:sld>
 </file>
 
-<file path=ppt/slides/slide17.xml><?xml version="1.0" encoding="utf-8"?>
+<file path=ppt/slides/slide13.xml><?xml version="1.0" encoding="utf-8"?>
 <p:sld xmlns:a="http://schemas.openxmlformats.org/drawingml/2006/main" xmlns:r="http://schemas.openxmlformats.org/officeDocument/2006/relationships" xmlns:p="http://schemas.openxmlformats.org/presentationml/2006/main" show="0">
   <p:cSld>
     <p:spTree>
@@ -8053,7 +5970,7 @@
 </p:sld>
 </file>
 
-<file path=ppt/slides/slide18.xml><?xml version="1.0" encoding="utf-8"?>
+<file path=ppt/slides/slide14.xml><?xml version="1.0" encoding="utf-8"?>
 <p:sld xmlns:a="http://schemas.openxmlformats.org/drawingml/2006/main" xmlns:r="http://schemas.openxmlformats.org/officeDocument/2006/relationships" xmlns:p="http://schemas.openxmlformats.org/presentationml/2006/main" show="0">
   <p:cSld>
     <p:spTree>
@@ -8187,7 +6104,7 @@
 </p:sld>
 </file>
 
-<file path=ppt/slides/slide19.xml><?xml version="1.0" encoding="utf-8"?>
+<file path=ppt/slides/slide15.xml><?xml version="1.0" encoding="utf-8"?>
 <p:sld xmlns:a="http://schemas.openxmlformats.org/drawingml/2006/main" xmlns:r="http://schemas.openxmlformats.org/officeDocument/2006/relationships" xmlns:p="http://schemas.openxmlformats.org/presentationml/2006/main" show="0">
   <p:cSld>
     <p:spTree>
@@ -9003,232 +6920,6 @@
           </a:ln>
         </p:spPr>
       </p:pic>
-      <p:sp>
-        <p:nvSpPr>
-          <p:cNvPr id="6" name="Google Shape;102;p24">
-            <a:extLst>
-              <a:ext uri="{FF2B5EF4-FFF2-40B4-BE49-F238E27FC236}">
-                <a16:creationId xmlns:a16="http://schemas.microsoft.com/office/drawing/2014/main" id="{212C8FFD-F753-491A-C64C-791724D4454D}"/>
-              </a:ext>
-            </a:extLst>
-          </p:cNvPr>
-          <p:cNvSpPr txBox="1">
-            <a:spLocks/>
-          </p:cNvSpPr>
-          <p:nvPr/>
-        </p:nvSpPr>
-        <p:spPr>
-          <a:xfrm>
-            <a:off x="-75807" y="4913748"/>
-            <a:ext cx="4404000" cy="1535651"/>
-          </a:xfrm>
-          <a:prstGeom prst="rect">
-            <a:avLst/>
-          </a:prstGeom>
-          <a:noFill/>
-          <a:ln>
-            <a:noFill/>
-          </a:ln>
-        </p:spPr>
-        <p:txBody>
-          <a:bodyPr spcFirstLastPara="1" vert="horz" wrap="square" lIns="91425" tIns="91425" rIns="91425" bIns="91425" rtlCol="0" anchor="b" anchorCtr="0">
-            <a:noAutofit/>
-          </a:bodyPr>
-          <a:lstStyle>
-            <a:lvl1pPr lvl="0" algn="l" defTabSz="457200" rtl="0" eaLnBrk="1" latinLnBrk="0" hangingPunct="1">
-              <a:spcBef>
-                <a:spcPts val="0"/>
-              </a:spcBef>
-              <a:spcAft>
-                <a:spcPts val="0"/>
-              </a:spcAft>
-              <a:buSzPts val="3600"/>
-              <a:buFont typeface="Arial"/>
-              <a:buNone/>
-              <a:defRPr sz="3600" b="1" kern="1200">
-                <a:solidFill>
-                  <a:schemeClr val="dk1"/>
-                </a:solidFill>
-                <a:latin typeface="Arial"/>
-                <a:ea typeface="Arial"/>
-                <a:cs typeface="Arial"/>
-                <a:sym typeface="Arial"/>
-              </a:defRPr>
-            </a:lvl1pPr>
-            <a:lvl2pPr lvl="1" algn="l" rtl="0">
-              <a:spcBef>
-                <a:spcPts val="0"/>
-              </a:spcBef>
-              <a:spcAft>
-                <a:spcPts val="0"/>
-              </a:spcAft>
-              <a:buSzPts val="3600"/>
-              <a:buFont typeface="Arial"/>
-              <a:buNone/>
-              <a:defRPr sz="3600" b="1">
-                <a:solidFill>
-                  <a:schemeClr val="dk1"/>
-                </a:solidFill>
-                <a:latin typeface="Arial"/>
-                <a:ea typeface="Arial"/>
-                <a:cs typeface="Arial"/>
-                <a:sym typeface="Arial"/>
-              </a:defRPr>
-            </a:lvl2pPr>
-            <a:lvl3pPr lvl="2" algn="l" rtl="0">
-              <a:spcBef>
-                <a:spcPts val="0"/>
-              </a:spcBef>
-              <a:spcAft>
-                <a:spcPts val="0"/>
-              </a:spcAft>
-              <a:buSzPts val="3600"/>
-              <a:buFont typeface="Arial"/>
-              <a:buNone/>
-              <a:defRPr sz="3600" b="1">
-                <a:solidFill>
-                  <a:schemeClr val="dk1"/>
-                </a:solidFill>
-                <a:latin typeface="Arial"/>
-                <a:ea typeface="Arial"/>
-                <a:cs typeface="Arial"/>
-                <a:sym typeface="Arial"/>
-              </a:defRPr>
-            </a:lvl3pPr>
-            <a:lvl4pPr lvl="3" algn="l" rtl="0">
-              <a:spcBef>
-                <a:spcPts val="0"/>
-              </a:spcBef>
-              <a:spcAft>
-                <a:spcPts val="0"/>
-              </a:spcAft>
-              <a:buSzPts val="3600"/>
-              <a:buFont typeface="Arial"/>
-              <a:buNone/>
-              <a:defRPr sz="3600" b="1">
-                <a:solidFill>
-                  <a:schemeClr val="dk1"/>
-                </a:solidFill>
-                <a:latin typeface="Arial"/>
-                <a:ea typeface="Arial"/>
-                <a:cs typeface="Arial"/>
-                <a:sym typeface="Arial"/>
-              </a:defRPr>
-            </a:lvl4pPr>
-            <a:lvl5pPr lvl="4" algn="l" rtl="0">
-              <a:spcBef>
-                <a:spcPts val="0"/>
-              </a:spcBef>
-              <a:spcAft>
-                <a:spcPts val="0"/>
-              </a:spcAft>
-              <a:buSzPts val="3600"/>
-              <a:buFont typeface="Arial"/>
-              <a:buNone/>
-              <a:defRPr sz="3600" b="1">
-                <a:solidFill>
-                  <a:schemeClr val="dk1"/>
-                </a:solidFill>
-                <a:latin typeface="Arial"/>
-                <a:ea typeface="Arial"/>
-                <a:cs typeface="Arial"/>
-                <a:sym typeface="Arial"/>
-              </a:defRPr>
-            </a:lvl5pPr>
-            <a:lvl6pPr lvl="5" algn="l" rtl="0">
-              <a:spcBef>
-                <a:spcPts val="0"/>
-              </a:spcBef>
-              <a:spcAft>
-                <a:spcPts val="0"/>
-              </a:spcAft>
-              <a:buSzPts val="3600"/>
-              <a:buFont typeface="Arial"/>
-              <a:buNone/>
-              <a:defRPr sz="3600" b="1">
-                <a:solidFill>
-                  <a:schemeClr val="dk1"/>
-                </a:solidFill>
-                <a:latin typeface="Arial"/>
-                <a:ea typeface="Arial"/>
-                <a:cs typeface="Arial"/>
-                <a:sym typeface="Arial"/>
-              </a:defRPr>
-            </a:lvl6pPr>
-            <a:lvl7pPr lvl="6" algn="l" rtl="0">
-              <a:spcBef>
-                <a:spcPts val="0"/>
-              </a:spcBef>
-              <a:spcAft>
-                <a:spcPts val="0"/>
-              </a:spcAft>
-              <a:buSzPts val="3600"/>
-              <a:buFont typeface="Arial"/>
-              <a:buNone/>
-              <a:defRPr sz="3600" b="1">
-                <a:solidFill>
-                  <a:schemeClr val="dk1"/>
-                </a:solidFill>
-                <a:latin typeface="Arial"/>
-                <a:ea typeface="Arial"/>
-                <a:cs typeface="Arial"/>
-                <a:sym typeface="Arial"/>
-              </a:defRPr>
-            </a:lvl7pPr>
-            <a:lvl8pPr lvl="7" algn="l" rtl="0">
-              <a:spcBef>
-                <a:spcPts val="0"/>
-              </a:spcBef>
-              <a:spcAft>
-                <a:spcPts val="0"/>
-              </a:spcAft>
-              <a:buSzPts val="3600"/>
-              <a:buFont typeface="Arial"/>
-              <a:buNone/>
-              <a:defRPr sz="3600" b="1">
-                <a:solidFill>
-                  <a:schemeClr val="dk1"/>
-                </a:solidFill>
-                <a:latin typeface="Arial"/>
-                <a:ea typeface="Arial"/>
-                <a:cs typeface="Arial"/>
-                <a:sym typeface="Arial"/>
-              </a:defRPr>
-            </a:lvl8pPr>
-            <a:lvl9pPr lvl="8" algn="l" rtl="0">
-              <a:spcBef>
-                <a:spcPts val="0"/>
-              </a:spcBef>
-              <a:spcAft>
-                <a:spcPts val="0"/>
-              </a:spcAft>
-              <a:buSzPts val="3600"/>
-              <a:buFont typeface="Arial"/>
-              <a:buNone/>
-              <a:defRPr sz="3600" b="1">
-                <a:solidFill>
-                  <a:schemeClr val="dk1"/>
-                </a:solidFill>
-                <a:latin typeface="Arial"/>
-                <a:ea typeface="Arial"/>
-                <a:cs typeface="Arial"/>
-                <a:sym typeface="Arial"/>
-              </a:defRPr>
-            </a:lvl9pPr>
-          </a:lstStyle>
-          <a:p>
-            <a:pPr algn="ctr"/>
-            <a:r>
-              <a:rPr lang="en-US" sz="2800" dirty="0">
-                <a:solidFill>
-                  <a:srgbClr val="840629"/>
-                </a:solidFill>
-              </a:rPr>
-              <a:t>Want to make your own CSSE220 meme? Send it to me this week!</a:t>
-            </a:r>
-          </a:p>
-        </p:txBody>
-      </p:sp>
     </p:spTree>
     <p:extLst>
       <p:ext uri="{BB962C8B-B14F-4D97-AF65-F5344CB8AC3E}">
@@ -9368,10 +7059,10 @@
       </p:sp>
       <p:pic>
         <p:nvPicPr>
-          <p:cNvPr id="3" name="Picture 2" descr="Graphical user interface, text, application&#10;&#10;Description automatically generated">
+          <p:cNvPr id="4" name="Picture 3">
             <a:extLst>
               <a:ext uri="{FF2B5EF4-FFF2-40B4-BE49-F238E27FC236}">
-                <a16:creationId xmlns:a16="http://schemas.microsoft.com/office/drawing/2014/main" id="{3EB711E5-5E8F-8C41-9E08-C37051877EDA}"/>
+                <a16:creationId xmlns:a16="http://schemas.microsoft.com/office/drawing/2014/main" id="{2A3A84FA-9B16-BC34-C823-35960C15216F}"/>
               </a:ext>
             </a:extLst>
           </p:cNvPr>
@@ -9388,8 +7079,8 @@
         </p:blipFill>
         <p:spPr>
           <a:xfrm>
-            <a:off x="0" y="2074942"/>
-            <a:ext cx="9144000" cy="2708115"/>
+            <a:off x="1876049" y="1693758"/>
+            <a:ext cx="5391902" cy="2600688"/>
           </a:xfrm>
           <a:prstGeom prst="rect">
             <a:avLst/>
@@ -9464,10 +7155,10 @@
       </p:sp>
       <p:pic>
         <p:nvPicPr>
-          <p:cNvPr id="8" name="Picture 7" descr="Graphical user interface&#10;&#10;Description automatically generated with low confidence">
+          <p:cNvPr id="3" name="Picture 2">
             <a:extLst>
               <a:ext uri="{FF2B5EF4-FFF2-40B4-BE49-F238E27FC236}">
-                <a16:creationId xmlns:a16="http://schemas.microsoft.com/office/drawing/2014/main" id="{F5805A82-B52F-0B42-A535-946683B08C5A}"/>
+                <a16:creationId xmlns:a16="http://schemas.microsoft.com/office/drawing/2014/main" id="{5669F538-228C-B394-D504-30CCC9BFCE85}"/>
               </a:ext>
             </a:extLst>
           </p:cNvPr>
@@ -9484,8 +7175,110 @@
         </p:blipFill>
         <p:spPr>
           <a:xfrm>
-            <a:off x="1299566" y="658368"/>
-            <a:ext cx="6247281" cy="6007528"/>
+            <a:off x="2099917" y="1757193"/>
+            <a:ext cx="4944165" cy="2429214"/>
+          </a:xfrm>
+          <a:prstGeom prst="rect">
+            <a:avLst/>
+          </a:prstGeom>
+        </p:spPr>
+      </p:pic>
+      <p:sp>
+        <p:nvSpPr>
+          <p:cNvPr id="4" name="TextBox 3">
+            <a:extLst>
+              <a:ext uri="{FF2B5EF4-FFF2-40B4-BE49-F238E27FC236}">
+                <a16:creationId xmlns:a16="http://schemas.microsoft.com/office/drawing/2014/main" id="{EF1BC9E6-1B79-B374-D84B-75DE5D23965B}"/>
+              </a:ext>
+            </a:extLst>
+          </p:cNvPr>
+          <p:cNvSpPr txBox="1"/>
+          <p:nvPr/>
+        </p:nvSpPr>
+        <p:spPr>
+          <a:xfrm>
+            <a:off x="869795" y="1271239"/>
+            <a:ext cx="5920660" cy="3416320"/>
+          </a:xfrm>
+          <a:prstGeom prst="rect">
+            <a:avLst/>
+          </a:prstGeom>
+          <a:noFill/>
+        </p:spPr>
+        <p:txBody>
+          <a:bodyPr wrap="none" rtlCol="0">
+            <a:spAutoFit/>
+          </a:bodyPr>
+          <a:lstStyle/>
+          <a:p>
+            <a:r>
+              <a:rPr lang="en-US" dirty="0"/>
+              <a:t>Click “play” button for individual method, but select “Debug”</a:t>
+            </a:r>
+          </a:p>
+          <a:p>
+            <a:endParaRPr lang="en-US" dirty="0"/>
+          </a:p>
+          <a:p>
+            <a:endParaRPr lang="en-US" dirty="0"/>
+          </a:p>
+          <a:p>
+            <a:endParaRPr lang="en-US" dirty="0"/>
+          </a:p>
+          <a:p>
+            <a:endParaRPr lang="en-US" dirty="0"/>
+          </a:p>
+          <a:p>
+            <a:endParaRPr lang="en-US" dirty="0"/>
+          </a:p>
+          <a:p>
+            <a:endParaRPr lang="en-US" dirty="0"/>
+          </a:p>
+          <a:p>
+            <a:endParaRPr lang="en-US" dirty="0"/>
+          </a:p>
+          <a:p>
+            <a:endParaRPr lang="en-US" dirty="0"/>
+          </a:p>
+          <a:p>
+            <a:endParaRPr lang="en-US" dirty="0"/>
+          </a:p>
+          <a:p>
+            <a:endParaRPr lang="en-US" dirty="0"/>
+          </a:p>
+          <a:p>
+            <a:r>
+              <a:rPr lang="en-US" dirty="0"/>
+              <a:t>Alternatively, click “Debug” button at top</a:t>
+            </a:r>
+          </a:p>
+        </p:txBody>
+      </p:sp>
+      <p:pic>
+        <p:nvPicPr>
+          <p:cNvPr id="6" name="Picture 5">
+            <a:extLst>
+              <a:ext uri="{FF2B5EF4-FFF2-40B4-BE49-F238E27FC236}">
+                <a16:creationId xmlns:a16="http://schemas.microsoft.com/office/drawing/2014/main" id="{84A5BE62-A5D9-ECCA-1B7C-B30E3F3EBBA2}"/>
+              </a:ext>
+            </a:extLst>
+          </p:cNvPr>
+          <p:cNvPicPr>
+            <a:picLocks noChangeAspect="1"/>
+          </p:cNvPicPr>
+          <p:nvPr/>
+        </p:nvPicPr>
+        <p:blipFill>
+          <a:blip r:embed="rId4"/>
+          <a:srcRect b="59860"/>
+          <a:stretch>
+            <a:fillRect/>
+          </a:stretch>
+        </p:blipFill>
+        <p:spPr>
+          <a:xfrm>
+            <a:off x="1757450" y="4672361"/>
+            <a:ext cx="5629097" cy="1996067"/>
           </a:xfrm>
           <a:prstGeom prst="rect">
             <a:avLst/>
@@ -9510,7 +7303,7 @@
   <p:cSld>
     <p:spTree>
       <p:nvGrpSpPr>
-        <p:cNvPr id="1" name="Shape 101"/>
+        <p:cNvPr id="1" name=""/>
         <p:cNvGrpSpPr/>
         <p:nvPr/>
       </p:nvGrpSpPr>
@@ -9524,113 +7317,190 @@
       </p:grpSpPr>
       <p:sp>
         <p:nvSpPr>
-          <p:cNvPr id="102" name="Google Shape;102;p24"/>
-          <p:cNvSpPr txBox="1">
-            <a:spLocks noGrp="1"/>
-          </p:cNvSpPr>
-          <p:nvPr>
-            <p:ph type="title"/>
+          <p:cNvPr id="179" name="Shape 179"/>
+          <p:cNvSpPr>
+            <a:spLocks noGrp="1"/>
+          </p:cNvSpPr>
+          <p:nvPr>
+            <p:ph type="body" idx="1"/>
           </p:nvPr>
         </p:nvSpPr>
         <p:spPr>
           <a:xfrm>
-            <a:off x="526262" y="408600"/>
-            <a:ext cx="8636100" cy="817200"/>
+            <a:off x="457200" y="1600200"/>
+            <a:ext cx="8229600" cy="4525963"/>
           </a:xfrm>
           <a:prstGeom prst="rect">
             <a:avLst/>
           </a:prstGeom>
         </p:spPr>
         <p:txBody>
-          <a:bodyPr spcFirstLastPara="1" vert="horz" wrap="square" lIns="91425" tIns="91425" rIns="91425" bIns="91425" rtlCol="0" anchor="b" anchorCtr="0">
-            <a:noAutofit/>
-          </a:bodyPr>
-          <a:lstStyle/>
-          <a:p>
-            <a:r>
-              <a:rPr lang="en" sz="4400" dirty="0">
-                <a:solidFill>
-                  <a:srgbClr val="840629"/>
-                </a:solidFill>
-              </a:rPr>
-              <a:t>Scary first steps…</a:t>
-            </a:r>
-            <a:endParaRPr sz="4400" dirty="0">
-              <a:solidFill>
-                <a:srgbClr val="840629"/>
-              </a:solidFill>
-            </a:endParaRPr>
-          </a:p>
-        </p:txBody>
-      </p:sp>
-      <p:pic>
-        <p:nvPicPr>
-          <p:cNvPr id="104" name="Google Shape;104;p24"/>
-          <p:cNvPicPr preferRelativeResize="0"/>
-          <p:nvPr/>
-        </p:nvPicPr>
-        <p:blipFill>
-          <a:blip r:embed="rId3">
-            <a:alphaModFix/>
-          </a:blip>
-          <a:stretch>
-            <a:fillRect/>
-          </a:stretch>
-        </p:blipFill>
+          <a:bodyPr/>
+          <a:lstStyle/>
+          <a:p>
+            <a:pPr lvl="0">
+              <a:lnSpc>
+                <a:spcPct val="80000"/>
+              </a:lnSpc>
+              <a:spcBef>
+                <a:spcPts val="600"/>
+              </a:spcBef>
+              <a:buFont typeface="Wingdings 3"/>
+              <a:buChar char=""/>
+              <a:defRPr sz="1800"/>
+            </a:pPr>
+            <a:r>
+              <a:rPr sz="2900" dirty="0"/>
+              <a:t>Debugging Java programs in </a:t>
+            </a:r>
+            <a:r>
+              <a:rPr lang="en-US" sz="2900" dirty="0"/>
+              <a:t>IntelliJ</a:t>
+            </a:r>
+            <a:r>
+              <a:rPr sz="2900" dirty="0"/>
+              <a:t>:</a:t>
+            </a:r>
+          </a:p>
+          <a:p>
+            <a:pPr lvl="1">
+              <a:lnSpc>
+                <a:spcPct val="80000"/>
+              </a:lnSpc>
+              <a:spcBef>
+                <a:spcPts val="600"/>
+              </a:spcBef>
+              <a:buFont typeface="Verdana"/>
+              <a:buChar char="◦"/>
+              <a:defRPr sz="1800"/>
+            </a:pPr>
+            <a:r>
+              <a:rPr lang="en-US" sz="2500" dirty="0"/>
+              <a:t>Set a breakpoint where you want to start</a:t>
+            </a:r>
+          </a:p>
+          <a:p>
+            <a:pPr marL="742950" lvl="1" indent="-285750">
+              <a:lnSpc>
+                <a:spcPct val="80000"/>
+              </a:lnSpc>
+              <a:spcBef>
+                <a:spcPts val="600"/>
+              </a:spcBef>
+              <a:buFont typeface="Verdana"/>
+              <a:buChar char="◦"/>
+              <a:defRPr sz="1800"/>
+            </a:pPr>
+            <a:r>
+              <a:rPr sz="2500" dirty="0"/>
+              <a:t>Launch using the </a:t>
+            </a:r>
+            <a:r>
+              <a:rPr lang="en-US" sz="2500" dirty="0"/>
+              <a:t>bug icon</a:t>
+            </a:r>
+            <a:endParaRPr sz="2500" dirty="0"/>
+          </a:p>
+          <a:p>
+            <a:pPr marL="742950" lvl="1" indent="-285750">
+              <a:lnSpc>
+                <a:spcPct val="80000"/>
+              </a:lnSpc>
+              <a:spcBef>
+                <a:spcPts val="600"/>
+              </a:spcBef>
+              <a:buFont typeface="Verdana"/>
+              <a:buChar char="◦"/>
+              <a:defRPr sz="1800"/>
+            </a:pPr>
+            <a:r>
+              <a:rPr sz="2500" dirty="0"/>
+              <a:t>Single stepping: </a:t>
+            </a:r>
+            <a:r>
+              <a:rPr sz="2500" i="1" dirty="0"/>
+              <a:t>step over </a:t>
+            </a:r>
+            <a:r>
+              <a:rPr sz="2500" dirty="0"/>
+              <a:t>and </a:t>
+            </a:r>
+            <a:r>
+              <a:rPr sz="2500" i="1" dirty="0"/>
+              <a:t>step into</a:t>
+            </a:r>
+          </a:p>
+          <a:p>
+            <a:pPr marL="742950" lvl="1" indent="-285750">
+              <a:lnSpc>
+                <a:spcPct val="80000"/>
+              </a:lnSpc>
+              <a:spcBef>
+                <a:spcPts val="600"/>
+              </a:spcBef>
+              <a:buFont typeface="Verdana"/>
+              <a:buChar char="◦"/>
+              <a:defRPr sz="1800"/>
+            </a:pPr>
+            <a:r>
+              <a:rPr sz="2500" dirty="0"/>
+              <a:t>Inspecting variables</a:t>
+            </a:r>
+          </a:p>
+          <a:p>
+            <a:pPr marL="0" lvl="0" indent="0">
+              <a:lnSpc>
+                <a:spcPct val="80000"/>
+              </a:lnSpc>
+              <a:spcBef>
+                <a:spcPts val="600"/>
+              </a:spcBef>
+              <a:buNone/>
+              <a:defRPr sz="1800"/>
+            </a:pPr>
+            <a:endParaRPr sz="2900" dirty="0"/>
+          </a:p>
+        </p:txBody>
+      </p:sp>
+      <p:sp>
+        <p:nvSpPr>
+          <p:cNvPr id="180" name="Shape 180"/>
+          <p:cNvSpPr>
+            <a:spLocks noGrp="1"/>
+          </p:cNvSpPr>
+          <p:nvPr>
+            <p:ph type="title"/>
+          </p:nvPr>
+        </p:nvSpPr>
         <p:spPr>
           <a:xfrm>
-            <a:off x="1045826" y="6094583"/>
-            <a:ext cx="7596971" cy="500474"/>
+            <a:off x="457200" y="188141"/>
+            <a:ext cx="8229600" cy="1143001"/>
           </a:xfrm>
           <a:prstGeom prst="rect">
             <a:avLst/>
           </a:prstGeom>
-          <a:noFill/>
-          <a:ln w="19050" cap="flat" cmpd="sng">
-            <a:solidFill>
-              <a:schemeClr val="dk2"/>
-            </a:solidFill>
-            <a:prstDash val="solid"/>
-            <a:round/>
-            <a:headEnd type="none" w="sm" len="sm"/>
-            <a:tailEnd type="none" w="sm" len="sm"/>
-          </a:ln>
         </p:spPr>
-      </p:pic>
-      <p:pic>
-        <p:nvPicPr>
-          <p:cNvPr id="106" name="Google Shape;106;p24"/>
-          <p:cNvPicPr preferRelativeResize="0"/>
-          <p:nvPr/>
-        </p:nvPicPr>
-        <p:blipFill>
-          <a:blip r:embed="rId4">
-            <a:alphaModFix/>
-          </a:blip>
-          <a:stretch>
-            <a:fillRect/>
-          </a:stretch>
-        </p:blipFill>
-        <p:spPr>
-          <a:xfrm>
-            <a:off x="962081" y="1380520"/>
-            <a:ext cx="7449384" cy="3088504"/>
-          </a:xfrm>
-          <a:prstGeom prst="rect">
-            <a:avLst/>
-          </a:prstGeom>
-          <a:noFill/>
-          <a:ln>
-            <a:noFill/>
-          </a:ln>
-        </p:spPr>
-      </p:pic>
+        <p:txBody>
+          <a:bodyPr/>
+          <a:lstStyle/>
+          <a:p>
+            <a:pPr lvl="0">
+              <a:defRPr sz="1800"/>
+            </a:pPr>
+            <a:r>
+              <a:rPr sz="4400" dirty="0"/>
+              <a:t>Debugging—Demo</a:t>
+            </a:r>
+          </a:p>
+        </p:txBody>
+      </p:sp>
       <p:pic>
         <p:nvPicPr>
           <p:cNvPr id="3" name="Picture 2">
             <a:extLst>
               <a:ext uri="{FF2B5EF4-FFF2-40B4-BE49-F238E27FC236}">
-                <a16:creationId xmlns:a16="http://schemas.microsoft.com/office/drawing/2014/main" id="{3F814132-11B9-FE50-E133-2A9B466B334D}"/>
+                <a16:creationId xmlns:a16="http://schemas.microsoft.com/office/drawing/2014/main" id="{9A492404-EE32-E765-0458-1CFDC55FE09C}"/>
               </a:ext>
             </a:extLst>
           </p:cNvPr>
@@ -9640,62 +7510,27 @@
           <p:nvPr/>
         </p:nvPicPr>
         <p:blipFill>
-          <a:blip r:embed="rId5"/>
+          <a:blip r:embed="rId3"/>
           <a:stretch>
             <a:fillRect/>
           </a:stretch>
         </p:blipFill>
         <p:spPr>
           <a:xfrm>
-            <a:off x="1089634" y="4610260"/>
-            <a:ext cx="7591200" cy="1187499"/>
+            <a:off x="880547" y="3744581"/>
+            <a:ext cx="7382905" cy="2381582"/>
           </a:xfrm>
           <a:prstGeom prst="rect">
             <a:avLst/>
           </a:prstGeom>
-          <a:ln>
-            <a:solidFill>
-              <a:schemeClr val="tx1"/>
-            </a:solidFill>
-          </a:ln>
-        </p:spPr>
-      </p:pic>
-      <p:pic>
-        <p:nvPicPr>
-          <p:cNvPr id="5" name="Picture 4">
-            <a:extLst>
-              <a:ext uri="{FF2B5EF4-FFF2-40B4-BE49-F238E27FC236}">
-                <a16:creationId xmlns:a16="http://schemas.microsoft.com/office/drawing/2014/main" id="{E2735B4A-1EDD-F0AD-B8BE-2FA45344846B}"/>
-              </a:ext>
-            </a:extLst>
-          </p:cNvPr>
-          <p:cNvPicPr>
-            <a:picLocks noChangeAspect="1"/>
-          </p:cNvPicPr>
-          <p:nvPr/>
-        </p:nvPicPr>
-        <p:blipFill>
-          <a:blip r:embed="rId6"/>
-          <a:stretch>
-            <a:fillRect/>
-          </a:stretch>
-        </p:blipFill>
-        <p:spPr>
-          <a:xfrm>
-            <a:off x="0" y="4085187"/>
-            <a:ext cx="959957" cy="959957"/>
-          </a:xfrm>
-          <a:prstGeom prst="rect">
-            <a:avLst/>
-          </a:prstGeom>
-          <a:ln>
-            <a:solidFill>
-              <a:schemeClr val="tx1"/>
-            </a:solidFill>
-          </a:ln>
         </p:spPr>
       </p:pic>
     </p:spTree>
+    <p:extLst>
+      <p:ext uri="{BB962C8B-B14F-4D97-AF65-F5344CB8AC3E}">
+        <p14:creationId xmlns:p14="http://schemas.microsoft.com/office/powerpoint/2010/main" val="831071102"/>
+      </p:ext>
+    </p:extLst>
   </p:cSld>
   <p:clrMapOvr>
     <a:masterClrMapping/>
@@ -9708,7 +7543,7 @@
   <p:cSld>
     <p:spTree>
       <p:nvGrpSpPr>
-        <p:cNvPr id="1" name="Shape 111"/>
+        <p:cNvPr id="1" name=""/>
         <p:cNvGrpSpPr/>
         <p:nvPr/>
       </p:nvGrpSpPr>
@@ -9722,229 +7557,132 @@
       </p:grpSpPr>
       <p:sp>
         <p:nvSpPr>
-          <p:cNvPr id="112" name="Google Shape;112;p25"/>
-          <p:cNvSpPr txBox="1">
+          <p:cNvPr id="2" name="Title 1"/>
+          <p:cNvSpPr>
             <a:spLocks noGrp="1"/>
           </p:cNvSpPr>
           <p:nvPr>
             <p:ph type="title"/>
+          </p:nvPr>
+        </p:nvSpPr>
+        <p:spPr/>
+        <p:txBody>
+          <a:bodyPr/>
+          <a:lstStyle/>
+          <a:p>
+            <a:r>
+              <a:rPr lang="en-US" dirty="0"/>
+              <a:t>Exception Breakpoint</a:t>
+            </a:r>
+          </a:p>
+        </p:txBody>
+      </p:sp>
+      <p:sp>
+        <p:nvSpPr>
+          <p:cNvPr id="3" name="Content Placeholder 2"/>
+          <p:cNvSpPr>
+            <a:spLocks noGrp="1"/>
+          </p:cNvSpPr>
+          <p:nvPr>
+            <p:ph idx="1"/>
           </p:nvPr>
         </p:nvSpPr>
         <p:spPr>
           <a:xfrm>
-            <a:off x="249550" y="919625"/>
-            <a:ext cx="8636100" cy="817200"/>
+            <a:off x="457200" y="1179786"/>
+            <a:ext cx="8229600" cy="5173389"/>
           </a:xfrm>
-          <a:prstGeom prst="rect">
-            <a:avLst/>
-          </a:prstGeom>
         </p:spPr>
         <p:txBody>
-          <a:bodyPr spcFirstLastPara="1" vert="horz" wrap="square" lIns="91425" tIns="91425" rIns="91425" bIns="91425" rtlCol="0" anchor="b" anchorCtr="0">
-            <a:noAutofit/>
-          </a:bodyPr>
-          <a:lstStyle/>
-          <a:p>
-            <a:r>
-              <a:rPr lang="en" sz="2400">
-                <a:solidFill>
-                  <a:srgbClr val="840629"/>
-                </a:solidFill>
-              </a:rPr>
-              <a:t>The Debugger Up Close</a:t>
-            </a:r>
-            <a:endParaRPr sz="2400">
-              <a:solidFill>
-                <a:srgbClr val="840629"/>
-              </a:solidFill>
-            </a:endParaRPr>
+          <a:bodyPr/>
+          <a:lstStyle/>
+          <a:p>
+            <a:r>
+              <a:rPr lang="en-US" dirty="0"/>
+              <a:t>View Breakpoints…</a:t>
+            </a:r>
+          </a:p>
+          <a:p>
+            <a:endParaRPr lang="en-US" dirty="0"/>
+          </a:p>
+          <a:p>
+            <a:endParaRPr lang="en-US" dirty="0"/>
+          </a:p>
+          <a:p>
+            <a:r>
+              <a:rPr lang="en-US" dirty="0"/>
+              <a:t>Add -&gt; Java Exception </a:t>
+            </a:r>
+            <a:br>
+              <a:rPr lang="en-US" dirty="0"/>
+            </a:br>
+            <a:r>
+              <a:rPr lang="en-US" dirty="0"/>
+              <a:t>Breakpoints</a:t>
+            </a:r>
+          </a:p>
+          <a:p>
+            <a:endParaRPr lang="en-US" dirty="0"/>
+          </a:p>
+          <a:p>
+            <a:r>
+              <a:rPr lang="en-US" dirty="0"/>
+              <a:t>Find the exception </a:t>
+            </a:r>
+            <a:br>
+              <a:rPr lang="en-US" dirty="0"/>
+            </a:br>
+            <a:r>
+              <a:rPr lang="en-US" dirty="0"/>
+              <a:t>type you want </a:t>
+            </a:r>
+            <a:br>
+              <a:rPr lang="en-US" dirty="0"/>
+            </a:br>
+            <a:r>
+              <a:rPr lang="en-US" dirty="0"/>
+              <a:t>(start typing to filter)</a:t>
+            </a:r>
           </a:p>
         </p:txBody>
       </p:sp>
       <p:pic>
         <p:nvPicPr>
-          <p:cNvPr id="115" name="Google Shape;115;p25"/>
-          <p:cNvPicPr preferRelativeResize="0"/>
+          <p:cNvPr id="6" name="Picture 5">
+            <a:extLst>
+              <a:ext uri="{FF2B5EF4-FFF2-40B4-BE49-F238E27FC236}">
+                <a16:creationId xmlns:a16="http://schemas.microsoft.com/office/drawing/2014/main" id="{7D1DF9CC-89A2-BDC2-9F34-6FE42E010D3F}"/>
+              </a:ext>
+            </a:extLst>
+          </p:cNvPr>
+          <p:cNvPicPr>
+            <a:picLocks noChangeAspect="1"/>
+          </p:cNvPicPr>
           <p:nvPr/>
         </p:nvPicPr>
         <p:blipFill>
-          <a:blip r:embed="rId3">
-            <a:alphaModFix/>
-          </a:blip>
+          <a:blip r:embed="rId3"/>
+          <a:srcRect l="32336" r="30914" b="40401"/>
           <a:stretch>
             <a:fillRect/>
           </a:stretch>
         </p:blipFill>
         <p:spPr>
           <a:xfrm>
-            <a:off x="4234325" y="1842951"/>
-            <a:ext cx="4548200" cy="921925"/>
+            <a:off x="5674845" y="1179786"/>
+            <a:ext cx="2713219" cy="1419391"/>
           </a:xfrm>
           <a:prstGeom prst="rect">
             <a:avLst/>
           </a:prstGeom>
-          <a:noFill/>
-          <a:ln>
-            <a:noFill/>
-          </a:ln>
         </p:spPr>
       </p:pic>
-      <p:cxnSp>
-        <p:nvCxnSpPr>
-          <p:cNvPr id="116" name="Google Shape;116;p25"/>
-          <p:cNvCxnSpPr/>
-          <p:nvPr/>
-        </p:nvCxnSpPr>
-        <p:spPr>
-          <a:xfrm rot="10800000" flipH="1">
-            <a:off x="6763700" y="2644725"/>
-            <a:ext cx="1028700" cy="1182900"/>
-          </a:xfrm>
-          <a:prstGeom prst="straightConnector1">
-            <a:avLst/>
-          </a:prstGeom>
-          <a:noFill/>
-          <a:ln w="76200" cap="flat" cmpd="sng">
-            <a:solidFill>
-              <a:schemeClr val="dk2"/>
-            </a:solidFill>
-            <a:prstDash val="solid"/>
-            <a:round/>
-            <a:headEnd type="none" w="med" len="med"/>
-            <a:tailEnd type="triangle" w="med" len="med"/>
-          </a:ln>
-        </p:spPr>
-      </p:cxnSp>
-      <p:cxnSp>
-        <p:nvCxnSpPr>
-          <p:cNvPr id="117" name="Google Shape;117;p25"/>
-          <p:cNvCxnSpPr/>
-          <p:nvPr/>
-        </p:nvCxnSpPr>
-        <p:spPr>
-          <a:xfrm rot="10800000">
-            <a:off x="8461025" y="2644650"/>
-            <a:ext cx="12900" cy="2044500"/>
-          </a:xfrm>
-          <a:prstGeom prst="straightConnector1">
-            <a:avLst/>
-          </a:prstGeom>
-          <a:noFill/>
-          <a:ln w="76200" cap="flat" cmpd="sng">
-            <a:solidFill>
-              <a:schemeClr val="dk2"/>
-            </a:solidFill>
-            <a:prstDash val="solid"/>
-            <a:round/>
-            <a:headEnd type="none" w="med" len="med"/>
-            <a:tailEnd type="triangle" w="med" len="med"/>
-          </a:ln>
-        </p:spPr>
-      </p:cxnSp>
-      <p:sp>
-        <p:nvSpPr>
-          <p:cNvPr id="118" name="Google Shape;118;p25"/>
-          <p:cNvSpPr txBox="1"/>
-          <p:nvPr/>
-        </p:nvSpPr>
-        <p:spPr>
-          <a:xfrm>
-            <a:off x="5452100" y="3763325"/>
-            <a:ext cx="1684500" cy="398700"/>
-          </a:xfrm>
-          <a:prstGeom prst="rect">
-            <a:avLst/>
-          </a:prstGeom>
-          <a:solidFill>
-            <a:srgbClr val="F9CB9C"/>
-          </a:solidFill>
-          <a:ln w="19050" cap="flat" cmpd="sng">
-            <a:solidFill>
-              <a:srgbClr val="000000"/>
-            </a:solidFill>
-            <a:prstDash val="solid"/>
-            <a:round/>
-            <a:headEnd type="none" w="sm" len="sm"/>
-            <a:tailEnd type="none" w="sm" len="sm"/>
-          </a:ln>
-        </p:spPr>
-        <p:txBody>
-          <a:bodyPr spcFirstLastPara="1" wrap="square" lIns="91425" tIns="91425" rIns="91425" bIns="91425" anchor="t" anchorCtr="0">
-            <a:noAutofit/>
-          </a:bodyPr>
-          <a:lstStyle/>
-          <a:p>
-            <a:pPr>
-              <a:spcBef>
-                <a:spcPts val="0"/>
-              </a:spcBef>
-              <a:spcAft>
-                <a:spcPts val="0"/>
-              </a:spcAft>
-            </a:pPr>
-            <a:r>
-              <a:rPr lang="en"/>
-              <a:t>Java Perspective</a:t>
-            </a:r>
-            <a:endParaRPr/>
-          </a:p>
-        </p:txBody>
-      </p:sp>
-      <p:sp>
-        <p:nvSpPr>
-          <p:cNvPr id="119" name="Google Shape;119;p25"/>
-          <p:cNvSpPr txBox="1"/>
-          <p:nvPr/>
-        </p:nvSpPr>
-        <p:spPr>
-          <a:xfrm>
-            <a:off x="7075500" y="4689150"/>
-            <a:ext cx="2068500" cy="398700"/>
-          </a:xfrm>
-          <a:prstGeom prst="rect">
-            <a:avLst/>
-          </a:prstGeom>
-          <a:solidFill>
-            <a:srgbClr val="F9CB9C"/>
-          </a:solidFill>
-          <a:ln w="19050" cap="flat" cmpd="sng">
-            <a:solidFill>
-              <a:srgbClr val="000000"/>
-            </a:solidFill>
-            <a:prstDash val="solid"/>
-            <a:round/>
-            <a:headEnd type="none" w="sm" len="sm"/>
-            <a:tailEnd type="none" w="sm" len="sm"/>
-          </a:ln>
-        </p:spPr>
-        <p:txBody>
-          <a:bodyPr spcFirstLastPara="1" wrap="square" lIns="91425" tIns="91425" rIns="91425" bIns="91425" anchor="t" anchorCtr="0">
-            <a:noAutofit/>
-          </a:bodyPr>
-          <a:lstStyle/>
-          <a:p>
-            <a:pPr>
-              <a:spcBef>
-                <a:spcPts val="0"/>
-              </a:spcBef>
-              <a:spcAft>
-                <a:spcPts val="0"/>
-              </a:spcAft>
-            </a:pPr>
-            <a:r>
-              <a:rPr lang="en"/>
-              <a:t>Debugging Perspective</a:t>
-            </a:r>
-            <a:endParaRPr/>
-          </a:p>
-        </p:txBody>
-      </p:sp>
       <p:pic>
         <p:nvPicPr>
-          <p:cNvPr id="3" name="Picture 2">
+          <p:cNvPr id="8" name="Picture 7">
             <a:extLst>
               <a:ext uri="{FF2B5EF4-FFF2-40B4-BE49-F238E27FC236}">
-                <a16:creationId xmlns:a16="http://schemas.microsoft.com/office/drawing/2014/main" id="{45A1F24A-0E5A-CAAF-ABE5-05B1BE60931D}"/>
+                <a16:creationId xmlns:a16="http://schemas.microsoft.com/office/drawing/2014/main" id="{AA67BDF6-335A-E9B3-492E-0E72842F3D9E}"/>
               </a:ext>
             </a:extLst>
           </p:cNvPr>
@@ -9955,31 +7693,27 @@
         </p:nvPicPr>
         <p:blipFill>
           <a:blip r:embed="rId4"/>
+          <a:srcRect r="22849" b="36892"/>
           <a:stretch>
             <a:fillRect/>
           </a:stretch>
         </p:blipFill>
         <p:spPr>
           <a:xfrm>
-            <a:off x="410509" y="2104252"/>
-            <a:ext cx="3515216" cy="1314633"/>
+            <a:off x="5073363" y="2725822"/>
+            <a:ext cx="3314701" cy="2056040"/>
           </a:xfrm>
           <a:prstGeom prst="rect">
             <a:avLst/>
           </a:prstGeom>
-          <a:ln>
-            <a:solidFill>
-              <a:schemeClr val="tx1"/>
-            </a:solidFill>
-          </a:ln>
         </p:spPr>
       </p:pic>
       <p:pic>
         <p:nvPicPr>
-          <p:cNvPr id="5" name="Picture 4">
+          <p:cNvPr id="10" name="Picture 9">
             <a:extLst>
               <a:ext uri="{FF2B5EF4-FFF2-40B4-BE49-F238E27FC236}">
-                <a16:creationId xmlns:a16="http://schemas.microsoft.com/office/drawing/2014/main" id="{A9773392-1C9E-E3CF-D777-F000F213987A}"/>
+                <a16:creationId xmlns:a16="http://schemas.microsoft.com/office/drawing/2014/main" id="{95FD4E53-665C-9CB1-BE15-90AE1016F448}"/>
               </a:ext>
             </a:extLst>
           </p:cNvPr>
@@ -9990,26 +7724,27 @@
         </p:nvPicPr>
         <p:blipFill>
           <a:blip r:embed="rId5"/>
+          <a:srcRect t="37206"/>
           <a:stretch>
             <a:fillRect/>
           </a:stretch>
         </p:blipFill>
         <p:spPr>
           <a:xfrm>
-            <a:off x="410509" y="3804260"/>
-            <a:ext cx="4220164" cy="1438476"/>
+            <a:off x="4572000" y="4962992"/>
+            <a:ext cx="4022102" cy="1699256"/>
           </a:xfrm>
           <a:prstGeom prst="rect">
             <a:avLst/>
           </a:prstGeom>
-          <a:ln>
-            <a:solidFill>
-              <a:schemeClr val="tx1"/>
-            </a:solidFill>
-          </a:ln>
         </p:spPr>
       </p:pic>
     </p:spTree>
+    <p:extLst>
+      <p:ext uri="{BB962C8B-B14F-4D97-AF65-F5344CB8AC3E}">
+        <p14:creationId xmlns:p14="http://schemas.microsoft.com/office/powerpoint/2010/main" val="2752612510"/>
+      </p:ext>
+    </p:extLst>
   </p:cSld>
   <p:clrMapOvr>
     <a:masterClrMapping/>
@@ -10036,263 +7771,337 @@
       </p:grpSpPr>
       <p:sp>
         <p:nvSpPr>
-          <p:cNvPr id="179" name="Shape 179"/>
-          <p:cNvSpPr>
-            <a:spLocks noGrp="1"/>
-          </p:cNvSpPr>
-          <p:nvPr>
-            <p:ph type="body" idx="1"/>
+          <p:cNvPr id="2" name="Title 1"/>
+          <p:cNvSpPr>
+            <a:spLocks noGrp="1"/>
+          </p:cNvSpPr>
+          <p:nvPr>
+            <p:ph type="title"/>
           </p:nvPr>
         </p:nvSpPr>
         <p:spPr>
           <a:xfrm>
-            <a:off x="457200" y="1600200"/>
-            <a:ext cx="8229600" cy="4525963"/>
+            <a:off x="457200" y="0"/>
+            <a:ext cx="8229600" cy="851770"/>
+          </a:xfrm>
+        </p:spPr>
+        <p:txBody>
+          <a:bodyPr/>
+          <a:lstStyle/>
+          <a:p>
+            <a:r>
+              <a:rPr lang="en-US" dirty="0"/>
+              <a:t>Interpreting a JUnit Test Failure</a:t>
+            </a:r>
+          </a:p>
+        </p:txBody>
+      </p:sp>
+      <p:pic>
+        <p:nvPicPr>
+          <p:cNvPr id="7" name="Picture 6">
+            <a:extLst>
+              <a:ext uri="{FF2B5EF4-FFF2-40B4-BE49-F238E27FC236}">
+                <a16:creationId xmlns:a16="http://schemas.microsoft.com/office/drawing/2014/main" id="{9428EE05-DB0F-CAF9-2747-C88ED2DA5F61}"/>
+              </a:ext>
+            </a:extLst>
+          </p:cNvPr>
+          <p:cNvPicPr>
+            <a:picLocks noChangeAspect="1"/>
+          </p:cNvPicPr>
+          <p:nvPr/>
+        </p:nvPicPr>
+        <p:blipFill>
+          <a:blip r:embed="rId3"/>
+          <a:stretch>
+            <a:fillRect/>
+          </a:stretch>
+        </p:blipFill>
+        <p:spPr>
+          <a:xfrm>
+            <a:off x="357187" y="851770"/>
+            <a:ext cx="8429625" cy="5706756"/>
           </a:xfrm>
           <a:prstGeom prst="rect">
             <a:avLst/>
           </a:prstGeom>
         </p:spPr>
-        <p:txBody>
-          <a:bodyPr/>
-          <a:lstStyle/>
-          <a:p>
-            <a:pPr lvl="0">
-              <a:lnSpc>
-                <a:spcPct val="80000"/>
-              </a:lnSpc>
-              <a:spcBef>
-                <a:spcPts val="600"/>
-              </a:spcBef>
-              <a:buFont typeface="Wingdings 3"/>
-              <a:buChar char=""/>
-              <a:defRPr sz="1800"/>
-            </a:pPr>
-            <a:r>
-              <a:rPr sz="2900" dirty="0"/>
-              <a:t>Debugging Java programs in Eclipse:</a:t>
-            </a:r>
-          </a:p>
-          <a:p>
-            <a:pPr lvl="1">
-              <a:lnSpc>
-                <a:spcPct val="80000"/>
-              </a:lnSpc>
-              <a:spcBef>
-                <a:spcPts val="600"/>
-              </a:spcBef>
-              <a:buFont typeface="Verdana"/>
-              <a:buChar char="◦"/>
-              <a:defRPr sz="1800"/>
-            </a:pPr>
-            <a:r>
-              <a:rPr lang="en-US" sz="2500" dirty="0"/>
-              <a:t>Set a breakpoint where you want to start</a:t>
-            </a:r>
-          </a:p>
-          <a:p>
-            <a:pPr marL="742950" lvl="1" indent="-285750">
-              <a:lnSpc>
-                <a:spcPct val="80000"/>
-              </a:lnSpc>
-              <a:spcBef>
-                <a:spcPts val="600"/>
-              </a:spcBef>
-              <a:buFont typeface="Verdana"/>
-              <a:buChar char="◦"/>
-              <a:defRPr sz="1800"/>
-            </a:pPr>
-            <a:endParaRPr lang="en-US" sz="2500" dirty="0"/>
-          </a:p>
-          <a:p>
-            <a:pPr marL="742950" lvl="1" indent="-285750">
-              <a:lnSpc>
-                <a:spcPct val="80000"/>
-              </a:lnSpc>
-              <a:spcBef>
-                <a:spcPts val="600"/>
-              </a:spcBef>
-              <a:buFont typeface="Verdana"/>
-              <a:buChar char="◦"/>
-              <a:defRPr sz="1800"/>
-            </a:pPr>
-            <a:r>
-              <a:rPr sz="2500" dirty="0"/>
-              <a:t>Launch using the </a:t>
-            </a:r>
-            <a:r>
-              <a:rPr lang="en-US" sz="2500" dirty="0"/>
-              <a:t>bug icon</a:t>
-            </a:r>
-            <a:endParaRPr sz="2500" dirty="0"/>
-          </a:p>
-          <a:p>
-            <a:pPr marL="457200" lvl="1" indent="0">
-              <a:lnSpc>
-                <a:spcPct val="80000"/>
-              </a:lnSpc>
-              <a:spcBef>
-                <a:spcPts val="600"/>
-              </a:spcBef>
-              <a:buNone/>
-              <a:defRPr sz="1800"/>
-            </a:pPr>
-            <a:endParaRPr sz="2500" dirty="0"/>
-          </a:p>
-          <a:p>
-            <a:pPr marL="742950" lvl="1" indent="-285750">
-              <a:lnSpc>
-                <a:spcPct val="80000"/>
-              </a:lnSpc>
-              <a:spcBef>
-                <a:spcPts val="600"/>
-              </a:spcBef>
-              <a:buFont typeface="Verdana"/>
-              <a:buChar char="◦"/>
-              <a:defRPr sz="1800"/>
-            </a:pPr>
-            <a:r>
-              <a:rPr sz="2500" dirty="0"/>
-              <a:t>Single stepping: </a:t>
-            </a:r>
-            <a:r>
-              <a:rPr sz="2500" i="1" dirty="0"/>
-              <a:t>step over </a:t>
-            </a:r>
-            <a:r>
-              <a:rPr sz="2500" dirty="0"/>
-              <a:t>and </a:t>
-            </a:r>
-            <a:r>
-              <a:rPr sz="2500" i="1" dirty="0"/>
-              <a:t>step into</a:t>
-            </a:r>
-            <a:endParaRPr sz="2500" dirty="0"/>
-          </a:p>
-          <a:p>
-            <a:pPr marL="742950" lvl="1" indent="-285750">
-              <a:lnSpc>
-                <a:spcPct val="80000"/>
-              </a:lnSpc>
-              <a:spcBef>
-                <a:spcPts val="600"/>
-              </a:spcBef>
-              <a:buFont typeface="Verdana"/>
-              <a:buChar char="◦"/>
-              <a:defRPr sz="1800"/>
-            </a:pPr>
-            <a:endParaRPr sz="2500" i="1" dirty="0"/>
-          </a:p>
-          <a:p>
-            <a:pPr marL="742950" lvl="1" indent="-285750">
-              <a:lnSpc>
-                <a:spcPct val="80000"/>
-              </a:lnSpc>
-              <a:spcBef>
-                <a:spcPts val="600"/>
-              </a:spcBef>
-              <a:buFont typeface="Verdana"/>
-              <a:buChar char="◦"/>
-              <a:defRPr sz="1800"/>
-            </a:pPr>
-            <a:r>
-              <a:rPr sz="2500" dirty="0"/>
-              <a:t>Inspecting variables</a:t>
-            </a:r>
-          </a:p>
-          <a:p>
-            <a:pPr marL="0" lvl="0" indent="0">
-              <a:lnSpc>
-                <a:spcPct val="80000"/>
-              </a:lnSpc>
-              <a:spcBef>
-                <a:spcPts val="600"/>
-              </a:spcBef>
-              <a:buNone/>
-              <a:defRPr sz="1800"/>
-            </a:pPr>
-            <a:endParaRPr sz="2900" dirty="0"/>
-          </a:p>
-        </p:txBody>
-      </p:sp>
-      <p:sp>
-        <p:nvSpPr>
-          <p:cNvPr id="180" name="Shape 180"/>
-          <p:cNvSpPr>
-            <a:spLocks noGrp="1"/>
-          </p:cNvSpPr>
-          <p:nvPr>
-            <p:ph type="title"/>
-          </p:nvPr>
+      </p:pic>
+      <p:sp>
+        <p:nvSpPr>
+          <p:cNvPr id="8" name="TextBox 7">
+            <a:extLst>
+              <a:ext uri="{FF2B5EF4-FFF2-40B4-BE49-F238E27FC236}">
+                <a16:creationId xmlns:a16="http://schemas.microsoft.com/office/drawing/2014/main" id="{076BD62A-84BC-E565-7F07-B6979198936D}"/>
+              </a:ext>
+            </a:extLst>
+          </p:cNvPr>
+          <p:cNvSpPr txBox="1"/>
+          <p:nvPr/>
         </p:nvSpPr>
         <p:spPr>
           <a:xfrm>
-            <a:off x="457200" y="188141"/>
-            <a:ext cx="8229600" cy="1143001"/>
+            <a:off x="1348017" y="5626264"/>
+            <a:ext cx="2590837" cy="369332"/>
           </a:xfrm>
           <a:prstGeom prst="rect">
             <a:avLst/>
           </a:prstGeom>
+          <a:solidFill>
+            <a:schemeClr val="bg1"/>
+          </a:solidFill>
         </p:spPr>
         <p:txBody>
-          <a:bodyPr/>
-          <a:lstStyle/>
-          <a:p>
-            <a:pPr lvl="0">
-              <a:defRPr sz="1800"/>
-            </a:pPr>
-            <a:r>
-              <a:rPr sz="4400" dirty="0"/>
-              <a:t>Debugging—Demo</a:t>
-            </a:r>
-          </a:p>
-        </p:txBody>
-      </p:sp>
-      <p:pic>
-        <p:nvPicPr>
-          <p:cNvPr id="1026" name="Picture 2" descr="Image result for step over debug icon"/>
-          <p:cNvPicPr>
-            <a:picLocks noChangeAspect="1" noChangeArrowheads="1"/>
-          </p:cNvPicPr>
-          <p:nvPr/>
-        </p:nvPicPr>
-        <p:blipFill>
-          <a:blip r:embed="rId3">
+          <a:bodyPr wrap="none" rtlCol="0">
+            <a:spAutoFit/>
+          </a:bodyPr>
+          <a:lstStyle/>
+          <a:p>
+            <a:r>
+              <a:rPr lang="en-US" dirty="0"/>
+              <a:t>1. Double-click failing test</a:t>
+            </a:r>
+          </a:p>
+        </p:txBody>
+      </p:sp>
+      <p:sp>
+        <p:nvSpPr>
+          <p:cNvPr id="10" name="TextBox 9">
             <a:extLst>
-              <a:ext uri="{28A0092B-C50C-407E-A947-70E740481C1C}">
-                <a14:useLocalDpi xmlns:a14="http://schemas.microsoft.com/office/drawing/2010/main" val="0"/>
+              <a:ext uri="{FF2B5EF4-FFF2-40B4-BE49-F238E27FC236}">
+                <a16:creationId xmlns:a16="http://schemas.microsoft.com/office/drawing/2014/main" id="{1A7B2227-1F7E-AFB1-C8D0-A77044D945A7}"/>
               </a:ext>
             </a:extLst>
-          </a:blip>
-          <a:srcRect/>
-          <a:stretch>
-            <a:fillRect/>
-          </a:stretch>
-        </p:blipFill>
-        <p:spPr bwMode="auto">
+          </p:cNvPr>
+          <p:cNvSpPr txBox="1"/>
+          <p:nvPr/>
+        </p:nvSpPr>
+        <p:spPr>
           <a:xfrm>
-            <a:off x="3992609" y="4088262"/>
-            <a:ext cx="4948191" cy="2364624"/>
+            <a:off x="4297980" y="5246925"/>
+            <a:ext cx="4186787" cy="369332"/>
           </a:xfrm>
           <a:prstGeom prst="rect">
             <a:avLst/>
           </a:prstGeom>
+          <a:solidFill>
+            <a:schemeClr val="bg1"/>
+          </a:solidFill>
+        </p:spPr>
+        <p:txBody>
+          <a:bodyPr wrap="none" rtlCol="0">
+            <a:spAutoFit/>
+          </a:bodyPr>
+          <a:lstStyle/>
+          <a:p>
+            <a:r>
+              <a:rPr lang="en-US" dirty="0"/>
+              <a:t>2. See expected vs. actual (if not </a:t>
+            </a:r>
+            <a:r>
+              <a:rPr lang="en-US" dirty="0" err="1"/>
+              <a:t>booleans</a:t>
+            </a:r>
+            <a:r>
+              <a:rPr lang="en-US" dirty="0"/>
+              <a:t>)</a:t>
+            </a:r>
+          </a:p>
+        </p:txBody>
+      </p:sp>
+      <p:sp>
+        <p:nvSpPr>
+          <p:cNvPr id="12" name="TextBox 11">
+            <a:extLst>
+              <a:ext uri="{FF2B5EF4-FFF2-40B4-BE49-F238E27FC236}">
+                <a16:creationId xmlns:a16="http://schemas.microsoft.com/office/drawing/2014/main" id="{1E98EC5A-9585-D61C-6AA2-763095C0F6AB}"/>
+              </a:ext>
+            </a:extLst>
+          </p:cNvPr>
+          <p:cNvSpPr txBox="1"/>
+          <p:nvPr/>
+        </p:nvSpPr>
+        <p:spPr>
+          <a:xfrm>
+            <a:off x="3089931" y="1380374"/>
+            <a:ext cx="5100051" cy="646331"/>
+          </a:xfrm>
+          <a:prstGeom prst="rect">
+            <a:avLst/>
+          </a:prstGeom>
+          <a:solidFill>
+            <a:schemeClr val="bg1"/>
+          </a:solidFill>
+        </p:spPr>
+        <p:txBody>
+          <a:bodyPr wrap="none" rtlCol="0">
+            <a:spAutoFit/>
+          </a:bodyPr>
+          <a:lstStyle/>
+          <a:p>
+            <a:r>
+              <a:rPr lang="en-US" dirty="0"/>
+              <a:t>3. See the assert that failed (and surrounding code), </a:t>
+            </a:r>
+            <a:br>
+              <a:rPr lang="en-US" dirty="0"/>
+            </a:br>
+            <a:r>
+              <a:rPr lang="en-US" dirty="0"/>
+              <a:t>then set a breakpoint and start debugging! </a:t>
+            </a:r>
+          </a:p>
+        </p:txBody>
+      </p:sp>
+      <p:sp>
+        <p:nvSpPr>
+          <p:cNvPr id="13" name="Oval 12">
+            <a:extLst>
+              <a:ext uri="{FF2B5EF4-FFF2-40B4-BE49-F238E27FC236}">
+                <a16:creationId xmlns:a16="http://schemas.microsoft.com/office/drawing/2014/main" id="{E0E9DF5B-E61A-D128-F664-2975D99C0CA4}"/>
+              </a:ext>
+            </a:extLst>
+          </p:cNvPr>
+          <p:cNvSpPr/>
+          <p:nvPr/>
+        </p:nvSpPr>
+        <p:spPr>
+          <a:xfrm>
+            <a:off x="4059044" y="5648566"/>
+            <a:ext cx="970156" cy="379966"/>
+          </a:xfrm>
+          <a:prstGeom prst="ellipse">
+            <a:avLst/>
+          </a:prstGeom>
           <a:noFill/>
-          <a:extLst>
-            <a:ext uri="{909E8E84-426E-40DD-AFC4-6F175D3DCCD1}">
-              <a14:hiddenFill xmlns:a14="http://schemas.microsoft.com/office/drawing/2010/main">
-                <a:solidFill>
-                  <a:srgbClr val="FFFFFF"/>
-                </a:solidFill>
-              </a14:hiddenFill>
-            </a:ext>
-          </a:extLst>
+          <a:ln w="28575">
+            <a:solidFill>
+              <a:srgbClr val="00B050"/>
+            </a:solidFill>
+          </a:ln>
         </p:spPr>
-      </p:pic>
+        <p:style>
+          <a:lnRef idx="1">
+            <a:schemeClr val="accent1"/>
+          </a:lnRef>
+          <a:fillRef idx="3">
+            <a:schemeClr val="accent1"/>
+          </a:fillRef>
+          <a:effectRef idx="2">
+            <a:schemeClr val="accent1"/>
+          </a:effectRef>
+          <a:fontRef idx="minor">
+            <a:schemeClr val="lt1"/>
+          </a:fontRef>
+        </p:style>
+        <p:txBody>
+          <a:bodyPr rtlCol="0" anchor="ctr"/>
+          <a:lstStyle/>
+          <a:p>
+            <a:pPr algn="ctr"/>
+            <a:endParaRPr lang="en-US"/>
+          </a:p>
+        </p:txBody>
+      </p:sp>
+      <p:sp>
+        <p:nvSpPr>
+          <p:cNvPr id="15" name="Oval 14">
+            <a:extLst>
+              <a:ext uri="{FF2B5EF4-FFF2-40B4-BE49-F238E27FC236}">
+                <a16:creationId xmlns:a16="http://schemas.microsoft.com/office/drawing/2014/main" id="{3848DC62-D8DA-83B8-2E78-D31BCD8ACC28}"/>
+              </a:ext>
+            </a:extLst>
+          </p:cNvPr>
+          <p:cNvSpPr/>
+          <p:nvPr/>
+        </p:nvSpPr>
+        <p:spPr>
+          <a:xfrm>
+            <a:off x="4544122" y="2461566"/>
+            <a:ext cx="970156" cy="379966"/>
+          </a:xfrm>
+          <a:prstGeom prst="ellipse">
+            <a:avLst/>
+          </a:prstGeom>
+          <a:noFill/>
+          <a:ln w="28575">
+            <a:solidFill>
+              <a:srgbClr val="00B050"/>
+            </a:solidFill>
+          </a:ln>
+        </p:spPr>
+        <p:style>
+          <a:lnRef idx="1">
+            <a:schemeClr val="accent1"/>
+          </a:lnRef>
+          <a:fillRef idx="3">
+            <a:schemeClr val="accent1"/>
+          </a:fillRef>
+          <a:effectRef idx="2">
+            <a:schemeClr val="accent1"/>
+          </a:effectRef>
+          <a:fontRef idx="minor">
+            <a:schemeClr val="lt1"/>
+          </a:fontRef>
+        </p:style>
+        <p:txBody>
+          <a:bodyPr rtlCol="0" anchor="ctr"/>
+          <a:lstStyle/>
+          <a:p>
+            <a:pPr algn="ctr"/>
+            <a:endParaRPr lang="en-US"/>
+          </a:p>
+        </p:txBody>
+      </p:sp>
+      <p:cxnSp>
+        <p:nvCxnSpPr>
+          <p:cNvPr id="17" name="Connector: Curved 16">
+            <a:extLst>
+              <a:ext uri="{FF2B5EF4-FFF2-40B4-BE49-F238E27FC236}">
+                <a16:creationId xmlns:a16="http://schemas.microsoft.com/office/drawing/2014/main" id="{5EC04ABA-F5C1-7BEC-932B-2196EA997DB2}"/>
+              </a:ext>
+            </a:extLst>
+          </p:cNvPr>
+          <p:cNvCxnSpPr>
+            <a:cxnSpLocks/>
+            <a:stCxn id="13" idx="1"/>
+            <a:endCxn id="15" idx="2"/>
+          </p:cNvCxnSpPr>
+          <p:nvPr/>
+        </p:nvCxnSpPr>
+        <p:spPr>
+          <a:xfrm rot="5400000" flipH="1" flipV="1">
+            <a:off x="2846290" y="4006379"/>
+            <a:ext cx="3052662" cy="343002"/>
+          </a:xfrm>
+          <a:prstGeom prst="curvedConnector2">
+            <a:avLst/>
+          </a:prstGeom>
+          <a:ln w="57150">
+            <a:solidFill>
+              <a:srgbClr val="00B050"/>
+            </a:solidFill>
+            <a:tailEnd type="triangle"/>
+          </a:ln>
+        </p:spPr>
+        <p:style>
+          <a:lnRef idx="2">
+            <a:schemeClr val="accent1"/>
+          </a:lnRef>
+          <a:fillRef idx="0">
+            <a:schemeClr val="accent1"/>
+          </a:fillRef>
+          <a:effectRef idx="1">
+            <a:schemeClr val="accent1"/>
+          </a:effectRef>
+          <a:fontRef idx="minor">
+            <a:schemeClr val="tx1"/>
+          </a:fontRef>
+        </p:style>
+      </p:cxnSp>
     </p:spTree>
     <p:extLst>
       <p:ext uri="{BB962C8B-B14F-4D97-AF65-F5344CB8AC3E}">
-        <p14:creationId xmlns:p14="http://schemas.microsoft.com/office/powerpoint/2010/main" val="831071102"/>
+        <p14:creationId xmlns:p14="http://schemas.microsoft.com/office/powerpoint/2010/main" val="1404785762"/>
       </p:ext>
     </p:extLst>
   </p:cSld>
@@ -10943,15 +8752,6 @@
 </file>
 
 <file path=customXml/item1.xml><?xml version="1.0" encoding="utf-8"?>
-<?mso-contentType ?>
-<FormTemplates xmlns="http://schemas.microsoft.com/sharepoint/v3/contenttype/forms">
-  <Display>DocumentLibraryForm</Display>
-  <Edit>DocumentLibraryForm</Edit>
-  <New>DocumentLibraryForm</New>
-</FormTemplates>
-</file>
-
-<file path=customXml/item2.xml><?xml version="1.0" encoding="utf-8"?>
 <ct:contentTypeSchema xmlns:ct="http://schemas.microsoft.com/office/2006/metadata/contentType" xmlns:ma="http://schemas.microsoft.com/office/2006/metadata/properties/metaAttributes" ct:_="" ma:_="" ma:contentTypeName="Document" ma:contentTypeID="0x0101004285D81DBE5F5A448E892B34D6B8CF20" ma:contentTypeVersion="2" ma:contentTypeDescription="Create a new document." ma:contentTypeScope="" ma:versionID="026ccaf10de5d9915dfa48c6db16b59b">
   <xsd:schema xmlns:xsd="http://www.w3.org/2001/XMLSchema" xmlns:xs="http://www.w3.org/2001/XMLSchema" xmlns:p="http://schemas.microsoft.com/office/2006/metadata/properties" xmlns:ns2="08600313-7276-4ca7-b5d3-7d86193ee0ac" targetNamespace="http://schemas.microsoft.com/office/2006/metadata/properties" ma:root="true" ma:fieldsID="c887e4ee215f388544e22a2030d7ea35" ns2:_="">
     <xsd:import namespace="08600313-7276-4ca7-b5d3-7d86193ee0ac"/>
@@ -11083,6 +8883,15 @@
 </ct:contentTypeSchema>
 </file>
 
+<file path=customXml/item2.xml><?xml version="1.0" encoding="utf-8"?>
+<?mso-contentType ?>
+<FormTemplates xmlns="http://schemas.microsoft.com/sharepoint/v3/contenttype/forms">
+  <Display>DocumentLibraryForm</Display>
+  <Edit>DocumentLibraryForm</Edit>
+  <New>DocumentLibraryForm</New>
+</FormTemplates>
+</file>
+
 <file path=customXml/item3.xml><?xml version="1.0" encoding="utf-8"?>
 <p:properties xmlns:p="http://schemas.microsoft.com/office/2006/metadata/properties" xmlns:xsi="http://www.w3.org/2001/XMLSchema-instance" xmlns:pc="http://schemas.microsoft.com/office/infopath/2007/PartnerControls">
   <documentManagement/>
@@ -11090,14 +8899,6 @@
 </file>
 
 <file path=customXml/itemProps1.xml><?xml version="1.0" encoding="utf-8"?>
-<ds:datastoreItem xmlns:ds="http://schemas.openxmlformats.org/officeDocument/2006/customXml" ds:itemID="{47B07C09-FF92-4115-A3C4-DCD45D83FCB5}">
-  <ds:schemaRefs>
-    <ds:schemaRef ds:uri="http://schemas.microsoft.com/sharepoint/v3/contenttype/forms"/>
-  </ds:schemaRefs>
-</ds:datastoreItem>
-</file>
-
-<file path=customXml/itemProps2.xml><?xml version="1.0" encoding="utf-8"?>
 <ds:datastoreItem xmlns:ds="http://schemas.openxmlformats.org/officeDocument/2006/customXml" ds:itemID="{00C38785-47E6-49BC-BFEC-57787567C3D0}">
   <ds:schemaRefs>
     <ds:schemaRef ds:uri="http://schemas.microsoft.com/office/2006/metadata/contentType"/>
@@ -11111,6 +8912,14 @@
     <ds:schemaRef ds:uri="http://purl.org/dc/elements/1.1/"/>
     <ds:schemaRef ds:uri="http://purl.org/dc/terms/"/>
     <ds:schemaRef ds:uri="http://schemas.microsoft.com/internal/obd"/>
+  </ds:schemaRefs>
+</ds:datastoreItem>
+</file>
+
+<file path=customXml/itemProps2.xml><?xml version="1.0" encoding="utf-8"?>
+<ds:datastoreItem xmlns:ds="http://schemas.openxmlformats.org/officeDocument/2006/customXml" ds:itemID="{47B07C09-FF92-4115-A3C4-DCD45D83FCB5}">
+  <ds:schemaRefs>
+    <ds:schemaRef ds:uri="http://schemas.microsoft.com/sharepoint/v3/contenttype/forms"/>
   </ds:schemaRefs>
 </ds:datastoreItem>
 </file>
